--- a/CC_ppt/CC_presentation.pptx
+++ b/CC_ppt/CC_presentation.pptx
@@ -37,6 +37,8 @@
     <p:sldId id="285" r:id="rId36"/>
     <p:sldId id="286" r:id="rId37"/>
     <p:sldId id="287" r:id="rId38"/>
+    <p:sldId id="288" r:id="rId39"/>
+    <p:sldId id="289" r:id="rId40"/>
   </p:sldIdLst>
   <p:sldSz cx="12191695" cy="6858000" type="screen4x3"/>
   <p:notesSz cx="6858000" cy="9144000"/>
@@ -5314,7 +5316,7 @@
                 </a:solidFill>
                 <a:latin typeface="Arial"/>
               </a:rPr>
-              <a:t>LEARN what a normal control looks like:  (1) fit a control-mean model on RCT controls,  (2) residualize,  (3) reduce to an estimand-aligned score.</a:t>
+              <a:t>LEARN what a normal control looks like:  (1) fit a control-mean model on RCT controls,  (2) residualize,  (3) reduce to an estimator-aligned score.</a:t>
             </a:r>
           </a:p>
           <a:p>
@@ -6126,7 +6128,7 @@
                 </a:solidFill>
                 <a:latin typeface="Arial"/>
               </a:rPr>
-              <a:t>Contrast score (aligned to the estimand c): most powerful when the drift is along c — global shifts, level changes.</a:t>
+              <a:t>Contrast score (c = the contrast through which the trajectory enters the estimator): most powerful when the drift is along c — global shifts, level changes.</a:t>
             </a:r>
           </a:p>
           <a:p>
@@ -6193,7 +6195,23 @@
                 </a:solidFill>
                 <a:latin typeface="Arial"/>
               </a:rPr>
-              <a:t>Choose the score to match the ANTICIPATED drift shape. A contrast blind to the drift will not detect it (we show this in simulation).</a:t>
+              <a:t>Match the score to (1) the functional the ESTIMATOR actually uses, and then (2) the ANTICIPATED drift shape. A contrast blind to the drift will not detect it.</a:t>
+            </a:r>
+          </a:p>
+          <a:p>
+            <a:pPr>
+              <a:spcAft>
+                <a:spcPts val="800"/>
+              </a:spcAft>
+            </a:pPr>
+            <a:r>
+              <a:rPr sz="1500" b="0" i="0">
+                <a:solidFill>
+                  <a:srgbClr val="6B7280"/>
+                </a:solidFill>
+                <a:latin typeface="Arial"/>
+              </a:rPr>
+              <a:t>Point (1) is not the same as “match the estimand” — that is the next two slides.</a:t>
             </a:r>
           </a:p>
         </p:txBody>
@@ -6340,7 +6358,7 @@
                 </a:solidFill>
                 <a:latin typeface="Arial"/>
               </a:rPr>
-              <a:t>Steps 4–5: covariate-shift weighting</a:t>
+              <a:t>Choosing c: the estimand does not fix the score</a:t>
             </a:r>
           </a:p>
         </p:txBody>
@@ -6397,8 +6415,8 @@
         </p:nvSpPr>
         <p:spPr>
           <a:xfrm>
-            <a:off x="502920" y="1371600"/>
-            <a:ext cx="6035040" cy="914400"/>
+            <a:off x="502920" y="1325880"/>
+            <a:ext cx="11247120" cy="5029200"/>
           </a:xfrm>
           <a:prstGeom prst="rect">
             <a:avLst/>
@@ -6412,340 +6430,207 @@
           <a:lstStyle/>
           <a:p>
             <a:pPr>
+              <a:spcBef>
+                <a:spcPts val="400"/>
+              </a:spcBef>
+              <a:spcAft>
+                <a:spcPts val="900"/>
+              </a:spcAft>
+            </a:pPr>
+            <a:r>
+              <a:rPr sz="1450" b="1" i="0">
+                <a:solidFill>
+                  <a:srgbClr val="2F7DC8"/>
+                </a:solidFill>
+                <a:latin typeface="Arial"/>
+              </a:rPr>
+              <a:t>Two things determine c — not one</a:t>
+            </a:r>
+          </a:p>
+          <a:p>
+            <a:pPr>
               <a:spcAft>
                 <a:spcPts val="800"/>
               </a:spcAft>
             </a:pPr>
             <a:r>
+              <a:rPr sz="1300" b="0" i="0">
+                <a:solidFill>
+                  <a:srgbClr val="333740"/>
+                </a:solidFill>
+                <a:latin typeface="Arial"/>
+              </a:rPr>
+              <a:t>(1) What the ESTIMAND of interest is.  (2) How much LONGITUDINAL INFORMATION we wish to borrow in estimating it. The second is routinely left implicit — and it is the one that actually decides c.</a:t>
+            </a:r>
+          </a:p>
+          <a:p>
+            <a:pPr>
+              <a:spcBef>
+                <a:spcPts val="400"/>
+              </a:spcBef>
+              <a:spcAft>
+                <a:spcPts val="900"/>
+              </a:spcAft>
+            </a:pPr>
+            <a:r>
               <a:rPr sz="1450" b="1" i="0">
                 <a:solidFill>
                   <a:srgbClr val="2F7DC8"/>
                 </a:solidFill>
                 <a:latin typeface="Arial"/>
               </a:rPr>
-              <a:t>▪  </a:t>
-            </a:r>
-            <a:r>
-              <a:rPr sz="1450" b="0" i="0">
+              <a:t>A last-visit ATE does NOT automatically give c = (−1,0,0,1)</a:t>
+            </a:r>
+          </a:p>
+          <a:p>
+            <a:pPr lvl="1">
+              <a:spcAft>
+                <a:spcPts val="600"/>
+              </a:spcAft>
+            </a:pPr>
+            <a:r>
+              <a:rPr sz="1200" b="0" i="0">
+                <a:solidFill>
+                  <a:srgbClr val="6B7280"/>
+                </a:solidFill>
+                <a:latin typeface="Arial"/>
+              </a:rPr>
+              <a:t>–  </a:t>
+            </a:r>
+            <a:r>
+              <a:rPr sz="1200" b="0" i="0">
                 <a:solidFill>
                   <a:srgbClr val="333740"/>
                 </a:solidFill>
                 <a:latin typeface="Arial"/>
               </a:rPr>
-              <a:t>Randomized and external covariate mixes differ, so we reweight the calibration ranks by the density ratio:</a:t>
-            </a:r>
-          </a:p>
-        </p:txBody>
-      </p:sp>
-      <p:sp>
-        <p:nvSpPr>
-          <p:cNvPr id="6" name="Rectangle 5"/>
-          <p:cNvSpPr/>
-          <p:nvPr/>
-        </p:nvSpPr>
-        <p:spPr>
-          <a:xfrm>
-            <a:off x="484632" y="2057400"/>
-            <a:ext cx="4647716" cy="749808"/>
-          </a:xfrm>
-          <a:prstGeom prst="rect">
-            <a:avLst/>
-          </a:prstGeom>
-          <a:solidFill>
-            <a:srgbClr val="F5F7FA"/>
-          </a:solidFill>
-          <a:ln>
-            <a:noFill/>
-          </a:ln>
-          <a:effectLst/>
-        </p:spPr>
-        <p:style>
-          <a:lnRef idx="1">
-            <a:schemeClr val="accent1"/>
-          </a:lnRef>
-          <a:fillRef idx="3">
-            <a:schemeClr val="accent1"/>
-          </a:fillRef>
-          <a:effectRef idx="2">
-            <a:schemeClr val="accent1"/>
-          </a:effectRef>
-          <a:fontRef idx="minor">
-            <a:schemeClr val="lt1"/>
-          </a:fontRef>
-        </p:style>
-        <p:txBody>
-          <a:bodyPr rtlCol="0" anchor="ctr"/>
-          <a:lstStyle/>
-          <a:p>
-            <a:pPr algn="ctr"/>
-          </a:p>
-        </p:txBody>
-      </p:sp>
-      <p:pic>
-        <p:nvPicPr>
-          <p:cNvPr id="7" name="Picture 6" descr="eq_omega.png"/>
-          <p:cNvPicPr>
-            <a:picLocks noChangeAspect="1"/>
-          </p:cNvPicPr>
-          <p:nvPr/>
-        </p:nvPicPr>
-        <p:blipFill>
-          <a:blip r:embed="rId2"/>
-          <a:stretch>
-            <a:fillRect/>
-          </a:stretch>
-        </p:blipFill>
-        <p:spPr>
-          <a:xfrm>
-            <a:off x="594360" y="2148840"/>
-            <a:ext cx="4428260" cy="566928"/>
-          </a:xfrm>
-          <a:prstGeom prst="rect">
-            <a:avLst/>
-          </a:prstGeom>
-        </p:spPr>
-      </p:pic>
-      <p:sp>
-        <p:nvSpPr>
-          <p:cNvPr id="8" name="Rectangle 7"/>
-          <p:cNvSpPr/>
-          <p:nvPr/>
-        </p:nvSpPr>
-        <p:spPr>
-          <a:xfrm>
-            <a:off x="484632" y="2788920"/>
-            <a:ext cx="4765852" cy="1188720"/>
-          </a:xfrm>
-          <a:prstGeom prst="rect">
-            <a:avLst/>
-          </a:prstGeom>
-          <a:solidFill>
-            <a:srgbClr val="F5F7FA"/>
-          </a:solidFill>
-          <a:ln>
-            <a:noFill/>
-          </a:ln>
-          <a:effectLst/>
-        </p:spPr>
-        <p:style>
-          <a:lnRef idx="1">
-            <a:schemeClr val="accent1"/>
-          </a:lnRef>
-          <a:fillRef idx="3">
-            <a:schemeClr val="accent1"/>
-          </a:fillRef>
-          <a:effectRef idx="2">
-            <a:schemeClr val="accent1"/>
-          </a:effectRef>
-          <a:fontRef idx="minor">
-            <a:schemeClr val="lt1"/>
-          </a:fontRef>
-        </p:style>
-        <p:txBody>
-          <a:bodyPr rtlCol="0" anchor="ctr"/>
-          <a:lstStyle/>
-          <a:p>
-            <a:pPr algn="ctr"/>
-          </a:p>
-        </p:txBody>
-      </p:sp>
-      <p:pic>
-        <p:nvPicPr>
-          <p:cNvPr id="9" name="Picture 8" descr="eq_wpval.png"/>
-          <p:cNvPicPr>
-            <a:picLocks noChangeAspect="1"/>
-          </p:cNvPicPr>
-          <p:nvPr/>
-        </p:nvPicPr>
-        <p:blipFill>
-          <a:blip r:embed="rId3"/>
-          <a:stretch>
-            <a:fillRect/>
-          </a:stretch>
-        </p:blipFill>
-        <p:spPr>
-          <a:xfrm>
-            <a:off x="594360" y="2880360"/>
-            <a:ext cx="4546396" cy="1005840"/>
-          </a:xfrm>
-          <a:prstGeom prst="rect">
-            <a:avLst/>
-          </a:prstGeom>
-        </p:spPr>
-      </p:pic>
-      <p:sp>
-        <p:nvSpPr>
-          <p:cNvPr id="10" name="TextBox 9"/>
-          <p:cNvSpPr txBox="1"/>
-          <p:nvPr/>
-        </p:nvSpPr>
-        <p:spPr>
-          <a:xfrm>
-            <a:off x="502920" y="3977639"/>
-            <a:ext cx="6126480" cy="731520"/>
-          </a:xfrm>
-          <a:prstGeom prst="rect">
-            <a:avLst/>
-          </a:prstGeom>
-          <a:noFill/>
-        </p:spPr>
-        <p:txBody>
-          <a:bodyPr wrap="square" anchor="t">
-            <a:spAutoFit/>
-          </a:bodyPr>
-          <a:lstStyle/>
-          <a:p>
-            <a:pPr>
-              <a:spcAft>
-                <a:spcPts val="800"/>
-              </a:spcAft>
-            </a:pPr>
-            <a:r>
-              <a:rPr sz="1350" b="0" i="0">
+              <a:t>If NO longitudinal structure is imposed and the last-visit outcomes are fully observed: the most direct estimator uses only the final outcomes. The earlier visits do not participate in estimating the last-visit mean → the score may target the final visit alone.</a:t>
+            </a:r>
+          </a:p>
+          <a:p>
+            <a:pPr lvl="1">
+              <a:spcAft>
+                <a:spcPts val="600"/>
+              </a:spcAft>
+            </a:pPr>
+            <a:r>
+              <a:rPr sz="1200" b="0" i="0">
+                <a:solidFill>
+                  <a:srgbClr val="6B7280"/>
+                </a:solidFill>
+                <a:latin typeface="Arial"/>
+              </a:rPr>
+              <a:t>–  </a:t>
+            </a:r>
+            <a:r>
+              <a:rPr sz="1200" b="0" i="0">
                 <a:solidFill>
                   <a:srgbClr val="333740"/>
                 </a:solidFill>
                 <a:latin typeface="Arial"/>
               </a:rPr>
-              <a:t>Transport identity — weighted RCT scores represent the compatible-EC score law:</a:t>
-            </a:r>
-          </a:p>
-        </p:txBody>
-      </p:sp>
-      <p:sp>
-        <p:nvSpPr>
-          <p:cNvPr id="11" name="Rectangle 10"/>
-          <p:cNvSpPr/>
-          <p:nvPr/>
-        </p:nvSpPr>
-        <p:spPr>
-          <a:xfrm>
-            <a:off x="484632" y="4633617"/>
-            <a:ext cx="6254496" cy="608285"/>
-          </a:xfrm>
-          <a:prstGeom prst="rect">
-            <a:avLst/>
-          </a:prstGeom>
-          <a:solidFill>
-            <a:srgbClr val="F5F7FA"/>
-          </a:solidFill>
-          <a:ln>
-            <a:noFill/>
-          </a:ln>
-          <a:effectLst/>
-        </p:spPr>
-        <p:style>
-          <a:lnRef idx="1">
-            <a:schemeClr val="accent1"/>
-          </a:lnRef>
-          <a:fillRef idx="3">
-            <a:schemeClr val="accent1"/>
-          </a:fillRef>
-          <a:effectRef idx="2">
-            <a:schemeClr val="accent1"/>
-          </a:effectRef>
-          <a:fontRef idx="minor">
-            <a:schemeClr val="lt1"/>
-          </a:fontRef>
-        </p:style>
-        <p:txBody>
-          <a:bodyPr rtlCol="0" anchor="ctr"/>
-          <a:lstStyle/>
-          <a:p>
-            <a:pPr algn="ctr"/>
-          </a:p>
-        </p:txBody>
-      </p:sp>
-      <p:pic>
-        <p:nvPicPr>
-          <p:cNvPr id="12" name="Picture 11" descr="eq_transport.png"/>
-          <p:cNvPicPr>
-            <a:picLocks noChangeAspect="1"/>
-          </p:cNvPicPr>
-          <p:nvPr/>
-        </p:nvPicPr>
-        <p:blipFill>
-          <a:blip r:embed="rId4"/>
-          <a:stretch>
-            <a:fillRect/>
-          </a:stretch>
-        </p:blipFill>
-        <p:spPr>
-          <a:xfrm>
-            <a:off x="594360" y="4725057"/>
-            <a:ext cx="6035040" cy="425405"/>
-          </a:xfrm>
-          <a:prstGeom prst="rect">
-            <a:avLst/>
-          </a:prstGeom>
-        </p:spPr>
-      </p:pic>
-      <p:sp>
-        <p:nvSpPr>
-          <p:cNvPr id="13" name="TextBox 12"/>
-          <p:cNvSpPr txBox="1"/>
-          <p:nvPr/>
-        </p:nvSpPr>
-        <p:spPr>
-          <a:xfrm>
-            <a:off x="502920" y="5440680"/>
-            <a:ext cx="6126480" cy="1005840"/>
-          </a:xfrm>
-          <a:prstGeom prst="rect">
-            <a:avLst/>
-          </a:prstGeom>
-          <a:noFill/>
-        </p:spPr>
-        <p:txBody>
-          <a:bodyPr wrap="square" anchor="t">
-            <a:spAutoFit/>
-          </a:bodyPr>
-          <a:lstStyle/>
-          <a:p>
-            <a:pPr>
-              <a:spcAft>
-                <a:spcPts val="800"/>
-              </a:spcAft>
-            </a:pPr>
-            <a:r>
-              <a:rPr sz="1350" b="1" i="0">
-                <a:solidFill>
-                  <a:srgbClr val="1F2A44"/>
-                </a:solidFill>
-                <a:latin typeface="Arial"/>
-              </a:rPr>
-              <a:t>Without weighting, high-severity compatible ECs look “extreme” only because they are over-represented externally → false exclusions. Weighting removes exactly this (right).</a:t>
-            </a:r>
-          </a:p>
-        </p:txBody>
-      </p:sp>
-      <p:pic>
-        <p:nvPicPr>
-          <p:cNvPr id="14" name="Picture 13" descr="fig_shift.png"/>
-          <p:cNvPicPr>
-            <a:picLocks noChangeAspect="1"/>
-          </p:cNvPicPr>
-          <p:nvPr/>
-        </p:nvPicPr>
-        <p:blipFill>
-          <a:blip r:embed="rId5"/>
-          <a:stretch>
-            <a:fillRect/>
-          </a:stretch>
-        </p:blipFill>
-        <p:spPr>
-          <a:xfrm>
-            <a:off x="6583680" y="2185746"/>
-            <a:ext cx="5120640" cy="3400906"/>
-          </a:xfrm>
-          <a:prstGeom prst="rect">
-            <a:avLst/>
-          </a:prstGeom>
-        </p:spPr>
-      </p:pic>
-      <p:sp>
-        <p:nvSpPr>
-          <p:cNvPr id="15" name="TextBox 14"/>
+              <a:t>If longitudinal structure IS imposed — to improve the efficiency of the last-visit ATE — then the earlier visits directly affect the final estimate → the score must reflect whole-trajectory information.</a:t>
+            </a:r>
+          </a:p>
+          <a:p>
+            <a:pPr>
+              <a:spcBef>
+                <a:spcPts val="400"/>
+              </a:spcBef>
+              <a:spcAft>
+                <a:spcPts val="900"/>
+              </a:spcAft>
+            </a:pPr>
+            <a:r>
+              <a:rPr sz="1450" b="1" i="0">
+                <a:solidFill>
+                  <a:srgbClr val="2F7DC8"/>
+                </a:solidFill>
+                <a:latin typeface="Arial"/>
+              </a:rPr>
+              <a:t>Three ways the earlier visits get in</a:t>
+            </a:r>
+          </a:p>
+          <a:p>
+            <a:pPr lvl="1">
+              <a:spcAft>
+                <a:spcPts val="600"/>
+              </a:spcAft>
+            </a:pPr>
+            <a:r>
+              <a:rPr sz="1200" b="0" i="0">
+                <a:solidFill>
+                  <a:srgbClr val="6B7280"/>
+                </a:solidFill>
+                <a:latin typeface="Arial"/>
+              </a:rPr>
+              <a:t>–  </a:t>
+            </a:r>
+            <a:r>
+              <a:rPr sz="1200" b="0" i="0">
+                <a:solidFill>
+                  <a:srgbClr val="333740"/>
+                </a:solidFill>
+                <a:latin typeface="Arial"/>
+              </a:rPr>
+              <a:t>Repeated-measures GLS: if some covariate effects are assumed constant across visits, all visits are used jointly to estimate those shared parameters — which in turn determine the last-visit mean.</a:t>
+            </a:r>
+          </a:p>
+          <a:p>
+            <a:pPr lvl="1">
+              <a:spcAft>
+                <a:spcPts val="600"/>
+              </a:spcAft>
+            </a:pPr>
+            <a:r>
+              <a:rPr sz="1200" b="0" i="0">
+                <a:solidFill>
+                  <a:srgbClr val="6B7280"/>
+                </a:solidFill>
+                <a:latin typeface="Arial"/>
+              </a:rPr>
+              <a:t>–  </a:t>
+            </a:r>
+            <a:r>
+              <a:rPr sz="1200" b="0" i="0">
+                <a:solidFill>
+                  <a:srgbClr val="333740"/>
+                </a:solidFill>
+                <a:latin typeface="Arial"/>
+              </a:rPr>
+              <a:t>MMRM under missingness: the earlier repeated measurements help learn the longitudinal association, then used to predict or recover missing final outcomes.</a:t>
+            </a:r>
+          </a:p>
+          <a:p>
+            <a:pPr lvl="1">
+              <a:spcAft>
+                <a:spcPts val="600"/>
+              </a:spcAft>
+            </a:pPr>
+            <a:r>
+              <a:rPr sz="1200" b="0" i="0">
+                <a:solidFill>
+                  <a:srgbClr val="6B7280"/>
+                </a:solidFill>
+                <a:latin typeface="Arial"/>
+              </a:rPr>
+              <a:t>–  </a:t>
+            </a:r>
+            <a:r>
+              <a:rPr sz="1200" b="0" i="0">
+                <a:solidFill>
+                  <a:srgbClr val="333740"/>
+                </a:solidFill>
+                <a:latin typeface="Arial"/>
+              </a:rPr>
+              <a:t>Assumed shared trajectory (e.g. the mean is linear in t): all visits jointly estimate the trajectory parameters, and the last-visit mean is a function of them.</a:t>
+            </a:r>
+          </a:p>
+        </p:txBody>
+      </p:sp>
+      <p:sp>
+        <p:nvSpPr>
+          <p:cNvPr id="6" name="TextBox 5"/>
           <p:cNvSpPr txBox="1"/>
           <p:nvPr/>
         </p:nvSpPr>
@@ -6885,7 +6770,7 @@
                 </a:solidFill>
                 <a:latin typeface="Arial"/>
               </a:rPr>
-              <a:t>Steps 6–7: from a one-time split to cross-fit (CV+)</a:t>
+              <a:t>The operative question — and the rule it implies</a:t>
             </a:r>
           </a:p>
         </p:txBody>
@@ -6942,8 +6827,8 @@
         </p:nvSpPr>
         <p:spPr>
           <a:xfrm>
-            <a:off x="502920" y="1417320"/>
-            <a:ext cx="5943600" cy="1463040"/>
+            <a:off x="502920" y="1325880"/>
+            <a:ext cx="11247120" cy="2377440"/>
           </a:xfrm>
           <a:prstGeom prst="rect">
             <a:avLst/>
@@ -6957,27 +6842,56 @@
           <a:lstStyle/>
           <a:p>
             <a:pPr>
+              <a:spcBef>
+                <a:spcPts val="400"/>
+              </a:spcBef>
+              <a:spcAft>
+                <a:spcPts val="900"/>
+              </a:spcAft>
+            </a:pPr>
+            <a:r>
+              <a:rPr sz="1450" b="1" i="0">
+                <a:solidFill>
+                  <a:srgbClr val="2F7DC8"/>
+                </a:solidFill>
+                <a:latin typeface="Arial"/>
+              </a:rPr>
+              <a:t>Agreement at the final visit is not sufficient</a:t>
+            </a:r>
+          </a:p>
+          <a:p>
+            <a:pPr>
               <a:spcAft>
                 <a:spcPts val="800"/>
               </a:spcAft>
             </a:pPr>
             <a:r>
-              <a:rPr sz="1500" b="1" i="0">
+              <a:rPr sz="1300" b="0" i="0">
+                <a:solidFill>
+                  <a:srgbClr val="333740"/>
+                </a:solidFill>
+                <a:latin typeface="Arial"/>
+              </a:rPr>
+              <a:t>Even if the randomized and external controls have EXACTLY the same mean at the last visit, differences at intermediate visits can still corrupt the longitudinal structure used to estimate the last-visit ATE — and thereby the estimator. Checking the first-to-last contrast alone would never see it.</a:t>
+            </a:r>
+          </a:p>
+          <a:p>
+            <a:pPr>
+              <a:spcBef>
+                <a:spcPts val="400"/>
+              </a:spcBef>
+              <a:spcAft>
+                <a:spcPts val="900"/>
+              </a:spcAft>
+            </a:pPr>
+            <a:r>
+              <a:rPr sz="1450" b="1" i="0">
                 <a:solidFill>
                   <a:srgbClr val="2F7DC8"/>
                 </a:solidFill>
                 <a:latin typeface="Arial"/>
               </a:rPr>
-              <a:t>▪  </a:t>
-            </a:r>
-            <a:r>
-              <a:rPr sz="1500" b="0" i="0">
-                <a:solidFill>
-                  <a:srgbClr val="333740"/>
-                </a:solidFill>
-                <a:latin typeface="Arial"/>
-              </a:rPr>
-              <a:t>A single train/calibrate split wastes half of the already-scarce randomized controls.</a:t>
+              <a:t>So the real question is not “are the last visits the same?”</a:t>
             </a:r>
           </a:p>
           <a:p>
@@ -6987,36 +6901,69 @@
               </a:spcAft>
             </a:pPr>
             <a:r>
-              <a:rPr sz="1500" b="1" i="0">
+              <a:rPr sz="1300" b="1" i="0">
+                <a:solidFill>
+                  <a:srgbClr val="1F2A44"/>
+                </a:solidFill>
+                <a:latin typeface="Arial"/>
+              </a:rPr>
+              <a:t>It is: DO THE INTERMEDIATE VISITS ENTER AND INFLUENCE THE ESTIMATION OF THE LAST-VISIT ATE? If we choose to exploit them for efficiency, they are part of the estimator — and must therefore be part of the compatibility assessment. Only if we do not use them at all is whole-trajectory compatibility unnecessary.</a:t>
+            </a:r>
+          </a:p>
+        </p:txBody>
+      </p:sp>
+      <p:sp>
+        <p:nvSpPr>
+          <p:cNvPr id="6" name="TextBox 5"/>
+          <p:cNvSpPr txBox="1"/>
+          <p:nvPr/>
+        </p:nvSpPr>
+        <p:spPr>
+          <a:xfrm>
+            <a:off x="502920" y="3794760"/>
+            <a:ext cx="11247120" cy="365760"/>
+          </a:xfrm>
+          <a:prstGeom prst="rect">
+            <a:avLst/>
+          </a:prstGeom>
+          <a:noFill/>
+        </p:spPr>
+        <p:txBody>
+          <a:bodyPr wrap="square" anchor="t">
+            <a:spAutoFit/>
+          </a:bodyPr>
+          <a:lstStyle/>
+          <a:p>
+            <a:pPr>
+              <a:spcBef>
+                <a:spcPts val="400"/>
+              </a:spcBef>
+              <a:spcAft>
+                <a:spcPts val="900"/>
+              </a:spcAft>
+            </a:pPr>
+            <a:r>
+              <a:rPr sz="1450" b="1" i="0">
                 <a:solidFill>
                   <a:srgbClr val="2F7DC8"/>
                 </a:solidFill>
                 <a:latin typeface="Arial"/>
               </a:rPr>
-              <a:t>▪  </a:t>
-            </a:r>
-            <a:r>
-              <a:rPr sz="1500" b="0" i="0">
-                <a:solidFill>
-                  <a:srgbClr val="333740"/>
-                </a:solidFill>
-                <a:latin typeface="Arial"/>
-              </a:rPr>
-              <a:t>CV+ scores each fold from a model fit on the other folds:</a:t>
-            </a:r>
-          </a:p>
-        </p:txBody>
-      </p:sp>
-      <p:sp>
-        <p:nvSpPr>
-          <p:cNvPr id="6" name="Rectangle 5"/>
+              <a:t>The rule: when the estimator touches the control trajectories through a′Ȳ₀ —</a:t>
+            </a:r>
+          </a:p>
+        </p:txBody>
+      </p:sp>
+      <p:sp>
+        <p:nvSpPr>
+          <p:cNvPr id="7" name="Rectangle 6"/>
           <p:cNvSpPr/>
           <p:nvPr/>
         </p:nvSpPr>
         <p:spPr>
           <a:xfrm>
-            <a:off x="484632" y="2881240"/>
-            <a:ext cx="6071616" cy="656606"/>
+            <a:off x="530352" y="4096512"/>
+            <a:ext cx="3723436" cy="896112"/>
           </a:xfrm>
           <a:prstGeom prst="rect">
             <a:avLst/>
@@ -7053,7 +7000,7 @@
       </p:sp>
       <p:pic>
         <p:nvPicPr>
-          <p:cNvPr id="7" name="Picture 6" descr="eq_cv.png"/>
+          <p:cNvPr id="8" name="Picture 7" descr="eq_afunc.png"/>
           <p:cNvPicPr>
             <a:picLocks noChangeAspect="1"/>
           </p:cNvPicPr>
@@ -7067,8 +7014,8 @@
         </p:blipFill>
         <p:spPr>
           <a:xfrm>
-            <a:off x="594360" y="2972680"/>
-            <a:ext cx="5852160" cy="473726"/>
+            <a:off x="640080" y="4187952"/>
+            <a:ext cx="3503980" cy="713232"/>
           </a:xfrm>
           <a:prstGeom prst="rect">
             <a:avLst/>
@@ -7077,14 +7024,14 @@
       </p:pic>
       <p:sp>
         <p:nvSpPr>
-          <p:cNvPr id="8" name="TextBox 7"/>
+          <p:cNvPr id="9" name="TextBox 8"/>
           <p:cNvSpPr txBox="1"/>
           <p:nvPr/>
         </p:nvSpPr>
         <p:spPr>
           <a:xfrm>
-            <a:off x="502920" y="3749039"/>
-            <a:ext cx="6035040" cy="2377440"/>
+            <a:off x="502920" y="4892040"/>
+            <a:ext cx="11247120" cy="1645920"/>
           </a:xfrm>
           <a:prstGeom prst="rect">
             <a:avLst/>
@@ -7097,63 +7044,98 @@
           </a:bodyPr>
           <a:lstStyle/>
           <a:p>
+            <a:pPr lvl="1">
+              <a:spcAft>
+                <a:spcPts val="600"/>
+              </a:spcAft>
+            </a:pPr>
+            <a:r>
+              <a:rPr sz="1150" b="0" i="0">
+                <a:solidFill>
+                  <a:srgbClr val="6B7280"/>
+                </a:solidFill>
+                <a:latin typeface="Arial"/>
+              </a:rPr>
+              <a:t>–  </a:t>
+            </a:r>
+            <a:r>
+              <a:rPr sz="1150" b="0" i="0">
+                <a:solidFill>
+                  <a:srgbClr val="333740"/>
+                </a:solidFill>
+                <a:latin typeface="Arial"/>
+              </a:rPr>
+              <a:t>final-outcomes-only:  a = (0,0,0,1)  →  c collapses onto the last visit</a:t>
+            </a:r>
+          </a:p>
+          <a:p>
+            <a:pPr lvl="1">
+              <a:spcAft>
+                <a:spcPts val="600"/>
+              </a:spcAft>
+            </a:pPr>
+            <a:r>
+              <a:rPr sz="1150" b="0" i="0">
+                <a:solidFill>
+                  <a:srgbClr val="6B7280"/>
+                </a:solidFill>
+                <a:latin typeface="Arial"/>
+              </a:rPr>
+              <a:t>–  </a:t>
+            </a:r>
+            <a:r>
+              <a:rPr sz="1150" b="0" i="0">
+                <a:solidFill>
+                  <a:srgbClr val="333740"/>
+                </a:solidFill>
+                <a:latin typeface="Arial"/>
+              </a:rPr>
+              <a:t>assumed linear trajectory:  the fitted last-visit mean is α̂ + β̂ × (last visit time), and α̂, β̂ are linear in ALL visit means → a spans them</a:t>
+            </a:r>
+          </a:p>
+          <a:p>
+            <a:pPr lvl="1">
+              <a:spcAft>
+                <a:spcPts val="600"/>
+              </a:spcAft>
+            </a:pPr>
+            <a:r>
+              <a:rPr sz="1150" b="0" i="0">
+                <a:solidFill>
+                  <a:srgbClr val="6B7280"/>
+                </a:solidFill>
+                <a:latin typeface="Arial"/>
+              </a:rPr>
+              <a:t>–  </a:t>
+            </a:r>
+            <a:r>
+              <a:rPr sz="1150" b="0" i="0">
+                <a:solidFill>
+                  <a:srgbClr val="333740"/>
+                </a:solidFill>
+                <a:latin typeface="Arial"/>
+              </a:rPr>
+              <a:t>GLS / MMRM:  a is induced by the working covariance and the shared-parameter constraints → generically nonzero at every visit</a:t>
+            </a:r>
+          </a:p>
+          <a:p>
             <a:pPr>
               <a:spcAft>
                 <a:spcPts val="800"/>
               </a:spcAft>
             </a:pPr>
             <a:r>
-              <a:rPr sz="1500" b="0" i="0">
-                <a:solidFill>
-                  <a:srgbClr val="333740"/>
-                </a:solidFill>
-                <a:latin typeface="Arial"/>
-              </a:rPr>
-              <a:t>Every randomized control eventually contributes a calibration rank  →  the WHOLE control sample is used.</a:t>
-            </a:r>
-          </a:p>
-          <a:p>
-            <a:pPr>
-              <a:spcAft>
-                <a:spcPts val="800"/>
-              </a:spcAft>
-            </a:pPr>
-            <a:r>
-              <a:rPr sz="1500" b="1" i="0">
-                <a:solidFill>
-                  <a:srgbClr val="1F2A44"/>
-                </a:solidFill>
-                <a:latin typeface="Arial"/>
-              </a:rPr>
-              <a:t>This is the main efficiency lever of the method — we quantify the gain in the simulation (≈ +0.06 power at controlled type-I).</a:t>
-            </a:r>
-          </a:p>
-        </p:txBody>
-      </p:sp>
-      <p:pic>
-        <p:nvPicPr>
-          <p:cNvPr id="9" name="Picture 8" descr="fig_cv.png"/>
-          <p:cNvPicPr>
-            <a:picLocks noChangeAspect="1"/>
-          </p:cNvPicPr>
-          <p:nvPr/>
-        </p:nvPicPr>
-        <p:blipFill>
-          <a:blip r:embed="rId3"/>
-          <a:stretch>
-            <a:fillRect/>
-          </a:stretch>
-        </p:blipFill>
-        <p:spPr>
-          <a:xfrm>
-            <a:off x="6446520" y="2110897"/>
-            <a:ext cx="5349240" cy="3550605"/>
-          </a:xfrm>
-          <a:prstGeom prst="rect">
-            <a:avLst/>
-          </a:prstGeom>
-        </p:spPr>
-      </p:pic>
+              <a:rPr sz="1250" b="1" i="0">
+                <a:solidFill>
+                  <a:srgbClr val="3E7A1E"/>
+                </a:solidFill>
+                <a:latin typeface="Arial"/>
+              </a:rPr>
+              <a:t>Consequence: compatibility is a property of the (estimand, ESTIMATOR) pair — not of the estimand alone.</a:t>
+            </a:r>
+          </a:p>
+        </p:txBody>
+      </p:sp>
       <p:sp>
         <p:nvSpPr>
           <p:cNvPr id="10" name="TextBox 9"/>
@@ -7468,7 +7450,7 @@
                 </a:solidFill>
                 <a:latin typeface="Arial"/>
               </a:rPr>
-              <a:t>Step 8: conservative screening — symmetric + adaptive γ</a:t>
+              <a:t>Steps 4–5: covariate-shift weighting</a:t>
             </a:r>
           </a:p>
         </p:txBody>
@@ -7526,7 +7508,7 @@
         <p:spPr>
           <a:xfrm>
             <a:off x="502920" y="1371600"/>
-            <a:ext cx="6035040" cy="1463040"/>
+            <a:ext cx="6035040" cy="914400"/>
           </a:xfrm>
           <a:prstGeom prst="rect">
             <a:avLst/>
@@ -7540,36 +7522,17 @@
           <a:lstStyle/>
           <a:p>
             <a:pPr>
-              <a:spcBef>
-                <a:spcPts val="400"/>
-              </a:spcBef>
-              <a:spcAft>
-                <a:spcPts val="900"/>
-              </a:spcAft>
-            </a:pPr>
-            <a:r>
-              <a:rPr sz="1600" b="1" i="0">
+              <a:spcAft>
+                <a:spcPts val="800"/>
+              </a:spcAft>
+            </a:pPr>
+            <a:r>
+              <a:rPr sz="1450" b="1" i="0">
                 <a:solidFill>
                   <a:srgbClr val="2F7DC8"/>
                 </a:solidFill>
                 <a:latin typeface="Arial"/>
               </a:rPr>
-              <a:t>Symmetric trimming (keeps the borrowed mean unbiased)</a:t>
-            </a:r>
-          </a:p>
-          <a:p>
-            <a:pPr>
-              <a:spcAft>
-                <a:spcPts val="800"/>
-              </a:spcAft>
-            </a:pPr>
-            <a:r>
-              <a:rPr sz="1450" b="1" i="0">
-                <a:solidFill>
-                  <a:srgbClr val="2F7DC8"/>
-                </a:solidFill>
-                <a:latin typeface="Arial"/>
-              </a:rPr>
               <a:t>▪  </a:t>
             </a:r>
             <a:r>
@@ -7579,7 +7542,7 @@
                 </a:solidFill>
                 <a:latin typeface="Arial"/>
               </a:rPr>
-              <a:t>Screen on |V| with a SINGLE threshold, trimming both tails equally:</a:t>
+              <a:t>Randomized and external covariate mixes differ, so we reweight the calibration ranks by the density ratio:</a:t>
             </a:r>
           </a:p>
         </p:txBody>
@@ -7592,8 +7555,8 @@
         </p:nvSpPr>
         <p:spPr>
           <a:xfrm>
-            <a:off x="484632" y="2697791"/>
-            <a:ext cx="6163056" cy="657745"/>
+            <a:off x="484632" y="2057400"/>
+            <a:ext cx="4647716" cy="749808"/>
           </a:xfrm>
           <a:prstGeom prst="rect">
             <a:avLst/>
@@ -7630,7 +7593,7 @@
       </p:sp>
       <p:pic>
         <p:nvPicPr>
-          <p:cNvPr id="7" name="Picture 6" descr="eq_symscreen.png"/>
+          <p:cNvPr id="7" name="Picture 6" descr="eq_omega.png"/>
           <p:cNvPicPr>
             <a:picLocks noChangeAspect="1"/>
           </p:cNvPicPr>
@@ -7644,8 +7607,8 @@
         </p:blipFill>
         <p:spPr>
           <a:xfrm>
-            <a:off x="594360" y="2789231"/>
-            <a:ext cx="5943600" cy="474865"/>
+            <a:off x="594360" y="2148840"/>
+            <a:ext cx="4428260" cy="566928"/>
           </a:xfrm>
           <a:prstGeom prst="rect">
             <a:avLst/>
@@ -7654,97 +7617,14 @@
       </p:pic>
       <p:sp>
         <p:nvSpPr>
-          <p:cNvPr id="8" name="TextBox 7"/>
-          <p:cNvSpPr txBox="1"/>
-          <p:nvPr/>
-        </p:nvSpPr>
-        <p:spPr>
-          <a:xfrm>
-            <a:off x="502920" y="3566160"/>
-            <a:ext cx="6035040" cy="2011680"/>
-          </a:xfrm>
-          <a:prstGeom prst="rect">
-            <a:avLst/>
-          </a:prstGeom>
-          <a:noFill/>
-        </p:spPr>
-        <p:txBody>
-          <a:bodyPr wrap="square" anchor="t">
-            <a:spAutoFit/>
-          </a:bodyPr>
-          <a:lstStyle/>
-          <a:p>
-            <a:pPr>
-              <a:spcAft>
-                <a:spcPts val="800"/>
-              </a:spcAft>
-            </a:pPr>
-            <a:r>
-              <a:rPr sz="1400" b="0" i="0">
-                <a:solidFill>
-                  <a:srgbClr val="333740"/>
-                </a:solidFill>
-                <a:latin typeface="Arial"/>
-              </a:rPr>
-              <a:t>Trimming both tails equally leaves the retained control mean unmoved → the borrowed mean stays UNBIASED (right).</a:t>
-            </a:r>
-          </a:p>
-          <a:p>
-            <a:pPr>
-              <a:spcBef>
-                <a:spcPts val="400"/>
-              </a:spcBef>
-              <a:spcAft>
-                <a:spcPts val="900"/>
-              </a:spcAft>
-            </a:pPr>
-            <a:r>
-              <a:rPr sz="1550" b="1" i="0">
-                <a:solidFill>
-                  <a:srgbClr val="2F7DC8"/>
-                </a:solidFill>
-                <a:latin typeface="Arial"/>
-              </a:rPr>
-              <a:t>Adaptive threshold (no labels needed)</a:t>
-            </a:r>
-          </a:p>
-          <a:p>
-            <a:pPr>
-              <a:spcAft>
-                <a:spcPts val="800"/>
-              </a:spcAft>
-            </a:pPr>
-            <a:r>
-              <a:rPr sz="1400" b="1" i="0">
-                <a:solidFill>
-                  <a:srgbClr val="2F7DC8"/>
-                </a:solidFill>
-                <a:latin typeface="Arial"/>
-              </a:rPr>
-              <a:t>▪  </a:t>
-            </a:r>
-            <a:r>
-              <a:rPr sz="1400" b="0" i="0">
-                <a:solidFill>
-                  <a:srgbClr val="333740"/>
-                </a:solidFill>
-                <a:latin typeface="Arial"/>
-              </a:rPr>
-              <a:t>Choose γ per dataset to minimize an estimated MSE of the borrowing estimate (a de-biased CSB objective):</a:t>
-            </a:r>
-          </a:p>
-        </p:txBody>
-      </p:sp>
-      <p:sp>
-        <p:nvSpPr>
-          <p:cNvPr id="9" name="Rectangle 8"/>
+          <p:cNvPr id="8" name="Rectangle 7"/>
           <p:cNvSpPr/>
           <p:nvPr/>
         </p:nvSpPr>
         <p:spPr>
           <a:xfrm>
-            <a:off x="484632" y="5394960"/>
-            <a:ext cx="5991824" cy="960120"/>
+            <a:off x="484632" y="2788920"/>
+            <a:ext cx="4765852" cy="1188720"/>
           </a:xfrm>
           <a:prstGeom prst="rect">
             <a:avLst/>
@@ -7781,7 +7661,7 @@
       </p:sp>
       <p:pic>
         <p:nvPicPr>
-          <p:cNvPr id="10" name="Picture 9" descr="eq_adaptive.png"/>
+          <p:cNvPr id="9" name="Picture 8" descr="eq_wpval.png"/>
           <p:cNvPicPr>
             <a:picLocks noChangeAspect="1"/>
           </p:cNvPicPr>
@@ -7795,17 +7675,100 @@
         </p:blipFill>
         <p:spPr>
           <a:xfrm>
-            <a:off x="594360" y="5486400"/>
-            <a:ext cx="5772368" cy="777240"/>
+            <a:off x="594360" y="2880360"/>
+            <a:ext cx="4546396" cy="1005840"/>
           </a:xfrm>
           <a:prstGeom prst="rect">
             <a:avLst/>
           </a:prstGeom>
         </p:spPr>
       </p:pic>
+      <p:sp>
+        <p:nvSpPr>
+          <p:cNvPr id="10" name="TextBox 9"/>
+          <p:cNvSpPr txBox="1"/>
+          <p:nvPr/>
+        </p:nvSpPr>
+        <p:spPr>
+          <a:xfrm>
+            <a:off x="502920" y="3977639"/>
+            <a:ext cx="6126480" cy="731520"/>
+          </a:xfrm>
+          <a:prstGeom prst="rect">
+            <a:avLst/>
+          </a:prstGeom>
+          <a:noFill/>
+        </p:spPr>
+        <p:txBody>
+          <a:bodyPr wrap="square" anchor="t">
+            <a:spAutoFit/>
+          </a:bodyPr>
+          <a:lstStyle/>
+          <a:p>
+            <a:pPr>
+              <a:spcAft>
+                <a:spcPts val="800"/>
+              </a:spcAft>
+            </a:pPr>
+            <a:r>
+              <a:rPr sz="1350" b="0" i="0">
+                <a:solidFill>
+                  <a:srgbClr val="333740"/>
+                </a:solidFill>
+                <a:latin typeface="Arial"/>
+              </a:rPr>
+              <a:t>Transport identity — weighted RCT scores represent the compatible-EC score law:</a:t>
+            </a:r>
+          </a:p>
+        </p:txBody>
+      </p:sp>
+      <p:sp>
+        <p:nvSpPr>
+          <p:cNvPr id="11" name="Rectangle 10"/>
+          <p:cNvSpPr/>
+          <p:nvPr/>
+        </p:nvSpPr>
+        <p:spPr>
+          <a:xfrm>
+            <a:off x="484632" y="4633617"/>
+            <a:ext cx="6254496" cy="608285"/>
+          </a:xfrm>
+          <a:prstGeom prst="rect">
+            <a:avLst/>
+          </a:prstGeom>
+          <a:solidFill>
+            <a:srgbClr val="F5F7FA"/>
+          </a:solidFill>
+          <a:ln>
+            <a:noFill/>
+          </a:ln>
+          <a:effectLst/>
+        </p:spPr>
+        <p:style>
+          <a:lnRef idx="1">
+            <a:schemeClr val="accent1"/>
+          </a:lnRef>
+          <a:fillRef idx="3">
+            <a:schemeClr val="accent1"/>
+          </a:fillRef>
+          <a:effectRef idx="2">
+            <a:schemeClr val="accent1"/>
+          </a:effectRef>
+          <a:fontRef idx="minor">
+            <a:schemeClr val="lt1"/>
+          </a:fontRef>
+        </p:style>
+        <p:txBody>
+          <a:bodyPr rtlCol="0" anchor="ctr"/>
+          <a:lstStyle/>
+          <a:p>
+            <a:pPr algn="ctr"/>
+          </a:p>
+        </p:txBody>
+      </p:sp>
       <p:pic>
         <p:nvPicPr>
-          <p:cNvPr id="11" name="Picture 10" descr="fig_trimming.png"/>
+          <p:cNvPr id="12" name="Picture 11" descr="eq_transport.png"/>
           <p:cNvPicPr>
             <a:picLocks noChangeAspect="1"/>
           </p:cNvPicPr>
@@ -7819,8 +7782,8 @@
         </p:blipFill>
         <p:spPr>
           <a:xfrm>
-            <a:off x="6537960" y="2655985"/>
-            <a:ext cx="5212080" cy="1546029"/>
+            <a:off x="594360" y="4725057"/>
+            <a:ext cx="6035040" cy="425405"/>
           </a:xfrm>
           <a:prstGeom prst="rect">
             <a:avLst/>
@@ -7829,14 +7792,14 @@
       </p:pic>
       <p:sp>
         <p:nvSpPr>
-          <p:cNvPr id="12" name="TextBox 11"/>
+          <p:cNvPr id="13" name="TextBox 12"/>
           <p:cNvSpPr txBox="1"/>
           <p:nvPr/>
         </p:nvSpPr>
         <p:spPr>
           <a:xfrm>
-            <a:off x="6537960" y="5029200"/>
-            <a:ext cx="5212080" cy="1280160"/>
+            <a:off x="502920" y="5440680"/>
+            <a:ext cx="6126480" cy="1005840"/>
           </a:xfrm>
           <a:prstGeom prst="rect">
             <a:avLst/>
@@ -7861,14 +7824,38 @@
                 </a:solidFill>
                 <a:latin typeface="Arial"/>
               </a:rPr>
-              <a:t>Small γ borrows more but risks leaking contamination; large γ is safer with less gain. Adaptive γ balances the two automatically.</a:t>
-            </a:r>
-          </a:p>
-        </p:txBody>
-      </p:sp>
-      <p:sp>
-        <p:nvSpPr>
-          <p:cNvPr id="13" name="TextBox 12"/>
+              <a:t>Without weighting, high-severity compatible ECs look “extreme” only because they are over-represented externally → false exclusions. Weighting removes exactly this (right).</a:t>
+            </a:r>
+          </a:p>
+        </p:txBody>
+      </p:sp>
+      <p:pic>
+        <p:nvPicPr>
+          <p:cNvPr id="14" name="Picture 13" descr="fig_shift.png"/>
+          <p:cNvPicPr>
+            <a:picLocks noChangeAspect="1"/>
+          </p:cNvPicPr>
+          <p:nvPr/>
+        </p:nvPicPr>
+        <p:blipFill>
+          <a:blip r:embed="rId5"/>
+          <a:stretch>
+            <a:fillRect/>
+          </a:stretch>
+        </p:blipFill>
+        <p:spPr>
+          <a:xfrm>
+            <a:off x="6583680" y="2185746"/>
+            <a:ext cx="5120640" cy="3400906"/>
+          </a:xfrm>
+          <a:prstGeom prst="rect">
+            <a:avLst/>
+          </a:prstGeom>
+        </p:spPr>
+      </p:pic>
+      <p:sp>
+        <p:nvSpPr>
+          <p:cNvPr id="15" name="TextBox 14"/>
           <p:cNvSpPr txBox="1"/>
           <p:nvPr/>
         </p:nvSpPr>
@@ -8008,7 +7995,7 @@
                 </a:solidFill>
                 <a:latin typeface="Arial"/>
               </a:rPr>
-              <a:t>Step 9: refit the borrowing estimator (transported AIPW)</a:t>
+              <a:t>Steps 6–7: from a one-time split to cross-fit (CV+)</a:t>
             </a:r>
           </a:p>
         </p:txBody>
@@ -8066,7 +8053,7 @@
         <p:spPr>
           <a:xfrm>
             <a:off x="502920" y="1417320"/>
-            <a:ext cx="11155680" cy="1463040"/>
+            <a:ext cx="5943600" cy="1463040"/>
           </a:xfrm>
           <a:prstGeom prst="rect">
             <a:avLst/>
@@ -8100,7 +8087,32 @@
                 </a:solidFill>
                 <a:latin typeface="Arial"/>
               </a:rPr>
-              <a:t>On the RETAINED external controls, refit the source density, the outcome model, and the inverse-variance borrowing weight; form the transported AIPW control mean and combine it with the randomized-control mean:</a:t>
+              <a:t>A single train/calibrate split wastes half of the already-scarce randomized controls.</a:t>
+            </a:r>
+          </a:p>
+          <a:p>
+            <a:pPr>
+              <a:spcAft>
+                <a:spcPts val="800"/>
+              </a:spcAft>
+            </a:pPr>
+            <a:r>
+              <a:rPr sz="1500" b="1" i="0">
+                <a:solidFill>
+                  <a:srgbClr val="2F7DC8"/>
+                </a:solidFill>
+                <a:latin typeface="Arial"/>
+              </a:rPr>
+              <a:t>▪  </a:t>
+            </a:r>
+            <a:r>
+              <a:rPr sz="1500" b="0" i="0">
+                <a:solidFill>
+                  <a:srgbClr val="333740"/>
+                </a:solidFill>
+                <a:latin typeface="Arial"/>
+              </a:rPr>
+              <a:t>CV+ scores each fold from a model fit on the other folds:</a:t>
             </a:r>
           </a:p>
         </p:txBody>
@@ -8113,8 +8125,8 @@
         </p:nvSpPr>
         <p:spPr>
           <a:xfrm>
-            <a:off x="713232" y="2926079"/>
-            <a:ext cx="5525974" cy="1097280"/>
+            <a:off x="484632" y="2881240"/>
+            <a:ext cx="6071616" cy="656606"/>
           </a:xfrm>
           <a:prstGeom prst="rect">
             <a:avLst/>
@@ -8151,7 +8163,7 @@
       </p:sp>
       <p:pic>
         <p:nvPicPr>
-          <p:cNvPr id="7" name="Picture 6" descr="eq_estimator.png"/>
+          <p:cNvPr id="7" name="Picture 6" descr="eq_cv.png"/>
           <p:cNvPicPr>
             <a:picLocks noChangeAspect="1"/>
           </p:cNvPicPr>
@@ -8165,8 +8177,8 @@
         </p:blipFill>
         <p:spPr>
           <a:xfrm>
-            <a:off x="822960" y="3017520"/>
-            <a:ext cx="5306518" cy="914400"/>
+            <a:off x="594360" y="2972680"/>
+            <a:ext cx="5852160" cy="473726"/>
           </a:xfrm>
           <a:prstGeom prst="rect">
             <a:avLst/>
@@ -8181,8 +8193,8 @@
         </p:nvSpPr>
         <p:spPr>
           <a:xfrm>
-            <a:off x="502920" y="4251960"/>
-            <a:ext cx="11247120" cy="2103120"/>
+            <a:off x="502920" y="3749039"/>
+            <a:ext cx="6035040" cy="2377440"/>
           </a:xfrm>
           <a:prstGeom prst="rect">
             <a:avLst/>
@@ -8207,7 +8219,7 @@
                 </a:solidFill>
                 <a:latin typeface="Arial"/>
               </a:rPr>
-              <a:t>λ = efficient inverse-variance weight: borrow LESS from noisier external controls → lower RMSE.</a:t>
+              <a:t>Every randomized control eventually contributes a calibration rank  →  the WHOLE control sample is used.</a:t>
             </a:r>
           </a:p>
           <a:p>
@@ -8217,36 +8229,44 @@
               </a:spcAft>
             </a:pPr>
             <a:r>
-              <a:rPr sz="1500" b="0" i="0">
-                <a:solidFill>
-                  <a:srgbClr val="333740"/>
-                </a:solidFill>
-                <a:latin typeface="Arial"/>
-              </a:rPr>
-              <a:t>Doubly robust: consistent if either the outcome model or the source/weight model is correct.</a:t>
-            </a:r>
-          </a:p>
-          <a:p>
-            <a:pPr>
-              <a:spcAft>
-                <a:spcPts val="800"/>
-              </a:spcAft>
-            </a:pPr>
-            <a:r>
               <a:rPr sz="1500" b="1" i="0">
                 <a:solidFill>
                   <a:srgbClr val="1F2A44"/>
                 </a:solidFill>
                 <a:latin typeface="Arial"/>
               </a:rPr>
-              <a:t>Output: τ̂ with a full-pipeline bootstrap confidence interval that re-runs the entire screen on each resample (so selection uncertainty is propagated).</a:t>
-            </a:r>
-          </a:p>
-        </p:txBody>
-      </p:sp>
-      <p:sp>
-        <p:nvSpPr>
-          <p:cNvPr id="9" name="TextBox 8"/>
+              <a:t>This is the main efficiency lever of the method — we quantify the gain in the simulation (≈ +0.06 power at controlled type-I).</a:t>
+            </a:r>
+          </a:p>
+        </p:txBody>
+      </p:sp>
+      <p:pic>
+        <p:nvPicPr>
+          <p:cNvPr id="9" name="Picture 8" descr="fig_cv.png"/>
+          <p:cNvPicPr>
+            <a:picLocks noChangeAspect="1"/>
+          </p:cNvPicPr>
+          <p:nvPr/>
+        </p:nvPicPr>
+        <p:blipFill>
+          <a:blip r:embed="rId3"/>
+          <a:stretch>
+            <a:fillRect/>
+          </a:stretch>
+        </p:blipFill>
+        <p:spPr>
+          <a:xfrm>
+            <a:off x="6446520" y="2110897"/>
+            <a:ext cx="5349240" cy="3550605"/>
+          </a:xfrm>
+          <a:prstGeom prst="rect">
+            <a:avLst/>
+          </a:prstGeom>
+        </p:spPr>
+      </p:pic>
+      <p:sp>
+        <p:nvSpPr>
+          <p:cNvPr id="10" name="TextBox 9"/>
           <p:cNvSpPr txBox="1"/>
           <p:nvPr/>
         </p:nvSpPr>
@@ -8306,51 +8326,7 @@
         <p:spPr>
           <a:xfrm>
             <a:off x="0" y="0"/>
-            <a:ext cx="12191695" cy="6858000"/>
-          </a:xfrm>
-          <a:prstGeom prst="rect">
-            <a:avLst/>
-          </a:prstGeom>
-          <a:solidFill>
-            <a:srgbClr val="1F2A44"/>
-          </a:solidFill>
-          <a:ln>
-            <a:noFill/>
-          </a:ln>
-          <a:effectLst/>
-        </p:spPr>
-        <p:style>
-          <a:lnRef idx="1">
-            <a:schemeClr val="accent1"/>
-          </a:lnRef>
-          <a:fillRef idx="3">
-            <a:schemeClr val="accent1"/>
-          </a:fillRef>
-          <a:effectRef idx="2">
-            <a:schemeClr val="accent1"/>
-          </a:effectRef>
-          <a:fontRef idx="minor">
-            <a:schemeClr val="lt1"/>
-          </a:fontRef>
-        </p:style>
-        <p:txBody>
-          <a:bodyPr rtlCol="0" anchor="ctr"/>
-          <a:lstStyle/>
-          <a:p>
-            <a:pPr algn="ctr"/>
-          </a:p>
-        </p:txBody>
-      </p:sp>
-      <p:sp>
-        <p:nvSpPr>
-          <p:cNvPr id="3" name="Rectangle 2"/>
-          <p:cNvSpPr/>
-          <p:nvPr/>
-        </p:nvSpPr>
-        <p:spPr>
-          <a:xfrm>
-            <a:off x="0" y="2761488"/>
-            <a:ext cx="12191695" cy="45720"/>
+            <a:ext cx="12191695" cy="128016"/>
           </a:xfrm>
           <a:prstGeom prst="rect">
             <a:avLst/>
@@ -8387,14 +8363,14 @@
       </p:sp>
       <p:sp>
         <p:nvSpPr>
-          <p:cNvPr id="4" name="TextBox 3"/>
+          <p:cNvPr id="3" name="TextBox 2"/>
           <p:cNvSpPr txBox="1"/>
           <p:nvPr/>
         </p:nvSpPr>
         <p:spPr>
           <a:xfrm>
-            <a:off x="1005840" y="2148840"/>
-            <a:ext cx="10180015" cy="2011680"/>
+            <a:off x="502920" y="274320"/>
+            <a:ext cx="11185855" cy="932688"/>
           </a:xfrm>
           <a:prstGeom prst="rect">
             <a:avLst/>
@@ -8409,44 +8385,456 @@
           <a:p>
             <a:pPr>
               <a:spcAft>
-                <a:spcPts val="600"/>
-              </a:spcAft>
-            </a:pPr>
-            <a:r>
-              <a:rPr sz="1700" b="1" i="0">
+                <a:spcPts val="200"/>
+              </a:spcAft>
+            </a:pPr>
+            <a:r>
+              <a:rPr sz="1250" b="1" i="0">
                 <a:solidFill>
                   <a:srgbClr val="2F7DC8"/>
                 </a:solidFill>
                 <a:latin typeface="Arial"/>
               </a:rPr>
-              <a:t>PART III</a:t>
-            </a:r>
-          </a:p>
-          <a:p>
-            <a:r>
-              <a:rPr sz="4000" b="1" i="0">
-                <a:solidFill>
-                  <a:srgbClr val="FFFFFF"/>
-                </a:solidFill>
-                <a:latin typeface="Arial"/>
-              </a:rPr>
-              <a:t>Simulation</a:t>
-            </a:r>
-          </a:p>
+              <a:t>PROPOSED FULL METHOD</a:t>
+            </a:r>
+          </a:p>
+          <a:p>
+            <a:r>
+              <a:rPr sz="2700" b="1" i="0">
+                <a:solidFill>
+                  <a:srgbClr val="1F2A44"/>
+                </a:solidFill>
+                <a:latin typeface="Arial"/>
+              </a:rPr>
+              <a:t>Step 8: conservative screening — symmetric + adaptive γ</a:t>
+            </a:r>
+          </a:p>
+        </p:txBody>
+      </p:sp>
+      <p:sp>
+        <p:nvSpPr>
+          <p:cNvPr id="4" name="Rectangle 3"/>
+          <p:cNvSpPr/>
+          <p:nvPr/>
+        </p:nvSpPr>
+        <p:spPr>
+          <a:xfrm>
+            <a:off x="521207" y="1225296"/>
+            <a:ext cx="2103120" cy="41148"/>
+          </a:xfrm>
+          <a:prstGeom prst="rect">
+            <a:avLst/>
+          </a:prstGeom>
+          <a:solidFill>
+            <a:srgbClr val="2F7DC8"/>
+          </a:solidFill>
+          <a:ln>
+            <a:noFill/>
+          </a:ln>
+          <a:effectLst/>
+        </p:spPr>
+        <p:style>
+          <a:lnRef idx="1">
+            <a:schemeClr val="accent1"/>
+          </a:lnRef>
+          <a:fillRef idx="3">
+            <a:schemeClr val="accent1"/>
+          </a:fillRef>
+          <a:effectRef idx="2">
+            <a:schemeClr val="accent1"/>
+          </a:effectRef>
+          <a:fontRef idx="minor">
+            <a:schemeClr val="lt1"/>
+          </a:fontRef>
+        </p:style>
+        <p:txBody>
+          <a:bodyPr rtlCol="0" anchor="ctr"/>
+          <a:lstStyle/>
+          <a:p>
+            <a:pPr algn="ctr"/>
+          </a:p>
+        </p:txBody>
+      </p:sp>
+      <p:sp>
+        <p:nvSpPr>
+          <p:cNvPr id="5" name="TextBox 4"/>
+          <p:cNvSpPr txBox="1"/>
+          <p:nvPr/>
+        </p:nvSpPr>
+        <p:spPr>
+          <a:xfrm>
+            <a:off x="502920" y="1371600"/>
+            <a:ext cx="6035040" cy="1463040"/>
+          </a:xfrm>
+          <a:prstGeom prst="rect">
+            <a:avLst/>
+          </a:prstGeom>
+          <a:noFill/>
+        </p:spPr>
+        <p:txBody>
+          <a:bodyPr wrap="square" anchor="t">
+            <a:spAutoFit/>
+          </a:bodyPr>
+          <a:lstStyle/>
           <a:p>
             <a:pPr>
               <a:spcBef>
+                <a:spcPts val="400"/>
+              </a:spcBef>
+              <a:spcAft>
+                <a:spcPts val="900"/>
+              </a:spcAft>
+            </a:pPr>
+            <a:r>
+              <a:rPr sz="1600" b="1" i="0">
+                <a:solidFill>
+                  <a:srgbClr val="2F7DC8"/>
+                </a:solidFill>
+                <a:latin typeface="Arial"/>
+              </a:rPr>
+              <a:t>Symmetric trimming (keeps the borrowed mean unbiased)</a:t>
+            </a:r>
+          </a:p>
+          <a:p>
+            <a:pPr>
+              <a:spcAft>
                 <a:spcPts val="800"/>
+              </a:spcAft>
+            </a:pPr>
+            <a:r>
+              <a:rPr sz="1450" b="1" i="0">
+                <a:solidFill>
+                  <a:srgbClr val="2F7DC8"/>
+                </a:solidFill>
+                <a:latin typeface="Arial"/>
+              </a:rPr>
+              <a:t>▪  </a:t>
+            </a:r>
+            <a:r>
+              <a:rPr sz="1450" b="0" i="0">
+                <a:solidFill>
+                  <a:srgbClr val="333740"/>
+                </a:solidFill>
+                <a:latin typeface="Arial"/>
+              </a:rPr>
+              <a:t>Screen on |V| with a SINGLE threshold, trimming both tails equally:</a:t>
+            </a:r>
+          </a:p>
+        </p:txBody>
+      </p:sp>
+      <p:sp>
+        <p:nvSpPr>
+          <p:cNvPr id="6" name="Rectangle 5"/>
+          <p:cNvSpPr/>
+          <p:nvPr/>
+        </p:nvSpPr>
+        <p:spPr>
+          <a:xfrm>
+            <a:off x="484632" y="2697791"/>
+            <a:ext cx="6163056" cy="657745"/>
+          </a:xfrm>
+          <a:prstGeom prst="rect">
+            <a:avLst/>
+          </a:prstGeom>
+          <a:solidFill>
+            <a:srgbClr val="F5F7FA"/>
+          </a:solidFill>
+          <a:ln>
+            <a:noFill/>
+          </a:ln>
+          <a:effectLst/>
+        </p:spPr>
+        <p:style>
+          <a:lnRef idx="1">
+            <a:schemeClr val="accent1"/>
+          </a:lnRef>
+          <a:fillRef idx="3">
+            <a:schemeClr val="accent1"/>
+          </a:fillRef>
+          <a:effectRef idx="2">
+            <a:schemeClr val="accent1"/>
+          </a:effectRef>
+          <a:fontRef idx="minor">
+            <a:schemeClr val="lt1"/>
+          </a:fontRef>
+        </p:style>
+        <p:txBody>
+          <a:bodyPr rtlCol="0" anchor="ctr"/>
+          <a:lstStyle/>
+          <a:p>
+            <a:pPr algn="ctr"/>
+          </a:p>
+        </p:txBody>
+      </p:sp>
+      <p:pic>
+        <p:nvPicPr>
+          <p:cNvPr id="7" name="Picture 6" descr="eq_symscreen.png"/>
+          <p:cNvPicPr>
+            <a:picLocks noChangeAspect="1"/>
+          </p:cNvPicPr>
+          <p:nvPr/>
+        </p:nvPicPr>
+        <p:blipFill>
+          <a:blip r:embed="rId2"/>
+          <a:stretch>
+            <a:fillRect/>
+          </a:stretch>
+        </p:blipFill>
+        <p:spPr>
+          <a:xfrm>
+            <a:off x="594360" y="2789231"/>
+            <a:ext cx="5943600" cy="474865"/>
+          </a:xfrm>
+          <a:prstGeom prst="rect">
+            <a:avLst/>
+          </a:prstGeom>
+        </p:spPr>
+      </p:pic>
+      <p:sp>
+        <p:nvSpPr>
+          <p:cNvPr id="8" name="TextBox 7"/>
+          <p:cNvSpPr txBox="1"/>
+          <p:nvPr/>
+        </p:nvSpPr>
+        <p:spPr>
+          <a:xfrm>
+            <a:off x="502920" y="3566160"/>
+            <a:ext cx="6035040" cy="2011680"/>
+          </a:xfrm>
+          <a:prstGeom prst="rect">
+            <a:avLst/>
+          </a:prstGeom>
+          <a:noFill/>
+        </p:spPr>
+        <p:txBody>
+          <a:bodyPr wrap="square" anchor="t">
+            <a:spAutoFit/>
+          </a:bodyPr>
+          <a:lstStyle/>
+          <a:p>
+            <a:pPr>
+              <a:spcAft>
+                <a:spcPts val="800"/>
+              </a:spcAft>
+            </a:pPr>
+            <a:r>
+              <a:rPr sz="1400" b="0" i="0">
+                <a:solidFill>
+                  <a:srgbClr val="333740"/>
+                </a:solidFill>
+                <a:latin typeface="Arial"/>
+              </a:rPr>
+              <a:t>Trimming both tails equally leaves the retained control mean unmoved → the borrowed mean stays UNBIASED (right).</a:t>
+            </a:r>
+          </a:p>
+          <a:p>
+            <a:pPr>
+              <a:spcBef>
+                <a:spcPts val="400"/>
               </a:spcBef>
-            </a:pPr>
-            <a:r>
-              <a:rPr sz="1600" b="0" i="1">
-                <a:solidFill>
-                  <a:srgbClr val="C9D4E4"/>
-                </a:solidFill>
-                <a:latin typeface="Arial"/>
-              </a:rPr>
-              <a:t>A transparent longitudinal data-generating process, and the results</a:t>
+              <a:spcAft>
+                <a:spcPts val="900"/>
+              </a:spcAft>
+            </a:pPr>
+            <a:r>
+              <a:rPr sz="1550" b="1" i="0">
+                <a:solidFill>
+                  <a:srgbClr val="2F7DC8"/>
+                </a:solidFill>
+                <a:latin typeface="Arial"/>
+              </a:rPr>
+              <a:t>Adaptive threshold (no labels needed)</a:t>
+            </a:r>
+          </a:p>
+          <a:p>
+            <a:pPr>
+              <a:spcAft>
+                <a:spcPts val="800"/>
+              </a:spcAft>
+            </a:pPr>
+            <a:r>
+              <a:rPr sz="1400" b="1" i="0">
+                <a:solidFill>
+                  <a:srgbClr val="2F7DC8"/>
+                </a:solidFill>
+                <a:latin typeface="Arial"/>
+              </a:rPr>
+              <a:t>▪  </a:t>
+            </a:r>
+            <a:r>
+              <a:rPr sz="1400" b="0" i="0">
+                <a:solidFill>
+                  <a:srgbClr val="333740"/>
+                </a:solidFill>
+                <a:latin typeface="Arial"/>
+              </a:rPr>
+              <a:t>Choose γ per dataset to minimize an estimated MSE of the borrowing estimate (a de-biased CSB objective):</a:t>
+            </a:r>
+          </a:p>
+        </p:txBody>
+      </p:sp>
+      <p:sp>
+        <p:nvSpPr>
+          <p:cNvPr id="9" name="Rectangle 8"/>
+          <p:cNvSpPr/>
+          <p:nvPr/>
+        </p:nvSpPr>
+        <p:spPr>
+          <a:xfrm>
+            <a:off x="484632" y="5394960"/>
+            <a:ext cx="5991824" cy="960120"/>
+          </a:xfrm>
+          <a:prstGeom prst="rect">
+            <a:avLst/>
+          </a:prstGeom>
+          <a:solidFill>
+            <a:srgbClr val="F5F7FA"/>
+          </a:solidFill>
+          <a:ln>
+            <a:noFill/>
+          </a:ln>
+          <a:effectLst/>
+        </p:spPr>
+        <p:style>
+          <a:lnRef idx="1">
+            <a:schemeClr val="accent1"/>
+          </a:lnRef>
+          <a:fillRef idx="3">
+            <a:schemeClr val="accent1"/>
+          </a:fillRef>
+          <a:effectRef idx="2">
+            <a:schemeClr val="accent1"/>
+          </a:effectRef>
+          <a:fontRef idx="minor">
+            <a:schemeClr val="lt1"/>
+          </a:fontRef>
+        </p:style>
+        <p:txBody>
+          <a:bodyPr rtlCol="0" anchor="ctr"/>
+          <a:lstStyle/>
+          <a:p>
+            <a:pPr algn="ctr"/>
+          </a:p>
+        </p:txBody>
+      </p:sp>
+      <p:pic>
+        <p:nvPicPr>
+          <p:cNvPr id="10" name="Picture 9" descr="eq_adaptive.png"/>
+          <p:cNvPicPr>
+            <a:picLocks noChangeAspect="1"/>
+          </p:cNvPicPr>
+          <p:nvPr/>
+        </p:nvPicPr>
+        <p:blipFill>
+          <a:blip r:embed="rId3"/>
+          <a:stretch>
+            <a:fillRect/>
+          </a:stretch>
+        </p:blipFill>
+        <p:spPr>
+          <a:xfrm>
+            <a:off x="594360" y="5486400"/>
+            <a:ext cx="5772368" cy="777240"/>
+          </a:xfrm>
+          <a:prstGeom prst="rect">
+            <a:avLst/>
+          </a:prstGeom>
+        </p:spPr>
+      </p:pic>
+      <p:pic>
+        <p:nvPicPr>
+          <p:cNvPr id="11" name="Picture 10" descr="fig_trimming.png"/>
+          <p:cNvPicPr>
+            <a:picLocks noChangeAspect="1"/>
+          </p:cNvPicPr>
+          <p:nvPr/>
+        </p:nvPicPr>
+        <p:blipFill>
+          <a:blip r:embed="rId4"/>
+          <a:stretch>
+            <a:fillRect/>
+          </a:stretch>
+        </p:blipFill>
+        <p:spPr>
+          <a:xfrm>
+            <a:off x="6537960" y="2655985"/>
+            <a:ext cx="5212080" cy="1546029"/>
+          </a:xfrm>
+          <a:prstGeom prst="rect">
+            <a:avLst/>
+          </a:prstGeom>
+        </p:spPr>
+      </p:pic>
+      <p:sp>
+        <p:nvSpPr>
+          <p:cNvPr id="12" name="TextBox 11"/>
+          <p:cNvSpPr txBox="1"/>
+          <p:nvPr/>
+        </p:nvSpPr>
+        <p:spPr>
+          <a:xfrm>
+            <a:off x="6537960" y="5029200"/>
+            <a:ext cx="5212080" cy="1280160"/>
+          </a:xfrm>
+          <a:prstGeom prst="rect">
+            <a:avLst/>
+          </a:prstGeom>
+          <a:noFill/>
+        </p:spPr>
+        <p:txBody>
+          <a:bodyPr wrap="square" anchor="t">
+            <a:spAutoFit/>
+          </a:bodyPr>
+          <a:lstStyle/>
+          <a:p>
+            <a:pPr>
+              <a:spcAft>
+                <a:spcPts val="800"/>
+              </a:spcAft>
+            </a:pPr>
+            <a:r>
+              <a:rPr sz="1350" b="1" i="0">
+                <a:solidFill>
+                  <a:srgbClr val="1F2A44"/>
+                </a:solidFill>
+                <a:latin typeface="Arial"/>
+              </a:rPr>
+              <a:t>Small γ borrows more but risks leaking contamination; large γ is safer with less gain. Adaptive γ balances the two automatically.</a:t>
+            </a:r>
+          </a:p>
+        </p:txBody>
+      </p:sp>
+      <p:sp>
+        <p:nvSpPr>
+          <p:cNvPr id="13" name="TextBox 12"/>
+          <p:cNvSpPr txBox="1"/>
+          <p:nvPr/>
+        </p:nvSpPr>
+        <p:spPr>
+          <a:xfrm>
+            <a:off x="11094415" y="6455664"/>
+            <a:ext cx="914400" cy="320040"/>
+          </a:xfrm>
+          <a:prstGeom prst="rect">
+            <a:avLst/>
+          </a:prstGeom>
+          <a:noFill/>
+        </p:spPr>
+        <p:txBody>
+          <a:bodyPr wrap="square" anchor="t">
+            <a:spAutoFit/>
+          </a:bodyPr>
+          <a:lstStyle/>
+          <a:p>
+            <a:pPr algn="r"/>
+            <a:r>
+              <a:rPr sz="1100" b="0" i="0">
+                <a:solidFill>
+                  <a:srgbClr val="6B7280"/>
+                </a:solidFill>
+                <a:latin typeface="Arial"/>
+              </a:rPr>
+              <a:t>19</a:t>
             </a:r>
           </a:p>
         </p:txBody>
@@ -8547,7 +8935,7 @@
                 </a:solidFill>
                 <a:latin typeface="Arial"/>
               </a:rPr>
-              <a:t>SIMULATION SETUP</a:t>
+              <a:t>PROPOSED FULL METHOD</a:t>
             </a:r>
           </a:p>
           <a:p>
@@ -8558,7 +8946,7 @@
                 </a:solidFill>
                 <a:latin typeface="Arial"/>
               </a:rPr>
-              <a:t>Simulation: the data-generating process</a:t>
+              <a:t>Step 9: refit the borrowing estimator (transported AIPW)</a:t>
             </a:r>
           </a:p>
         </p:txBody>
@@ -8615,8 +9003,8 @@
         </p:nvSpPr>
         <p:spPr>
           <a:xfrm>
-            <a:off x="502920" y="1371600"/>
-            <a:ext cx="11247120" cy="822960"/>
+            <a:off x="502920" y="1417320"/>
+            <a:ext cx="11155680" cy="1463040"/>
           </a:xfrm>
           <a:prstGeom prst="rect">
             <a:avLst/>
@@ -8635,13 +9023,22 @@
               </a:spcAft>
             </a:pPr>
             <a:r>
-              <a:rPr sz="1450" b="0" i="0">
+              <a:rPr sz="1500" b="1" i="0">
+                <a:solidFill>
+                  <a:srgbClr val="2F7DC8"/>
+                </a:solidFill>
+                <a:latin typeface="Arial"/>
+              </a:rPr>
+              <a:t>▪  </a:t>
+            </a:r>
+            <a:r>
+              <a:rPr sz="1500" b="0" i="0">
                 <a:solidFill>
                   <a:srgbClr val="333740"/>
                 </a:solidFill>
                 <a:latin typeface="Arial"/>
               </a:rPr>
-              <a:t>Four visits, one binary severity covariate X. Randomized and external covariate mixes differ (shift, overlap preserved):</a:t>
+              <a:t>On the RETAINED external controls, refit the source density, the outcome model, and the inverse-variance borrowing weight; form the transported AIPW control mean and combine it with the randomized-control mean:</a:t>
             </a:r>
           </a:p>
         </p:txBody>
@@ -8654,8 +9051,8 @@
         </p:nvSpPr>
         <p:spPr>
           <a:xfrm>
-            <a:off x="530352" y="1985783"/>
-            <a:ext cx="8997696" cy="710160"/>
+            <a:off x="713232" y="2926079"/>
+            <a:ext cx="5525974" cy="1097280"/>
           </a:xfrm>
           <a:prstGeom prst="rect">
             <a:avLst/>
@@ -8692,7 +9089,7 @@
       </p:sp>
       <p:pic>
         <p:nvPicPr>
-          <p:cNvPr id="7" name="Picture 6" descr="eq_dgp_shift.png"/>
+          <p:cNvPr id="7" name="Picture 6" descr="eq_estimator.png"/>
           <p:cNvPicPr>
             <a:picLocks noChangeAspect="1"/>
           </p:cNvPicPr>
@@ -8706,8 +9103,8 @@
         </p:blipFill>
         <p:spPr>
           <a:xfrm>
-            <a:off x="640080" y="2077223"/>
-            <a:ext cx="8778240" cy="527280"/>
+            <a:off x="822960" y="3017520"/>
+            <a:ext cx="5306518" cy="914400"/>
           </a:xfrm>
           <a:prstGeom prst="rect">
             <a:avLst/>
@@ -8722,8 +9119,8 @@
         </p:nvSpPr>
         <p:spPr>
           <a:xfrm>
-            <a:off x="502920" y="2743200"/>
-            <a:ext cx="11247120" cy="640080"/>
+            <a:off x="502920" y="4251960"/>
+            <a:ext cx="11247120" cy="2103120"/>
           </a:xfrm>
           <a:prstGeom prst="rect">
             <a:avLst/>
@@ -8742,163 +9139,59 @@
               </a:spcAft>
             </a:pPr>
             <a:r>
-              <a:rPr sz="1450" b="0" i="0">
+              <a:rPr sz="1500" b="0" i="0">
                 <a:solidFill>
                   <a:srgbClr val="333740"/>
                 </a:solidFill>
                 <a:latin typeface="Arial"/>
               </a:rPr>
-              <a:t>Untreated control trajectory (random intercept + AR(1) errors), heteroscedastic scale, and the treatment effect:</a:t>
-            </a:r>
-          </a:p>
-        </p:txBody>
-      </p:sp>
-      <p:sp>
-        <p:nvSpPr>
-          <p:cNvPr id="9" name="Rectangle 8"/>
-          <p:cNvSpPr/>
-          <p:nvPr/>
-        </p:nvSpPr>
-        <p:spPr>
-          <a:xfrm>
-            <a:off x="530352" y="3246120"/>
-            <a:ext cx="8808509" cy="731520"/>
-          </a:xfrm>
-          <a:prstGeom prst="rect">
-            <a:avLst/>
-          </a:prstGeom>
-          <a:solidFill>
-            <a:srgbClr val="F5F7FA"/>
-          </a:solidFill>
-          <a:ln>
-            <a:noFill/>
-          </a:ln>
-          <a:effectLst/>
-        </p:spPr>
-        <p:style>
-          <a:lnRef idx="1">
-            <a:schemeClr val="accent1"/>
-          </a:lnRef>
-          <a:fillRef idx="3">
-            <a:schemeClr val="accent1"/>
-          </a:fillRef>
-          <a:effectRef idx="2">
-            <a:schemeClr val="accent1"/>
-          </a:effectRef>
-          <a:fontRef idx="minor">
-            <a:schemeClr val="lt1"/>
-          </a:fontRef>
-        </p:style>
-        <p:txBody>
-          <a:bodyPr rtlCol="0" anchor="ctr"/>
-          <a:lstStyle/>
-          <a:p>
-            <a:pPr algn="ctr"/>
-          </a:p>
-        </p:txBody>
-      </p:sp>
-      <p:pic>
-        <p:nvPicPr>
-          <p:cNvPr id="10" name="Picture 9" descr="eq_dgp_y.png"/>
-          <p:cNvPicPr>
-            <a:picLocks noChangeAspect="1"/>
-          </p:cNvPicPr>
-          <p:nvPr/>
-        </p:nvPicPr>
-        <p:blipFill>
-          <a:blip r:embed="rId3"/>
-          <a:stretch>
-            <a:fillRect/>
-          </a:stretch>
-        </p:blipFill>
-        <p:spPr>
-          <a:xfrm>
-            <a:off x="640080" y="3337560"/>
-            <a:ext cx="8589053" cy="548640"/>
-          </a:xfrm>
-          <a:prstGeom prst="rect">
-            <a:avLst/>
-          </a:prstGeom>
-        </p:spPr>
-      </p:pic>
-      <p:sp>
-        <p:nvSpPr>
-          <p:cNvPr id="11" name="Rectangle 10"/>
-          <p:cNvSpPr/>
-          <p:nvPr/>
-        </p:nvSpPr>
-        <p:spPr>
-          <a:xfrm>
-            <a:off x="530352" y="3886200"/>
-            <a:ext cx="6333904" cy="685800"/>
-          </a:xfrm>
-          <a:prstGeom prst="rect">
-            <a:avLst/>
-          </a:prstGeom>
-          <a:solidFill>
-            <a:srgbClr val="F5F7FA"/>
-          </a:solidFill>
-          <a:ln>
-            <a:noFill/>
-          </a:ln>
-          <a:effectLst/>
-        </p:spPr>
-        <p:style>
-          <a:lnRef idx="1">
-            <a:schemeClr val="accent1"/>
-          </a:lnRef>
-          <a:fillRef idx="3">
-            <a:schemeClr val="accent1"/>
-          </a:fillRef>
-          <a:effectRef idx="2">
-            <a:schemeClr val="accent1"/>
-          </a:effectRef>
-          <a:fontRef idx="minor">
-            <a:schemeClr val="lt1"/>
-          </a:fontRef>
-        </p:style>
-        <p:txBody>
-          <a:bodyPr rtlCol="0" anchor="ctr"/>
-          <a:lstStyle/>
-          <a:p>
-            <a:pPr algn="ctr"/>
-          </a:p>
-        </p:txBody>
-      </p:sp>
-      <p:pic>
-        <p:nvPicPr>
-          <p:cNvPr id="12" name="Picture 11" descr="eq_dgp_sig.png"/>
-          <p:cNvPicPr>
-            <a:picLocks noChangeAspect="1"/>
-          </p:cNvPicPr>
-          <p:nvPr/>
-        </p:nvPicPr>
-        <p:blipFill>
-          <a:blip r:embed="rId4"/>
-          <a:stretch>
-            <a:fillRect/>
-          </a:stretch>
-        </p:blipFill>
-        <p:spPr>
-          <a:xfrm>
-            <a:off x="640080" y="3977639"/>
-            <a:ext cx="6114448" cy="502920"/>
-          </a:xfrm>
-          <a:prstGeom prst="rect">
-            <a:avLst/>
-          </a:prstGeom>
-        </p:spPr>
-      </p:pic>
-      <p:sp>
-        <p:nvSpPr>
-          <p:cNvPr id="13" name="TextBox 12"/>
+              <a:t>λ = efficient inverse-variance weight: borrow LESS from noisier external controls → lower RMSE.</a:t>
+            </a:r>
+          </a:p>
+          <a:p>
+            <a:pPr>
+              <a:spcAft>
+                <a:spcPts val="800"/>
+              </a:spcAft>
+            </a:pPr>
+            <a:r>
+              <a:rPr sz="1500" b="0" i="0">
+                <a:solidFill>
+                  <a:srgbClr val="333740"/>
+                </a:solidFill>
+                <a:latin typeface="Arial"/>
+              </a:rPr>
+              <a:t>Doubly robust: consistent if either the outcome model or the source/weight model is correct.</a:t>
+            </a:r>
+          </a:p>
+          <a:p>
+            <a:pPr>
+              <a:spcAft>
+                <a:spcPts val="800"/>
+              </a:spcAft>
+            </a:pPr>
+            <a:r>
+              <a:rPr sz="1500" b="1" i="0">
+                <a:solidFill>
+                  <a:srgbClr val="1F2A44"/>
+                </a:solidFill>
+                <a:latin typeface="Arial"/>
+              </a:rPr>
+              <a:t>Output: τ̂ with a full-pipeline bootstrap confidence interval that re-runs the entire screen on each resample (so selection uncertainty is propagated).</a:t>
+            </a:r>
+          </a:p>
+        </p:txBody>
+      </p:sp>
+      <p:sp>
+        <p:nvSpPr>
+          <p:cNvPr id="9" name="TextBox 8"/>
           <p:cNvSpPr txBox="1"/>
           <p:nvPr/>
         </p:nvSpPr>
         <p:spPr>
           <a:xfrm>
-            <a:off x="502920" y="4617720"/>
-            <a:ext cx="11247120" cy="640080"/>
+            <a:off x="11094415" y="6455664"/>
+            <a:ext cx="914400" cy="320040"/>
           </a:xfrm>
           <a:prstGeom prst="rect">
             <a:avLst/>
@@ -8911,152 +9204,6 @@
           </a:bodyPr>
           <a:lstStyle/>
           <a:p>
-            <a:pPr>
-              <a:spcAft>
-                <a:spcPts val="800"/>
-              </a:spcAft>
-            </a:pPr>
-            <a:r>
-              <a:rPr sz="1450" b="0" i="0">
-                <a:solidFill>
-                  <a:srgbClr val="333740"/>
-                </a:solidFill>
-                <a:latin typeface="Arial"/>
-              </a:rPr>
-              <a:t>A fraction π_B of external controls are incompatible, with drift magnitude Δ (the signal-to-noise knob):</a:t>
-            </a:r>
-          </a:p>
-        </p:txBody>
-      </p:sp>
-      <p:sp>
-        <p:nvSpPr>
-          <p:cNvPr id="14" name="Rectangle 13"/>
-          <p:cNvSpPr/>
-          <p:nvPr/>
-        </p:nvSpPr>
-        <p:spPr>
-          <a:xfrm>
-            <a:off x="530352" y="5120640"/>
-            <a:ext cx="9505696" cy="731520"/>
-          </a:xfrm>
-          <a:prstGeom prst="rect">
-            <a:avLst/>
-          </a:prstGeom>
-          <a:solidFill>
-            <a:srgbClr val="F5F7FA"/>
-          </a:solidFill>
-          <a:ln>
-            <a:noFill/>
-          </a:ln>
-          <a:effectLst/>
-        </p:spPr>
-        <p:style>
-          <a:lnRef idx="1">
-            <a:schemeClr val="accent1"/>
-          </a:lnRef>
-          <a:fillRef idx="3">
-            <a:schemeClr val="accent1"/>
-          </a:fillRef>
-          <a:effectRef idx="2">
-            <a:schemeClr val="accent1"/>
-          </a:effectRef>
-          <a:fontRef idx="minor">
-            <a:schemeClr val="lt1"/>
-          </a:fontRef>
-        </p:style>
-        <p:txBody>
-          <a:bodyPr rtlCol="0" anchor="ctr"/>
-          <a:lstStyle/>
-          <a:p>
-            <a:pPr algn="ctr"/>
-          </a:p>
-        </p:txBody>
-      </p:sp>
-      <p:pic>
-        <p:nvPicPr>
-          <p:cNvPr id="15" name="Picture 14" descr="eq_dgp_contam.png"/>
-          <p:cNvPicPr>
-            <a:picLocks noChangeAspect="1"/>
-          </p:cNvPicPr>
-          <p:nvPr/>
-        </p:nvPicPr>
-        <p:blipFill>
-          <a:blip r:embed="rId5"/>
-          <a:stretch>
-            <a:fillRect/>
-          </a:stretch>
-        </p:blipFill>
-        <p:spPr>
-          <a:xfrm>
-            <a:off x="640080" y="5212080"/>
-            <a:ext cx="9286240" cy="548640"/>
-          </a:xfrm>
-          <a:prstGeom prst="rect">
-            <a:avLst/>
-          </a:prstGeom>
-        </p:spPr>
-      </p:pic>
-      <p:sp>
-        <p:nvSpPr>
-          <p:cNvPr id="16" name="TextBox 15"/>
-          <p:cNvSpPr txBox="1"/>
-          <p:nvPr/>
-        </p:nvSpPr>
-        <p:spPr>
-          <a:xfrm>
-            <a:off x="502920" y="5806440"/>
-            <a:ext cx="11247120" cy="822960"/>
-          </a:xfrm>
-          <a:prstGeom prst="rect">
-            <a:avLst/>
-          </a:prstGeom>
-          <a:noFill/>
-        </p:spPr>
-        <p:txBody>
-          <a:bodyPr wrap="square" anchor="t">
-            <a:spAutoFit/>
-          </a:bodyPr>
-          <a:lstStyle/>
-          <a:p>
-            <a:pPr>
-              <a:spcAft>
-                <a:spcPts val="800"/>
-              </a:spcAft>
-            </a:pPr>
-            <a:r>
-              <a:rPr sz="1350" b="1" i="0">
-                <a:solidFill>
-                  <a:srgbClr val="1F2A44"/>
-                </a:solidFill>
-                <a:latin typeface="Arial"/>
-              </a:rPr>
-              <a:t>Reference cell (everything is one axis away from it):  n₁=120 treated, n₀=60 RCT controls, 200 ECs, π_B=0.3, pattern A (global shift), Δ=8, estimand c₂, weighted CV+, correct model.</a:t>
-            </a:r>
-          </a:p>
-        </p:txBody>
-      </p:sp>
-      <p:sp>
-        <p:nvSpPr>
-          <p:cNvPr id="17" name="TextBox 16"/>
-          <p:cNvSpPr txBox="1"/>
-          <p:nvPr/>
-        </p:nvSpPr>
-        <p:spPr>
-          <a:xfrm>
-            <a:off x="11094415" y="6455664"/>
-            <a:ext cx="914400" cy="320040"/>
-          </a:xfrm>
-          <a:prstGeom prst="rect">
-            <a:avLst/>
-          </a:prstGeom>
-          <a:noFill/>
-        </p:spPr>
-        <p:txBody>
-          <a:bodyPr wrap="square" anchor="t">
-            <a:spAutoFit/>
-          </a:bodyPr>
-          <a:lstStyle/>
-          <a:p>
             <a:pPr algn="r"/>
             <a:r>
               <a:rPr sz="1100" b="0" i="0">
@@ -9065,7 +9212,7 @@
                 </a:solidFill>
                 <a:latin typeface="Arial"/>
               </a:rPr>
-              <a:t>19</a:t>
+              <a:t>20</a:t>
             </a:r>
           </a:p>
         </p:txBody>
@@ -9097,7 +9244,51 @@
         <p:spPr>
           <a:xfrm>
             <a:off x="0" y="0"/>
-            <a:ext cx="12191695" cy="128016"/>
+            <a:ext cx="12191695" cy="6858000"/>
+          </a:xfrm>
+          <a:prstGeom prst="rect">
+            <a:avLst/>
+          </a:prstGeom>
+          <a:solidFill>
+            <a:srgbClr val="1F2A44"/>
+          </a:solidFill>
+          <a:ln>
+            <a:noFill/>
+          </a:ln>
+          <a:effectLst/>
+        </p:spPr>
+        <p:style>
+          <a:lnRef idx="1">
+            <a:schemeClr val="accent1"/>
+          </a:lnRef>
+          <a:fillRef idx="3">
+            <a:schemeClr val="accent1"/>
+          </a:fillRef>
+          <a:effectRef idx="2">
+            <a:schemeClr val="accent1"/>
+          </a:effectRef>
+          <a:fontRef idx="minor">
+            <a:schemeClr val="lt1"/>
+          </a:fontRef>
+        </p:style>
+        <p:txBody>
+          <a:bodyPr rtlCol="0" anchor="ctr"/>
+          <a:lstStyle/>
+          <a:p>
+            <a:pPr algn="ctr"/>
+          </a:p>
+        </p:txBody>
+      </p:sp>
+      <p:sp>
+        <p:nvSpPr>
+          <p:cNvPr id="3" name="Rectangle 2"/>
+          <p:cNvSpPr/>
+          <p:nvPr/>
+        </p:nvSpPr>
+        <p:spPr>
+          <a:xfrm>
+            <a:off x="0" y="2761488"/>
+            <a:ext cx="12191695" cy="45720"/>
           </a:xfrm>
           <a:prstGeom prst="rect">
             <a:avLst/>
@@ -9134,14 +9325,14 @@
       </p:sp>
       <p:sp>
         <p:nvSpPr>
-          <p:cNvPr id="3" name="TextBox 2"/>
+          <p:cNvPr id="4" name="TextBox 3"/>
           <p:cNvSpPr txBox="1"/>
           <p:nvPr/>
         </p:nvSpPr>
         <p:spPr>
           <a:xfrm>
-            <a:off x="502920" y="274320"/>
-            <a:ext cx="11185855" cy="932688"/>
+            <a:off x="1005840" y="2148840"/>
+            <a:ext cx="10180015" cy="2011680"/>
           </a:xfrm>
           <a:prstGeom prst="rect">
             <a:avLst/>
@@ -9156,332 +9347,44 @@
           <a:p>
             <a:pPr>
               <a:spcAft>
-                <a:spcPts val="200"/>
-              </a:spcAft>
-            </a:pPr>
-            <a:r>
-              <a:rPr sz="1250" b="1" i="0">
+                <a:spcPts val="600"/>
+              </a:spcAft>
+            </a:pPr>
+            <a:r>
+              <a:rPr sz="1700" b="1" i="0">
                 <a:solidFill>
                   <a:srgbClr val="2F7DC8"/>
                 </a:solidFill>
                 <a:latin typeface="Arial"/>
               </a:rPr>
-              <a:t>SIMULATION SETUP</a:t>
-            </a:r>
-          </a:p>
-          <a:p>
-            <a:r>
-              <a:rPr sz="2700" b="1" i="0">
-                <a:solidFill>
-                  <a:srgbClr val="1F2A44"/>
-                </a:solidFill>
-                <a:latin typeface="Arial"/>
-              </a:rPr>
-              <a:t>The screen in action (one draw at the reference cell)</a:t>
-            </a:r>
-          </a:p>
-        </p:txBody>
-      </p:sp>
-      <p:sp>
-        <p:nvSpPr>
-          <p:cNvPr id="4" name="Rectangle 3"/>
-          <p:cNvSpPr/>
-          <p:nvPr/>
-        </p:nvSpPr>
-        <p:spPr>
-          <a:xfrm>
-            <a:off x="521207" y="1225296"/>
-            <a:ext cx="2103120" cy="41148"/>
-          </a:xfrm>
-          <a:prstGeom prst="rect">
-            <a:avLst/>
-          </a:prstGeom>
-          <a:solidFill>
-            <a:srgbClr val="2F7DC8"/>
-          </a:solidFill>
-          <a:ln>
-            <a:noFill/>
-          </a:ln>
-          <a:effectLst/>
-        </p:spPr>
-        <p:style>
-          <a:lnRef idx="1">
-            <a:schemeClr val="accent1"/>
-          </a:lnRef>
-          <a:fillRef idx="3">
-            <a:schemeClr val="accent1"/>
-          </a:fillRef>
-          <a:effectRef idx="2">
-            <a:schemeClr val="accent1"/>
-          </a:effectRef>
-          <a:fontRef idx="minor">
-            <a:schemeClr val="lt1"/>
-          </a:fontRef>
-        </p:style>
-        <p:txBody>
-          <a:bodyPr rtlCol="0" anchor="ctr"/>
-          <a:lstStyle/>
-          <a:p>
-            <a:pPr algn="ctr"/>
-          </a:p>
-        </p:txBody>
-      </p:sp>
-      <p:pic>
-        <p:nvPicPr>
-          <p:cNvPr id="5" name="Picture 4" descr="fig_outcome.png"/>
-          <p:cNvPicPr>
-            <a:picLocks noChangeAspect="1"/>
-          </p:cNvPicPr>
-          <p:nvPr/>
-        </p:nvPicPr>
-        <p:blipFill>
-          <a:blip r:embed="rId2"/>
-          <a:stretch>
-            <a:fillRect/>
-          </a:stretch>
-        </p:blipFill>
-        <p:spPr>
-          <a:xfrm>
-            <a:off x="6321612" y="1417320"/>
-            <a:ext cx="5279014" cy="2331720"/>
-          </a:xfrm>
-          <a:prstGeom prst="rect">
-            <a:avLst/>
-          </a:prstGeom>
-        </p:spPr>
-      </p:pic>
-      <p:pic>
-        <p:nvPicPr>
-          <p:cNvPr id="6" name="Picture 5" descr="fig_pval.png"/>
-          <p:cNvPicPr>
-            <a:picLocks noChangeAspect="1"/>
-          </p:cNvPicPr>
-          <p:nvPr/>
-        </p:nvPicPr>
-        <p:blipFill>
-          <a:blip r:embed="rId3"/>
-          <a:stretch>
-            <a:fillRect/>
-          </a:stretch>
-        </p:blipFill>
-        <p:spPr>
-          <a:xfrm>
-            <a:off x="6321612" y="3886200"/>
-            <a:ext cx="5279014" cy="2331720"/>
-          </a:xfrm>
-          <a:prstGeom prst="rect">
-            <a:avLst/>
-          </a:prstGeom>
-        </p:spPr>
-      </p:pic>
-      <p:sp>
-        <p:nvSpPr>
-          <p:cNvPr id="7" name="TextBox 6"/>
-          <p:cNvSpPr txBox="1"/>
-          <p:nvPr/>
-        </p:nvSpPr>
-        <p:spPr>
-          <a:xfrm>
-            <a:off x="502920" y="1371600"/>
-            <a:ext cx="5486400" cy="5029200"/>
-          </a:xfrm>
-          <a:prstGeom prst="rect">
-            <a:avLst/>
-          </a:prstGeom>
-          <a:noFill/>
-        </p:spPr>
-        <p:txBody>
-          <a:bodyPr wrap="square" anchor="t">
-            <a:spAutoFit/>
-          </a:bodyPr>
-          <a:lstStyle/>
+              <a:t>PART III</a:t>
+            </a:r>
+          </a:p>
+          <a:p>
+            <a:r>
+              <a:rPr sz="4000" b="1" i="0">
+                <a:solidFill>
+                  <a:srgbClr val="FFFFFF"/>
+                </a:solidFill>
+                <a:latin typeface="Arial"/>
+              </a:rPr>
+              <a:t>Simulation</a:t>
+            </a:r>
+          </a:p>
           <a:p>
             <a:pPr>
               <a:spcBef>
-                <a:spcPts val="400"/>
+                <a:spcPts val="800"/>
               </a:spcBef>
-              <a:spcAft>
-                <a:spcPts val="900"/>
-              </a:spcAft>
-            </a:pPr>
-            <a:r>
-              <a:rPr sz="1500" b="1" i="0">
-                <a:solidFill>
-                  <a:srgbClr val="2F7DC8"/>
-                </a:solidFill>
-                <a:latin typeface="Arial"/>
-              </a:rPr>
-              <a:t>Top — raw outcome</a:t>
-            </a:r>
-          </a:p>
-          <a:p>
-            <a:pPr>
-              <a:spcAft>
-                <a:spcPts val="800"/>
-              </a:spcAft>
-            </a:pPr>
-            <a:r>
-              <a:rPr sz="1350" b="1" i="0">
-                <a:solidFill>
-                  <a:srgbClr val="2F7DC8"/>
-                </a:solidFill>
-                <a:latin typeface="Arial"/>
-              </a:rPr>
-              <a:t>▪  </a:t>
-            </a:r>
-            <a:r>
-              <a:rPr sz="1350" b="0" i="0">
-                <a:solidFill>
-                  <a:srgbClr val="333740"/>
-                </a:solidFill>
-                <a:latin typeface="Arial"/>
-              </a:rPr>
-              <a:t>Compatible ECs (blue) overlap the RCT controls (gray) but sit slightly higher, purely because the external mix carries more severe subjects (covariate shift, NOT incompatibility).</a:t>
-            </a:r>
-          </a:p>
-          <a:p>
-            <a:pPr>
-              <a:spcAft>
-                <a:spcPts val="800"/>
-              </a:spcAft>
-            </a:pPr>
-            <a:r>
-              <a:rPr sz="1350" b="1" i="0">
-                <a:solidFill>
-                  <a:srgbClr val="2F7DC8"/>
-                </a:solidFill>
-                <a:latin typeface="Arial"/>
-              </a:rPr>
-              <a:t>▪  </a:t>
-            </a:r>
-            <a:r>
-              <a:rPr sz="1350" b="0" i="0">
-                <a:solidFill>
-                  <a:srgbClr val="333740"/>
-                </a:solidFill>
-                <a:latin typeface="Arial"/>
-              </a:rPr>
-              <a:t>Contaminated ECs (amber) sit far to the right. A raw-outcome threshold would confound shift with contamination.</a:t>
-            </a:r>
-          </a:p>
-          <a:p>
-            <a:pPr>
-              <a:spcBef>
-                <a:spcPts val="400"/>
-              </a:spcBef>
-              <a:spcAft>
-                <a:spcPts val="900"/>
-              </a:spcAft>
-            </a:pPr>
-            <a:r>
-              <a:rPr sz="1500" b="1" i="0">
-                <a:solidFill>
-                  <a:srgbClr val="2F7DC8"/>
-                </a:solidFill>
-                <a:latin typeface="Arial"/>
-              </a:rPr>
-              <a:t>Bottom — weighted residual-rank p-values</a:t>
-            </a:r>
-          </a:p>
-          <a:p>
-            <a:pPr>
-              <a:spcAft>
-                <a:spcPts val="800"/>
-              </a:spcAft>
-            </a:pPr>
-            <a:r>
-              <a:rPr sz="1350" b="1" i="0">
-                <a:solidFill>
-                  <a:srgbClr val="2F7DC8"/>
-                </a:solidFill>
-                <a:latin typeface="Arial"/>
-              </a:rPr>
-              <a:t>▪  </a:t>
-            </a:r>
-            <a:r>
-              <a:rPr sz="1350" b="0" i="0">
-                <a:solidFill>
-                  <a:srgbClr val="333740"/>
-                </a:solidFill>
-                <a:latin typeface="Arial"/>
-              </a:rPr>
-              <a:t>Contaminated ECs pile up near p = 0 and fall below γ — all screened out.</a:t>
-            </a:r>
-          </a:p>
-          <a:p>
-            <a:pPr>
-              <a:spcAft>
-                <a:spcPts val="800"/>
-              </a:spcAft>
-            </a:pPr>
-            <a:r>
-              <a:rPr sz="1350" b="1" i="0">
-                <a:solidFill>
-                  <a:srgbClr val="2F7DC8"/>
-                </a:solidFill>
-                <a:latin typeface="Arial"/>
-              </a:rPr>
-              <a:t>▪  </a:t>
-            </a:r>
-            <a:r>
-              <a:rPr sz="1350" b="0" i="0">
-                <a:solidFill>
-                  <a:srgbClr val="333740"/>
-                </a:solidFill>
-                <a:latin typeface="Arial"/>
-              </a:rPr>
-              <a:t>Compatible ECs are roughly uniform on (0,1] and are kept; only about 6% fall below γ.</a:t>
-            </a:r>
-          </a:p>
-          <a:p>
-            <a:pPr>
-              <a:spcAft>
-                <a:spcPts val="800"/>
-              </a:spcAft>
-            </a:pPr>
-            <a:r>
-              <a:rPr sz="1350" b="1" i="0">
-                <a:solidFill>
-                  <a:srgbClr val="1F2A44"/>
-                </a:solidFill>
-                <a:latin typeface="Arial"/>
-              </a:rPr>
-              <a:t>The screen truncates the calibrated p-value scale at γ, not the raw outcome.</a:t>
-            </a:r>
-          </a:p>
-        </p:txBody>
-      </p:sp>
-      <p:sp>
-        <p:nvSpPr>
-          <p:cNvPr id="8" name="TextBox 7"/>
-          <p:cNvSpPr txBox="1"/>
-          <p:nvPr/>
-        </p:nvSpPr>
-        <p:spPr>
-          <a:xfrm>
-            <a:off x="11094415" y="6455664"/>
-            <a:ext cx="914400" cy="320040"/>
-          </a:xfrm>
-          <a:prstGeom prst="rect">
-            <a:avLst/>
-          </a:prstGeom>
-          <a:noFill/>
-        </p:spPr>
-        <p:txBody>
-          <a:bodyPr wrap="square" anchor="t">
-            <a:spAutoFit/>
-          </a:bodyPr>
-          <a:lstStyle/>
-          <a:p>
-            <a:pPr algn="r"/>
-            <a:r>
-              <a:rPr sz="1100" b="0" i="0">
-                <a:solidFill>
-                  <a:srgbClr val="6B7280"/>
-                </a:solidFill>
-                <a:latin typeface="Arial"/>
-              </a:rPr>
-              <a:t>20</a:t>
+            </a:pPr>
+            <a:r>
+              <a:rPr sz="1600" b="0" i="1">
+                <a:solidFill>
+                  <a:srgbClr val="C9D4E4"/>
+                </a:solidFill>
+                <a:latin typeface="Arial"/>
+              </a:rPr>
+              <a:t>A transparent longitudinal data-generating process, and the results</a:t>
             </a:r>
           </a:p>
         </p:txBody>
@@ -9593,7 +9496,7 @@
                 </a:solidFill>
                 <a:latin typeface="Arial"/>
               </a:rPr>
-              <a:t>When can the screen detect contamination?</a:t>
+              <a:t>Simulation: the data-generating process</a:t>
             </a:r>
           </a:p>
         </p:txBody>
@@ -9650,8 +9553,8 @@
         </p:nvSpPr>
         <p:spPr>
           <a:xfrm>
-            <a:off x="502920" y="1417320"/>
-            <a:ext cx="11155680" cy="2103120"/>
+            <a:off x="502920" y="1371600"/>
+            <a:ext cx="11247120" cy="822960"/>
           </a:xfrm>
           <a:prstGeom prst="rect">
             <a:avLst/>
@@ -9670,111 +9573,64 @@
               </a:spcAft>
             </a:pPr>
             <a:r>
-              <a:rPr sz="1500" b="1" i="0">
-                <a:solidFill>
-                  <a:srgbClr val="2F7DC8"/>
-                </a:solidFill>
-                <a:latin typeface="Arial"/>
-              </a:rPr>
-              <a:t>▪  </a:t>
-            </a:r>
-            <a:r>
-              <a:rPr sz="1500" b="0" i="0">
+              <a:rPr sz="1450" b="0" i="0">
                 <a:solidFill>
                   <a:srgbClr val="333740"/>
                 </a:solidFill>
                 <a:latin typeface="Arial"/>
               </a:rPr>
-              <a:t>Detection is limited by the drift's signal-to-noise ratio Δ / σ:</a:t>
-            </a:r>
-          </a:p>
-          <a:p>
-            <a:pPr lvl="1">
-              <a:spcAft>
-                <a:spcPts val="600"/>
-              </a:spcAft>
-            </a:pPr>
-            <a:r>
-              <a:rPr sz="1400" b="0" i="0">
-                <a:solidFill>
-                  <a:srgbClr val="6B7280"/>
-                </a:solidFill>
-                <a:latin typeface="Arial"/>
-              </a:rPr>
-              <a:t>–  </a:t>
-            </a:r>
-            <a:r>
-              <a:rPr sz="1400" b="0" i="0">
-                <a:solidFill>
-                  <a:srgbClr val="333740"/>
-                </a:solidFill>
-                <a:latin typeface="Arial"/>
-              </a:rPr>
-              <a:t>Low Δ/σ — contamination is buried in the noise and leaks through ANY screen.</a:t>
-            </a:r>
-          </a:p>
-          <a:p>
-            <a:pPr lvl="1">
-              <a:spcAft>
-                <a:spcPts val="600"/>
-              </a:spcAft>
-            </a:pPr>
-            <a:r>
-              <a:rPr sz="1400" b="0" i="0">
-                <a:solidFill>
-                  <a:srgbClr val="6B7280"/>
-                </a:solidFill>
-                <a:latin typeface="Arial"/>
-              </a:rPr>
-              <a:t>–  </a:t>
-            </a:r>
-            <a:r>
-              <a:rPr sz="1400" b="0" i="0">
-                <a:solidFill>
-                  <a:srgbClr val="333740"/>
-                </a:solidFill>
-                <a:latin typeface="Arial"/>
-              </a:rPr>
-              <a:t>High Δ/σ — cleanly separable and reliably removed.</a:t>
-            </a:r>
-          </a:p>
-          <a:p>
-            <a:pPr>
-              <a:spcAft>
-                <a:spcPts val="800"/>
-              </a:spcAft>
-            </a:pPr>
-            <a:r>
-              <a:rPr sz="1500" b="1" i="0">
-                <a:solidFill>
-                  <a:srgbClr val="1F2A44"/>
-                </a:solidFill>
-                <a:latin typeface="Arial"/>
-              </a:rPr>
-              <a:t>So borrowing is safest precisely when incompatibility is either absent, or large enough to catch.</a:t>
-            </a:r>
-          </a:p>
-          <a:p>
-            <a:pPr>
-              <a:spcAft>
-                <a:spcPts val="800"/>
-              </a:spcAft>
-            </a:pPr>
-            <a:r>
-              <a:rPr sz="1500" b="0" i="0">
-                <a:solidFill>
-                  <a:srgbClr val="333740"/>
-                </a:solidFill>
-                <a:latin typeface="Arial"/>
-              </a:rPr>
-              <a:t>This also bounds the gain: the screen can only remove what it can see.</a:t>
-            </a:r>
+              <a:t>Four visits, one binary severity covariate X. Randomized and external covariate mixes differ (shift, overlap preserved):</a:t>
+            </a:r>
+          </a:p>
+        </p:txBody>
+      </p:sp>
+      <p:sp>
+        <p:nvSpPr>
+          <p:cNvPr id="6" name="Rectangle 5"/>
+          <p:cNvSpPr/>
+          <p:nvPr/>
+        </p:nvSpPr>
+        <p:spPr>
+          <a:xfrm>
+            <a:off x="530352" y="1985783"/>
+            <a:ext cx="8997696" cy="710160"/>
+          </a:xfrm>
+          <a:prstGeom prst="rect">
+            <a:avLst/>
+          </a:prstGeom>
+          <a:solidFill>
+            <a:srgbClr val="F5F7FA"/>
+          </a:solidFill>
+          <a:ln>
+            <a:noFill/>
+          </a:ln>
+          <a:effectLst/>
+        </p:spPr>
+        <p:style>
+          <a:lnRef idx="1">
+            <a:schemeClr val="accent1"/>
+          </a:lnRef>
+          <a:fillRef idx="3">
+            <a:schemeClr val="accent1"/>
+          </a:fillRef>
+          <a:effectRef idx="2">
+            <a:schemeClr val="accent1"/>
+          </a:effectRef>
+          <a:fontRef idx="minor">
+            <a:schemeClr val="lt1"/>
+          </a:fontRef>
+        </p:style>
+        <p:txBody>
+          <a:bodyPr rtlCol="0" anchor="ctr"/>
+          <a:lstStyle/>
+          <a:p>
+            <a:pPr algn="ctr"/>
           </a:p>
         </p:txBody>
       </p:sp>
       <p:pic>
         <p:nvPicPr>
-          <p:cNvPr id="6" name="Picture 5" descr="fig_snr.png"/>
+          <p:cNvPr id="7" name="Picture 6" descr="eq_dgp_shift.png"/>
           <p:cNvPicPr>
             <a:picLocks noChangeAspect="1"/>
           </p:cNvPicPr>
@@ -9788,8 +9644,8 @@
         </p:blipFill>
         <p:spPr>
           <a:xfrm>
-            <a:off x="3750564" y="3566160"/>
-            <a:ext cx="4660392" cy="2834640"/>
+            <a:off x="640080" y="2077223"/>
+            <a:ext cx="8778240" cy="527280"/>
           </a:xfrm>
           <a:prstGeom prst="rect">
             <a:avLst/>
@@ -9798,7 +9654,328 @@
       </p:pic>
       <p:sp>
         <p:nvSpPr>
-          <p:cNvPr id="7" name="TextBox 6"/>
+          <p:cNvPr id="8" name="TextBox 7"/>
+          <p:cNvSpPr txBox="1"/>
+          <p:nvPr/>
+        </p:nvSpPr>
+        <p:spPr>
+          <a:xfrm>
+            <a:off x="502920" y="2743200"/>
+            <a:ext cx="11247120" cy="640080"/>
+          </a:xfrm>
+          <a:prstGeom prst="rect">
+            <a:avLst/>
+          </a:prstGeom>
+          <a:noFill/>
+        </p:spPr>
+        <p:txBody>
+          <a:bodyPr wrap="square" anchor="t">
+            <a:spAutoFit/>
+          </a:bodyPr>
+          <a:lstStyle/>
+          <a:p>
+            <a:pPr>
+              <a:spcAft>
+                <a:spcPts val="800"/>
+              </a:spcAft>
+            </a:pPr>
+            <a:r>
+              <a:rPr sz="1450" b="0" i="0">
+                <a:solidFill>
+                  <a:srgbClr val="333740"/>
+                </a:solidFill>
+                <a:latin typeface="Arial"/>
+              </a:rPr>
+              <a:t>Untreated control trajectory (random intercept + AR(1) errors), heteroscedastic scale, and the treatment effect:</a:t>
+            </a:r>
+          </a:p>
+        </p:txBody>
+      </p:sp>
+      <p:sp>
+        <p:nvSpPr>
+          <p:cNvPr id="9" name="Rectangle 8"/>
+          <p:cNvSpPr/>
+          <p:nvPr/>
+        </p:nvSpPr>
+        <p:spPr>
+          <a:xfrm>
+            <a:off x="530352" y="3246120"/>
+            <a:ext cx="8808509" cy="731520"/>
+          </a:xfrm>
+          <a:prstGeom prst="rect">
+            <a:avLst/>
+          </a:prstGeom>
+          <a:solidFill>
+            <a:srgbClr val="F5F7FA"/>
+          </a:solidFill>
+          <a:ln>
+            <a:noFill/>
+          </a:ln>
+          <a:effectLst/>
+        </p:spPr>
+        <p:style>
+          <a:lnRef idx="1">
+            <a:schemeClr val="accent1"/>
+          </a:lnRef>
+          <a:fillRef idx="3">
+            <a:schemeClr val="accent1"/>
+          </a:fillRef>
+          <a:effectRef idx="2">
+            <a:schemeClr val="accent1"/>
+          </a:effectRef>
+          <a:fontRef idx="minor">
+            <a:schemeClr val="lt1"/>
+          </a:fontRef>
+        </p:style>
+        <p:txBody>
+          <a:bodyPr rtlCol="0" anchor="ctr"/>
+          <a:lstStyle/>
+          <a:p>
+            <a:pPr algn="ctr"/>
+          </a:p>
+        </p:txBody>
+      </p:sp>
+      <p:pic>
+        <p:nvPicPr>
+          <p:cNvPr id="10" name="Picture 9" descr="eq_dgp_y.png"/>
+          <p:cNvPicPr>
+            <a:picLocks noChangeAspect="1"/>
+          </p:cNvPicPr>
+          <p:nvPr/>
+        </p:nvPicPr>
+        <p:blipFill>
+          <a:blip r:embed="rId3"/>
+          <a:stretch>
+            <a:fillRect/>
+          </a:stretch>
+        </p:blipFill>
+        <p:spPr>
+          <a:xfrm>
+            <a:off x="640080" y="3337560"/>
+            <a:ext cx="8589053" cy="548640"/>
+          </a:xfrm>
+          <a:prstGeom prst="rect">
+            <a:avLst/>
+          </a:prstGeom>
+        </p:spPr>
+      </p:pic>
+      <p:sp>
+        <p:nvSpPr>
+          <p:cNvPr id="11" name="Rectangle 10"/>
+          <p:cNvSpPr/>
+          <p:nvPr/>
+        </p:nvSpPr>
+        <p:spPr>
+          <a:xfrm>
+            <a:off x="530352" y="3886200"/>
+            <a:ext cx="6333904" cy="685800"/>
+          </a:xfrm>
+          <a:prstGeom prst="rect">
+            <a:avLst/>
+          </a:prstGeom>
+          <a:solidFill>
+            <a:srgbClr val="F5F7FA"/>
+          </a:solidFill>
+          <a:ln>
+            <a:noFill/>
+          </a:ln>
+          <a:effectLst/>
+        </p:spPr>
+        <p:style>
+          <a:lnRef idx="1">
+            <a:schemeClr val="accent1"/>
+          </a:lnRef>
+          <a:fillRef idx="3">
+            <a:schemeClr val="accent1"/>
+          </a:fillRef>
+          <a:effectRef idx="2">
+            <a:schemeClr val="accent1"/>
+          </a:effectRef>
+          <a:fontRef idx="minor">
+            <a:schemeClr val="lt1"/>
+          </a:fontRef>
+        </p:style>
+        <p:txBody>
+          <a:bodyPr rtlCol="0" anchor="ctr"/>
+          <a:lstStyle/>
+          <a:p>
+            <a:pPr algn="ctr"/>
+          </a:p>
+        </p:txBody>
+      </p:sp>
+      <p:pic>
+        <p:nvPicPr>
+          <p:cNvPr id="12" name="Picture 11" descr="eq_dgp_sig.png"/>
+          <p:cNvPicPr>
+            <a:picLocks noChangeAspect="1"/>
+          </p:cNvPicPr>
+          <p:nvPr/>
+        </p:nvPicPr>
+        <p:blipFill>
+          <a:blip r:embed="rId4"/>
+          <a:stretch>
+            <a:fillRect/>
+          </a:stretch>
+        </p:blipFill>
+        <p:spPr>
+          <a:xfrm>
+            <a:off x="640080" y="3977639"/>
+            <a:ext cx="6114448" cy="502920"/>
+          </a:xfrm>
+          <a:prstGeom prst="rect">
+            <a:avLst/>
+          </a:prstGeom>
+        </p:spPr>
+      </p:pic>
+      <p:sp>
+        <p:nvSpPr>
+          <p:cNvPr id="13" name="TextBox 12"/>
+          <p:cNvSpPr txBox="1"/>
+          <p:nvPr/>
+        </p:nvSpPr>
+        <p:spPr>
+          <a:xfrm>
+            <a:off x="502920" y="4617720"/>
+            <a:ext cx="11247120" cy="640080"/>
+          </a:xfrm>
+          <a:prstGeom prst="rect">
+            <a:avLst/>
+          </a:prstGeom>
+          <a:noFill/>
+        </p:spPr>
+        <p:txBody>
+          <a:bodyPr wrap="square" anchor="t">
+            <a:spAutoFit/>
+          </a:bodyPr>
+          <a:lstStyle/>
+          <a:p>
+            <a:pPr>
+              <a:spcAft>
+                <a:spcPts val="800"/>
+              </a:spcAft>
+            </a:pPr>
+            <a:r>
+              <a:rPr sz="1450" b="0" i="0">
+                <a:solidFill>
+                  <a:srgbClr val="333740"/>
+                </a:solidFill>
+                <a:latin typeface="Arial"/>
+              </a:rPr>
+              <a:t>A fraction π_B of external controls are incompatible, with drift magnitude Δ (the signal-to-noise knob):</a:t>
+            </a:r>
+          </a:p>
+        </p:txBody>
+      </p:sp>
+      <p:sp>
+        <p:nvSpPr>
+          <p:cNvPr id="14" name="Rectangle 13"/>
+          <p:cNvSpPr/>
+          <p:nvPr/>
+        </p:nvSpPr>
+        <p:spPr>
+          <a:xfrm>
+            <a:off x="530352" y="5120640"/>
+            <a:ext cx="9505696" cy="731520"/>
+          </a:xfrm>
+          <a:prstGeom prst="rect">
+            <a:avLst/>
+          </a:prstGeom>
+          <a:solidFill>
+            <a:srgbClr val="F5F7FA"/>
+          </a:solidFill>
+          <a:ln>
+            <a:noFill/>
+          </a:ln>
+          <a:effectLst/>
+        </p:spPr>
+        <p:style>
+          <a:lnRef idx="1">
+            <a:schemeClr val="accent1"/>
+          </a:lnRef>
+          <a:fillRef idx="3">
+            <a:schemeClr val="accent1"/>
+          </a:fillRef>
+          <a:effectRef idx="2">
+            <a:schemeClr val="accent1"/>
+          </a:effectRef>
+          <a:fontRef idx="minor">
+            <a:schemeClr val="lt1"/>
+          </a:fontRef>
+        </p:style>
+        <p:txBody>
+          <a:bodyPr rtlCol="0" anchor="ctr"/>
+          <a:lstStyle/>
+          <a:p>
+            <a:pPr algn="ctr"/>
+          </a:p>
+        </p:txBody>
+      </p:sp>
+      <p:pic>
+        <p:nvPicPr>
+          <p:cNvPr id="15" name="Picture 14" descr="eq_dgp_contam.png"/>
+          <p:cNvPicPr>
+            <a:picLocks noChangeAspect="1"/>
+          </p:cNvPicPr>
+          <p:nvPr/>
+        </p:nvPicPr>
+        <p:blipFill>
+          <a:blip r:embed="rId5"/>
+          <a:stretch>
+            <a:fillRect/>
+          </a:stretch>
+        </p:blipFill>
+        <p:spPr>
+          <a:xfrm>
+            <a:off x="640080" y="5212080"/>
+            <a:ext cx="9286240" cy="548640"/>
+          </a:xfrm>
+          <a:prstGeom prst="rect">
+            <a:avLst/>
+          </a:prstGeom>
+        </p:spPr>
+      </p:pic>
+      <p:sp>
+        <p:nvSpPr>
+          <p:cNvPr id="16" name="TextBox 15"/>
+          <p:cNvSpPr txBox="1"/>
+          <p:nvPr/>
+        </p:nvSpPr>
+        <p:spPr>
+          <a:xfrm>
+            <a:off x="502920" y="5806440"/>
+            <a:ext cx="11247120" cy="822960"/>
+          </a:xfrm>
+          <a:prstGeom prst="rect">
+            <a:avLst/>
+          </a:prstGeom>
+          <a:noFill/>
+        </p:spPr>
+        <p:txBody>
+          <a:bodyPr wrap="square" anchor="t">
+            <a:spAutoFit/>
+          </a:bodyPr>
+          <a:lstStyle/>
+          <a:p>
+            <a:pPr>
+              <a:spcAft>
+                <a:spcPts val="800"/>
+              </a:spcAft>
+            </a:pPr>
+            <a:r>
+              <a:rPr sz="1350" b="1" i="0">
+                <a:solidFill>
+                  <a:srgbClr val="1F2A44"/>
+                </a:solidFill>
+                <a:latin typeface="Arial"/>
+              </a:rPr>
+              <a:t>Reference cell (everything is one axis away from it):  n₁=120 treated, n₀=60 RCT controls, 200 ECs, π_B=0.3, pattern A (global shift), Δ=8, estimand c₂, weighted CV+, correct model.</a:t>
+            </a:r>
+          </a:p>
+        </p:txBody>
+      </p:sp>
+      <p:sp>
+        <p:nvSpPr>
+          <p:cNvPr id="17" name="TextBox 16"/>
           <p:cNvSpPr txBox="1"/>
           <p:nvPr/>
         </p:nvSpPr>
@@ -9927,7 +10104,7 @@
                 </a:solidFill>
                 <a:latin typeface="Arial"/>
               </a:rPr>
-              <a:t>SIMULATION RESULTS</a:t>
+              <a:t>SIMULATION SETUP</a:t>
             </a:r>
           </a:p>
           <a:p>
@@ -9938,7 +10115,7 @@
                 </a:solidFill>
                 <a:latin typeface="Arial"/>
               </a:rPr>
-              <a:t>Result: beats RCT-only on all four criteria at once</a:t>
+              <a:t>The screen in action (one draw at the reference cell)</a:t>
             </a:r>
           </a:p>
         </p:txBody>
@@ -9987,53 +10164,9 @@
           </a:p>
         </p:txBody>
       </p:sp>
-      <p:sp>
-        <p:nvSpPr>
-          <p:cNvPr id="5" name="Rectangle 4"/>
-          <p:cNvSpPr/>
-          <p:nvPr/>
-        </p:nvSpPr>
-        <p:spPr>
-          <a:xfrm>
-            <a:off x="1940674" y="1371600"/>
-            <a:ext cx="8371610" cy="2514600"/>
-          </a:xfrm>
-          <a:prstGeom prst="rect">
-            <a:avLst/>
-          </a:prstGeom>
-          <a:solidFill>
-            <a:srgbClr val="F5F7FA"/>
-          </a:solidFill>
-          <a:ln>
-            <a:noFill/>
-          </a:ln>
-          <a:effectLst/>
-        </p:spPr>
-        <p:style>
-          <a:lnRef idx="1">
-            <a:schemeClr val="accent1"/>
-          </a:lnRef>
-          <a:fillRef idx="3">
-            <a:schemeClr val="accent1"/>
-          </a:fillRef>
-          <a:effectRef idx="2">
-            <a:schemeClr val="accent1"/>
-          </a:effectRef>
-          <a:fontRef idx="minor">
-            <a:schemeClr val="lt1"/>
-          </a:fontRef>
-        </p:style>
-        <p:txBody>
-          <a:bodyPr rtlCol="0" anchor="ctr"/>
-          <a:lstStyle/>
-          <a:p>
-            <a:pPr algn="ctr"/>
-          </a:p>
-        </p:txBody>
-      </p:sp>
       <p:pic>
         <p:nvPicPr>
-          <p:cNvPr id="6" name="Picture 5" descr="tab_ref.png"/>
+          <p:cNvPr id="5" name="Picture 4" descr="fig_outcome.png"/>
           <p:cNvPicPr>
             <a:picLocks noChangeAspect="1"/>
           </p:cNvPicPr>
@@ -10047,8 +10180,32 @@
         </p:blipFill>
         <p:spPr>
           <a:xfrm>
-            <a:off x="2050402" y="1463040"/>
-            <a:ext cx="8152154" cy="2331720"/>
+            <a:off x="6321612" y="1417320"/>
+            <a:ext cx="5279014" cy="2331720"/>
+          </a:xfrm>
+          <a:prstGeom prst="rect">
+            <a:avLst/>
+          </a:prstGeom>
+        </p:spPr>
+      </p:pic>
+      <p:pic>
+        <p:nvPicPr>
+          <p:cNvPr id="6" name="Picture 5" descr="fig_pval.png"/>
+          <p:cNvPicPr>
+            <a:picLocks noChangeAspect="1"/>
+          </p:cNvPicPr>
+          <p:nvPr/>
+        </p:nvPicPr>
+        <p:blipFill>
+          <a:blip r:embed="rId3"/>
+          <a:stretch>
+            <a:fillRect/>
+          </a:stretch>
+        </p:blipFill>
+        <p:spPr>
+          <a:xfrm>
+            <a:off x="6321612" y="3886200"/>
+            <a:ext cx="5279014" cy="2331720"/>
           </a:xfrm>
           <a:prstGeom prst="rect">
             <a:avLst/>
@@ -10063,8 +10220,8 @@
         </p:nvSpPr>
         <p:spPr>
           <a:xfrm>
-            <a:off x="502920" y="4023360"/>
-            <a:ext cx="11247120" cy="2377440"/>
+            <a:off x="502920" y="1371600"/>
+            <a:ext cx="5486400" cy="5029200"/>
           </a:xfrm>
           <a:prstGeom prst="rect">
             <a:avLst/>
@@ -10078,75 +10235,156 @@
           <a:lstStyle/>
           <a:p>
             <a:pPr>
+              <a:spcBef>
+                <a:spcPts val="400"/>
+              </a:spcBef>
+              <a:spcAft>
+                <a:spcPts val="900"/>
+              </a:spcAft>
+            </a:pPr>
+            <a:r>
+              <a:rPr sz="1500" b="1" i="0">
+                <a:solidFill>
+                  <a:srgbClr val="2F7DC8"/>
+                </a:solidFill>
+                <a:latin typeface="Arial"/>
+              </a:rPr>
+              <a:t>Top — raw outcome</a:t>
+            </a:r>
+          </a:p>
+          <a:p>
+            <a:pPr>
               <a:spcAft>
                 <a:spcPts val="800"/>
               </a:spcAft>
             </a:pPr>
             <a:r>
-              <a:rPr sz="1450" b="1" i="0">
+              <a:rPr sz="1350" b="1" i="0">
+                <a:solidFill>
+                  <a:srgbClr val="2F7DC8"/>
+                </a:solidFill>
+                <a:latin typeface="Arial"/>
+              </a:rPr>
+              <a:t>▪  </a:t>
+            </a:r>
+            <a:r>
+              <a:rPr sz="1350" b="0" i="0">
+                <a:solidFill>
+                  <a:srgbClr val="333740"/>
+                </a:solidFill>
+                <a:latin typeface="Arial"/>
+              </a:rPr>
+              <a:t>Compatible ECs (blue) overlap the RCT controls (gray) but sit slightly higher, purely because the external mix carries more severe subjects (covariate shift, NOT incompatibility).</a:t>
+            </a:r>
+          </a:p>
+          <a:p>
+            <a:pPr>
+              <a:spcAft>
+                <a:spcPts val="800"/>
+              </a:spcAft>
+            </a:pPr>
+            <a:r>
+              <a:rPr sz="1350" b="1" i="0">
+                <a:solidFill>
+                  <a:srgbClr val="2F7DC8"/>
+                </a:solidFill>
+                <a:latin typeface="Arial"/>
+              </a:rPr>
+              <a:t>▪  </a:t>
+            </a:r>
+            <a:r>
+              <a:rPr sz="1350" b="0" i="0">
+                <a:solidFill>
+                  <a:srgbClr val="333740"/>
+                </a:solidFill>
+                <a:latin typeface="Arial"/>
+              </a:rPr>
+              <a:t>Contaminated ECs (amber) sit far to the right. A raw-outcome threshold would confound shift with contamination.</a:t>
+            </a:r>
+          </a:p>
+          <a:p>
+            <a:pPr>
+              <a:spcBef>
+                <a:spcPts val="400"/>
+              </a:spcBef>
+              <a:spcAft>
+                <a:spcPts val="900"/>
+              </a:spcAft>
+            </a:pPr>
+            <a:r>
+              <a:rPr sz="1500" b="1" i="0">
+                <a:solidFill>
+                  <a:srgbClr val="2F7DC8"/>
+                </a:solidFill>
+                <a:latin typeface="Arial"/>
+              </a:rPr>
+              <a:t>Bottom — weighted residual-rank p-values</a:t>
+            </a:r>
+          </a:p>
+          <a:p>
+            <a:pPr>
+              <a:spcAft>
+                <a:spcPts val="800"/>
+              </a:spcAft>
+            </a:pPr>
+            <a:r>
+              <a:rPr sz="1350" b="1" i="0">
+                <a:solidFill>
+                  <a:srgbClr val="2F7DC8"/>
+                </a:solidFill>
+                <a:latin typeface="Arial"/>
+              </a:rPr>
+              <a:t>▪  </a:t>
+            </a:r>
+            <a:r>
+              <a:rPr sz="1350" b="0" i="0">
+                <a:solidFill>
+                  <a:srgbClr val="333740"/>
+                </a:solidFill>
+                <a:latin typeface="Arial"/>
+              </a:rPr>
+              <a:t>Contaminated ECs pile up near p = 0 and fall below γ — all screened out.</a:t>
+            </a:r>
+          </a:p>
+          <a:p>
+            <a:pPr>
+              <a:spcAft>
+                <a:spcPts val="800"/>
+              </a:spcAft>
+            </a:pPr>
+            <a:r>
+              <a:rPr sz="1350" b="1" i="0">
+                <a:solidFill>
+                  <a:srgbClr val="2F7DC8"/>
+                </a:solidFill>
+                <a:latin typeface="Arial"/>
+              </a:rPr>
+              <a:t>▪  </a:t>
+            </a:r>
+            <a:r>
+              <a:rPr sz="1350" b="0" i="0">
+                <a:solidFill>
+                  <a:srgbClr val="333740"/>
+                </a:solidFill>
+                <a:latin typeface="Arial"/>
+              </a:rPr>
+              <a:t>Compatible ECs are roughly uniform on (0,1] and are kept; only about 6% fall below γ.</a:t>
+            </a:r>
+          </a:p>
+          <a:p>
+            <a:pPr>
+              <a:spcAft>
+                <a:spcPts val="800"/>
+              </a:spcAft>
+            </a:pPr>
+            <a:r>
+              <a:rPr sz="1350" b="1" i="0">
                 <a:solidFill>
                   <a:srgbClr val="1F2A44"/>
                 </a:solidFill>
                 <a:latin typeface="Arial"/>
               </a:rPr>
-              <a:t>sym-ada (our default screen) is the only ATTAINABLE method that beats RCT-only on all four criteria simultaneously: unbiased (0.00), lower RMSE (0.18 vs 0.20), type-I no worse than RCT-only (0.06), higher power (0.73 vs 0.64).</a:t>
-            </a:r>
-          </a:p>
-          <a:p>
-            <a:pPr>
-              <a:spcAft>
-                <a:spcPts val="800"/>
-              </a:spcAft>
-            </a:pPr>
-            <a:r>
-              <a:rPr sz="1450" b="0" i="0">
-                <a:solidFill>
-                  <a:srgbClr val="333740"/>
-                </a:solidFill>
-                <a:latin typeface="Arial"/>
-              </a:rPr>
-              <a:t>It reaches most of the way to the UNATTAINABLE oracle (0.78 power, 0.17 RMSE) — which knows the true labels.</a:t>
-            </a:r>
-          </a:p>
-          <a:p>
-            <a:pPr>
-              <a:spcAft>
-                <a:spcPts val="800"/>
-              </a:spcAft>
-            </a:pPr>
-            <a:r>
-              <a:rPr sz="1450" b="0" i="0">
-                <a:solidFill>
-                  <a:srgbClr val="B02E2E"/>
-                </a:solidFill>
-                <a:latin typeface="Arial"/>
-              </a:rPr>
-              <a:t>Full borrowing is catastrophic: bias −0.42, type-I 0.42, coverage collapses.</a:t>
-            </a:r>
-          </a:p>
-          <a:p>
-            <a:pPr lvl="1">
-              <a:spcAft>
-                <a:spcPts val="600"/>
-              </a:spcAft>
-            </a:pPr>
-            <a:r>
-              <a:rPr sz="1350" b="0" i="0">
-                <a:solidFill>
-                  <a:srgbClr val="6B7280"/>
-                </a:solidFill>
-                <a:latin typeface="Arial"/>
-              </a:rPr>
-              <a:t>–  </a:t>
-            </a:r>
-            <a:r>
-              <a:rPr sz="1350" b="0" i="0">
-                <a:solidFill>
-                  <a:srgbClr val="333740"/>
-                </a:solidFill>
-                <a:latin typeface="Arial"/>
-              </a:rPr>
-              <a:t>300 replicates, B = 500 full-pipeline bootstraps; read type-I relative to the RCT-only column (a shared bootstrap-CI floor).</a:t>
+              <a:t>The screen truncates the calibrated p-value scale at γ, not the raw outcome.</a:t>
             </a:r>
           </a:p>
         </p:txBody>
@@ -10282,7 +10520,7 @@
                 </a:solidFill>
                 <a:latin typeface="Arial"/>
               </a:rPr>
-              <a:t>SIMULATION RESULTS</a:t>
+              <a:t>SIMULATION SETUP</a:t>
             </a:r>
           </a:p>
           <a:p>
@@ -10293,7 +10531,7 @@
                 </a:solidFill>
                 <a:latin typeface="Arial"/>
               </a:rPr>
-              <a:t>Result: robust — and CV+ is the efficiency lever</a:t>
+              <a:t>When can the screen detect contamination?</a:t>
             </a:r>
           </a:p>
         </p:txBody>
@@ -10344,51 +10582,137 @@
       </p:sp>
       <p:sp>
         <p:nvSpPr>
-          <p:cNvPr id="5" name="Rectangle 4"/>
-          <p:cNvSpPr/>
-          <p:nvPr/>
-        </p:nvSpPr>
-        <p:spPr>
-          <a:xfrm>
-            <a:off x="1755240" y="1371600"/>
-            <a:ext cx="8742478" cy="2331720"/>
-          </a:xfrm>
-          <a:prstGeom prst="rect">
-            <a:avLst/>
-          </a:prstGeom>
-          <a:solidFill>
-            <a:srgbClr val="F5F7FA"/>
-          </a:solidFill>
-          <a:ln>
-            <a:noFill/>
-          </a:ln>
-          <a:effectLst/>
-        </p:spPr>
-        <p:style>
-          <a:lnRef idx="1">
-            <a:schemeClr val="accent1"/>
-          </a:lnRef>
-          <a:fillRef idx="3">
-            <a:schemeClr val="accent1"/>
-          </a:fillRef>
-          <a:effectRef idx="2">
-            <a:schemeClr val="accent1"/>
-          </a:effectRef>
-          <a:fontRef idx="minor">
-            <a:schemeClr val="lt1"/>
-          </a:fontRef>
-        </p:style>
-        <p:txBody>
-          <a:bodyPr rtlCol="0" anchor="ctr"/>
-          <a:lstStyle/>
-          <a:p>
-            <a:pPr algn="ctr"/>
+          <p:cNvPr id="5" name="TextBox 4"/>
+          <p:cNvSpPr txBox="1"/>
+          <p:nvPr/>
+        </p:nvSpPr>
+        <p:spPr>
+          <a:xfrm>
+            <a:off x="502920" y="1417320"/>
+            <a:ext cx="11155680" cy="2103120"/>
+          </a:xfrm>
+          <a:prstGeom prst="rect">
+            <a:avLst/>
+          </a:prstGeom>
+          <a:noFill/>
+        </p:spPr>
+        <p:txBody>
+          <a:bodyPr wrap="square" anchor="t">
+            <a:spAutoFit/>
+          </a:bodyPr>
+          <a:lstStyle/>
+          <a:p>
+            <a:pPr>
+              <a:spcAft>
+                <a:spcPts val="800"/>
+              </a:spcAft>
+            </a:pPr>
+            <a:r>
+              <a:rPr sz="1500" b="1" i="0">
+                <a:solidFill>
+                  <a:srgbClr val="2F7DC8"/>
+                </a:solidFill>
+                <a:latin typeface="Arial"/>
+              </a:rPr>
+              <a:t>▪  </a:t>
+            </a:r>
+            <a:r>
+              <a:rPr sz="1500" b="0" i="0">
+                <a:solidFill>
+                  <a:srgbClr val="333740"/>
+                </a:solidFill>
+                <a:latin typeface="Arial"/>
+              </a:rPr>
+              <a:t>Detection is limited by the drift's signal-to-noise ratio Δ / σ:</a:t>
+            </a:r>
+          </a:p>
+          <a:p>
+            <a:pPr lvl="1">
+              <a:spcAft>
+                <a:spcPts val="600"/>
+              </a:spcAft>
+            </a:pPr>
+            <a:r>
+              <a:rPr sz="1400" b="0" i="0">
+                <a:solidFill>
+                  <a:srgbClr val="6B7280"/>
+                </a:solidFill>
+                <a:latin typeface="Arial"/>
+              </a:rPr>
+              <a:t>–  </a:t>
+            </a:r>
+            <a:r>
+              <a:rPr sz="1400" b="0" i="0">
+                <a:solidFill>
+                  <a:srgbClr val="333740"/>
+                </a:solidFill>
+                <a:latin typeface="Arial"/>
+              </a:rPr>
+              <a:t>Low Δ/σ — contamination is buried in the noise and leaks through ANY screen.</a:t>
+            </a:r>
+          </a:p>
+          <a:p>
+            <a:pPr lvl="1">
+              <a:spcAft>
+                <a:spcPts val="600"/>
+              </a:spcAft>
+            </a:pPr>
+            <a:r>
+              <a:rPr sz="1400" b="0" i="0">
+                <a:solidFill>
+                  <a:srgbClr val="6B7280"/>
+                </a:solidFill>
+                <a:latin typeface="Arial"/>
+              </a:rPr>
+              <a:t>–  </a:t>
+            </a:r>
+            <a:r>
+              <a:rPr sz="1400" b="0" i="0">
+                <a:solidFill>
+                  <a:srgbClr val="333740"/>
+                </a:solidFill>
+                <a:latin typeface="Arial"/>
+              </a:rPr>
+              <a:t>High Δ/σ — cleanly separable and reliably removed.</a:t>
+            </a:r>
+          </a:p>
+          <a:p>
+            <a:pPr>
+              <a:spcAft>
+                <a:spcPts val="800"/>
+              </a:spcAft>
+            </a:pPr>
+            <a:r>
+              <a:rPr sz="1500" b="1" i="0">
+                <a:solidFill>
+                  <a:srgbClr val="1F2A44"/>
+                </a:solidFill>
+                <a:latin typeface="Arial"/>
+              </a:rPr>
+              <a:t>So borrowing is safest precisely when incompatibility is either absent, or large enough to catch.</a:t>
+            </a:r>
+          </a:p>
+          <a:p>
+            <a:pPr>
+              <a:spcAft>
+                <a:spcPts val="800"/>
+              </a:spcAft>
+            </a:pPr>
+            <a:r>
+              <a:rPr sz="1500" b="0" i="0">
+                <a:solidFill>
+                  <a:srgbClr val="333740"/>
+                </a:solidFill>
+                <a:latin typeface="Arial"/>
+              </a:rPr>
+              <a:t>This also bounds the gain: the screen can only remove what it can see.</a:t>
+            </a:r>
           </a:p>
         </p:txBody>
       </p:sp>
       <p:pic>
         <p:nvPicPr>
-          <p:cNvPr id="6" name="Picture 5" descr="tab_robust.png"/>
+          <p:cNvPr id="6" name="Picture 5" descr="fig_snr.png"/>
           <p:cNvPicPr>
             <a:picLocks noChangeAspect="1"/>
           </p:cNvPicPr>
@@ -10402,8 +10726,8 @@
         </p:blipFill>
         <p:spPr>
           <a:xfrm>
-            <a:off x="1864968" y="1463040"/>
-            <a:ext cx="8523022" cy="2148840"/>
+            <a:off x="3750564" y="3566160"/>
+            <a:ext cx="4660392" cy="2834640"/>
           </a:xfrm>
           <a:prstGeom prst="rect">
             <a:avLst/>
@@ -10413,77 +10737,6 @@
       <p:sp>
         <p:nvSpPr>
           <p:cNvPr id="7" name="TextBox 6"/>
-          <p:cNvSpPr txBox="1"/>
-          <p:nvPr/>
-        </p:nvSpPr>
-        <p:spPr>
-          <a:xfrm>
-            <a:off x="502920" y="3840480"/>
-            <a:ext cx="11247120" cy="2560320"/>
-          </a:xfrm>
-          <a:prstGeom prst="rect">
-            <a:avLst/>
-          </a:prstGeom>
-          <a:noFill/>
-        </p:spPr>
-        <p:txBody>
-          <a:bodyPr wrap="square" anchor="t">
-            <a:spAutoFit/>
-          </a:bodyPr>
-          <a:lstStyle/>
-          <a:p>
-            <a:pPr>
-              <a:spcAft>
-                <a:spcPts val="800"/>
-              </a:spcAft>
-            </a:pPr>
-            <a:r>
-              <a:rPr sz="1450" b="0" i="0">
-                <a:solidFill>
-                  <a:srgbClr val="333740"/>
-                </a:solidFill>
-                <a:latin typeface="Arial"/>
-              </a:rPr>
-              <a:t>Robust to model misspecification: even dropping the covariate from the working mean model barely moves bias or power — the shared model error is absorbed by the RCT-control calibration.</a:t>
-            </a:r>
-          </a:p>
-          <a:p>
-            <a:pPr>
-              <a:spcAft>
-                <a:spcPts val="800"/>
-              </a:spcAft>
-            </a:pPr>
-            <a:r>
-              <a:rPr sz="1450" b="0" i="0">
-                <a:solidFill>
-                  <a:srgbClr val="333740"/>
-                </a:solidFill>
-                <a:latin typeface="Arial"/>
-              </a:rPr>
-              <a:t>Weighting is a low-cost safeguard: a near no-op under the correct model; it earns its keep under misspecification and at low signal-to-noise.</a:t>
-            </a:r>
-          </a:p>
-          <a:p>
-            <a:pPr>
-              <a:spcAft>
-                <a:spcPts val="800"/>
-              </a:spcAft>
-            </a:pPr>
-            <a:r>
-              <a:rPr sz="1450" b="1" i="0">
-                <a:solidFill>
-                  <a:srgbClr val="1F2A44"/>
-                </a:solidFill>
-                <a:latin typeface="Arial"/>
-              </a:rPr>
-              <a:t>CV+ vs one-time split: +0.06 power (0.71 vs 0.65) at controlled type-I — simply by not wasting the scarce randomized controls.</a:t>
-            </a:r>
-          </a:p>
-        </p:txBody>
-      </p:sp>
-      <p:sp>
-        <p:nvSpPr>
-          <p:cNvPr id="8" name="TextBox 7"/>
           <p:cNvSpPr txBox="1"/>
           <p:nvPr/>
         </p:nvSpPr>
@@ -10543,51 +10796,7 @@
         <p:spPr>
           <a:xfrm>
             <a:off x="0" y="0"/>
-            <a:ext cx="12191695" cy="6858000"/>
-          </a:xfrm>
-          <a:prstGeom prst="rect">
-            <a:avLst/>
-          </a:prstGeom>
-          <a:solidFill>
-            <a:srgbClr val="1F2A44"/>
-          </a:solidFill>
-          <a:ln>
-            <a:noFill/>
-          </a:ln>
-          <a:effectLst/>
-        </p:spPr>
-        <p:style>
-          <a:lnRef idx="1">
-            <a:schemeClr val="accent1"/>
-          </a:lnRef>
-          <a:fillRef idx="3">
-            <a:schemeClr val="accent1"/>
-          </a:fillRef>
-          <a:effectRef idx="2">
-            <a:schemeClr val="accent1"/>
-          </a:effectRef>
-          <a:fontRef idx="minor">
-            <a:schemeClr val="lt1"/>
-          </a:fontRef>
-        </p:style>
-        <p:txBody>
-          <a:bodyPr rtlCol="0" anchor="ctr"/>
-          <a:lstStyle/>
-          <a:p>
-            <a:pPr algn="ctr"/>
-          </a:p>
-        </p:txBody>
-      </p:sp>
-      <p:sp>
-        <p:nvSpPr>
-          <p:cNvPr id="3" name="Rectangle 2"/>
-          <p:cNvSpPr/>
-          <p:nvPr/>
-        </p:nvSpPr>
-        <p:spPr>
-          <a:xfrm>
-            <a:off x="0" y="2761488"/>
-            <a:ext cx="12191695" cy="45720"/>
+            <a:ext cx="12191695" cy="128016"/>
           </a:xfrm>
           <a:prstGeom prst="rect">
             <a:avLst/>
@@ -10624,14 +10833,14 @@
       </p:sp>
       <p:sp>
         <p:nvSpPr>
-          <p:cNvPr id="4" name="TextBox 3"/>
+          <p:cNvPr id="3" name="TextBox 2"/>
           <p:cNvSpPr txBox="1"/>
           <p:nvPr/>
         </p:nvSpPr>
         <p:spPr>
           <a:xfrm>
-            <a:off x="1005840" y="2148840"/>
-            <a:ext cx="10180015" cy="2011680"/>
+            <a:off x="502920" y="274320"/>
+            <a:ext cx="11185855" cy="932688"/>
           </a:xfrm>
           <a:prstGeom prst="rect">
             <a:avLst/>
@@ -10646,44 +10855,271 @@
           <a:p>
             <a:pPr>
               <a:spcAft>
+                <a:spcPts val="200"/>
+              </a:spcAft>
+            </a:pPr>
+            <a:r>
+              <a:rPr sz="1250" b="1" i="0">
+                <a:solidFill>
+                  <a:srgbClr val="2F7DC8"/>
+                </a:solidFill>
+                <a:latin typeface="Arial"/>
+              </a:rPr>
+              <a:t>SIMULATION RESULTS</a:t>
+            </a:r>
+          </a:p>
+          <a:p>
+            <a:r>
+              <a:rPr sz="2700" b="1" i="0">
+                <a:solidFill>
+                  <a:srgbClr val="1F2A44"/>
+                </a:solidFill>
+                <a:latin typeface="Arial"/>
+              </a:rPr>
+              <a:t>Result: beats RCT-only on all four criteria at once</a:t>
+            </a:r>
+          </a:p>
+        </p:txBody>
+      </p:sp>
+      <p:sp>
+        <p:nvSpPr>
+          <p:cNvPr id="4" name="Rectangle 3"/>
+          <p:cNvSpPr/>
+          <p:nvPr/>
+        </p:nvSpPr>
+        <p:spPr>
+          <a:xfrm>
+            <a:off x="521207" y="1225296"/>
+            <a:ext cx="2103120" cy="41148"/>
+          </a:xfrm>
+          <a:prstGeom prst="rect">
+            <a:avLst/>
+          </a:prstGeom>
+          <a:solidFill>
+            <a:srgbClr val="2F7DC8"/>
+          </a:solidFill>
+          <a:ln>
+            <a:noFill/>
+          </a:ln>
+          <a:effectLst/>
+        </p:spPr>
+        <p:style>
+          <a:lnRef idx="1">
+            <a:schemeClr val="accent1"/>
+          </a:lnRef>
+          <a:fillRef idx="3">
+            <a:schemeClr val="accent1"/>
+          </a:fillRef>
+          <a:effectRef idx="2">
+            <a:schemeClr val="accent1"/>
+          </a:effectRef>
+          <a:fontRef idx="minor">
+            <a:schemeClr val="lt1"/>
+          </a:fontRef>
+        </p:style>
+        <p:txBody>
+          <a:bodyPr rtlCol="0" anchor="ctr"/>
+          <a:lstStyle/>
+          <a:p>
+            <a:pPr algn="ctr"/>
+          </a:p>
+        </p:txBody>
+      </p:sp>
+      <p:sp>
+        <p:nvSpPr>
+          <p:cNvPr id="5" name="Rectangle 4"/>
+          <p:cNvSpPr/>
+          <p:nvPr/>
+        </p:nvSpPr>
+        <p:spPr>
+          <a:xfrm>
+            <a:off x="1940674" y="1371600"/>
+            <a:ext cx="8371610" cy="2514600"/>
+          </a:xfrm>
+          <a:prstGeom prst="rect">
+            <a:avLst/>
+          </a:prstGeom>
+          <a:solidFill>
+            <a:srgbClr val="F5F7FA"/>
+          </a:solidFill>
+          <a:ln>
+            <a:noFill/>
+          </a:ln>
+          <a:effectLst/>
+        </p:spPr>
+        <p:style>
+          <a:lnRef idx="1">
+            <a:schemeClr val="accent1"/>
+          </a:lnRef>
+          <a:fillRef idx="3">
+            <a:schemeClr val="accent1"/>
+          </a:fillRef>
+          <a:effectRef idx="2">
+            <a:schemeClr val="accent1"/>
+          </a:effectRef>
+          <a:fontRef idx="minor">
+            <a:schemeClr val="lt1"/>
+          </a:fontRef>
+        </p:style>
+        <p:txBody>
+          <a:bodyPr rtlCol="0" anchor="ctr"/>
+          <a:lstStyle/>
+          <a:p>
+            <a:pPr algn="ctr"/>
+          </a:p>
+        </p:txBody>
+      </p:sp>
+      <p:pic>
+        <p:nvPicPr>
+          <p:cNvPr id="6" name="Picture 5" descr="tab_ref.png"/>
+          <p:cNvPicPr>
+            <a:picLocks noChangeAspect="1"/>
+          </p:cNvPicPr>
+          <p:nvPr/>
+        </p:nvPicPr>
+        <p:blipFill>
+          <a:blip r:embed="rId2"/>
+          <a:stretch>
+            <a:fillRect/>
+          </a:stretch>
+        </p:blipFill>
+        <p:spPr>
+          <a:xfrm>
+            <a:off x="2050402" y="1463040"/>
+            <a:ext cx="8152154" cy="2331720"/>
+          </a:xfrm>
+          <a:prstGeom prst="rect">
+            <a:avLst/>
+          </a:prstGeom>
+        </p:spPr>
+      </p:pic>
+      <p:sp>
+        <p:nvSpPr>
+          <p:cNvPr id="7" name="TextBox 6"/>
+          <p:cNvSpPr txBox="1"/>
+          <p:nvPr/>
+        </p:nvSpPr>
+        <p:spPr>
+          <a:xfrm>
+            <a:off x="502920" y="4023360"/>
+            <a:ext cx="11247120" cy="2377440"/>
+          </a:xfrm>
+          <a:prstGeom prst="rect">
+            <a:avLst/>
+          </a:prstGeom>
+          <a:noFill/>
+        </p:spPr>
+        <p:txBody>
+          <a:bodyPr wrap="square" anchor="t">
+            <a:spAutoFit/>
+          </a:bodyPr>
+          <a:lstStyle/>
+          <a:p>
+            <a:pPr>
+              <a:spcAft>
+                <a:spcPts val="800"/>
+              </a:spcAft>
+            </a:pPr>
+            <a:r>
+              <a:rPr sz="1450" b="1" i="0">
+                <a:solidFill>
+                  <a:srgbClr val="1F2A44"/>
+                </a:solidFill>
+                <a:latin typeface="Arial"/>
+              </a:rPr>
+              <a:t>sym-ada (our default screen) is the only ATTAINABLE method that beats RCT-only on all four criteria simultaneously: unbiased (0.00), lower RMSE (0.18 vs 0.20), type-I no worse than RCT-only (0.06), higher power (0.73 vs 0.64).</a:t>
+            </a:r>
+          </a:p>
+          <a:p>
+            <a:pPr>
+              <a:spcAft>
+                <a:spcPts val="800"/>
+              </a:spcAft>
+            </a:pPr>
+            <a:r>
+              <a:rPr sz="1450" b="0" i="0">
+                <a:solidFill>
+                  <a:srgbClr val="333740"/>
+                </a:solidFill>
+                <a:latin typeface="Arial"/>
+              </a:rPr>
+              <a:t>It reaches most of the way to the UNATTAINABLE oracle (0.78 power, 0.17 RMSE) — which knows the true labels.</a:t>
+            </a:r>
+          </a:p>
+          <a:p>
+            <a:pPr>
+              <a:spcAft>
+                <a:spcPts val="800"/>
+              </a:spcAft>
+            </a:pPr>
+            <a:r>
+              <a:rPr sz="1450" b="0" i="0">
+                <a:solidFill>
+                  <a:srgbClr val="B02E2E"/>
+                </a:solidFill>
+                <a:latin typeface="Arial"/>
+              </a:rPr>
+              <a:t>Full borrowing is catastrophic: bias −0.42, type-I 0.42, coverage collapses.</a:t>
+            </a:r>
+          </a:p>
+          <a:p>
+            <a:pPr lvl="1">
+              <a:spcAft>
                 <a:spcPts val="600"/>
               </a:spcAft>
             </a:pPr>
             <a:r>
-              <a:rPr sz="1700" b="1" i="0">
-                <a:solidFill>
-                  <a:srgbClr val="2F7DC8"/>
-                </a:solidFill>
-                <a:latin typeface="Arial"/>
-              </a:rPr>
-              <a:t>PART IV</a:t>
-            </a:r>
-          </a:p>
-          <a:p>
-            <a:r>
-              <a:rPr sz="4000" b="1" i="0">
-                <a:solidFill>
-                  <a:srgbClr val="FFFFFF"/>
-                </a:solidFill>
-                <a:latin typeface="Arial"/>
-              </a:rPr>
-              <a:t>Discussion</a:t>
-            </a:r>
-          </a:p>
-          <a:p>
-            <a:pPr>
-              <a:spcBef>
-                <a:spcPts val="800"/>
-              </a:spcBef>
-            </a:pPr>
-            <a:r>
-              <a:rPr sz="1600" b="0" i="1">
-                <a:solidFill>
-                  <a:srgbClr val="C9D4E4"/>
-                </a:solidFill>
-                <a:latin typeface="Arial"/>
-              </a:rPr>
-              <a:t>Scope, limits, and open problems</a:t>
+              <a:rPr sz="1350" b="0" i="0">
+                <a:solidFill>
+                  <a:srgbClr val="6B7280"/>
+                </a:solidFill>
+                <a:latin typeface="Arial"/>
+              </a:rPr>
+              <a:t>–  </a:t>
+            </a:r>
+            <a:r>
+              <a:rPr sz="1350" b="0" i="0">
+                <a:solidFill>
+                  <a:srgbClr val="333740"/>
+                </a:solidFill>
+                <a:latin typeface="Arial"/>
+              </a:rPr>
+              <a:t>300 replicates, B = 500 full-pipeline bootstraps; read type-I relative to the RCT-only column (a shared bootstrap-CI floor).</a:t>
+            </a:r>
+          </a:p>
+        </p:txBody>
+      </p:sp>
+      <p:sp>
+        <p:nvSpPr>
+          <p:cNvPr id="8" name="TextBox 7"/>
+          <p:cNvSpPr txBox="1"/>
+          <p:nvPr/>
+        </p:nvSpPr>
+        <p:spPr>
+          <a:xfrm>
+            <a:off x="11094415" y="6455664"/>
+            <a:ext cx="914400" cy="320040"/>
+          </a:xfrm>
+          <a:prstGeom prst="rect">
+            <a:avLst/>
+          </a:prstGeom>
+          <a:noFill/>
+        </p:spPr>
+        <p:txBody>
+          <a:bodyPr wrap="square" anchor="t">
+            <a:spAutoFit/>
+          </a:bodyPr>
+          <a:lstStyle/>
+          <a:p>
+            <a:pPr algn="r"/>
+            <a:r>
+              <a:rPr sz="1100" b="0" i="0">
+                <a:solidFill>
+                  <a:srgbClr val="6B7280"/>
+                </a:solidFill>
+                <a:latin typeface="Arial"/>
+              </a:rPr>
+              <a:t>24</a:t>
             </a:r>
           </a:p>
         </p:txBody>
@@ -10784,7 +11220,7 @@
                 </a:solidFill>
                 <a:latin typeface="Arial"/>
               </a:rPr>
-              <a:t>DISCUSSION</a:t>
+              <a:t>SIMULATION RESULTS</a:t>
             </a:r>
           </a:p>
           <a:p>
@@ -10795,7 +11231,7 @@
                 </a:solidFill>
                 <a:latin typeface="Arial"/>
               </a:rPr>
-              <a:t>Scope, limits, and positioning</a:t>
+              <a:t>Result: robust — and CV+ is the efficiency lever</a:t>
             </a:r>
           </a:p>
         </p:txBody>
@@ -10846,14 +11282,82 @@
       </p:sp>
       <p:sp>
         <p:nvSpPr>
-          <p:cNvPr id="5" name="TextBox 4"/>
+          <p:cNvPr id="5" name="Rectangle 4"/>
+          <p:cNvSpPr/>
+          <p:nvPr/>
+        </p:nvSpPr>
+        <p:spPr>
+          <a:xfrm>
+            <a:off x="1755240" y="1371600"/>
+            <a:ext cx="8742478" cy="2331720"/>
+          </a:xfrm>
+          <a:prstGeom prst="rect">
+            <a:avLst/>
+          </a:prstGeom>
+          <a:solidFill>
+            <a:srgbClr val="F5F7FA"/>
+          </a:solidFill>
+          <a:ln>
+            <a:noFill/>
+          </a:ln>
+          <a:effectLst/>
+        </p:spPr>
+        <p:style>
+          <a:lnRef idx="1">
+            <a:schemeClr val="accent1"/>
+          </a:lnRef>
+          <a:fillRef idx="3">
+            <a:schemeClr val="accent1"/>
+          </a:fillRef>
+          <a:effectRef idx="2">
+            <a:schemeClr val="accent1"/>
+          </a:effectRef>
+          <a:fontRef idx="minor">
+            <a:schemeClr val="lt1"/>
+          </a:fontRef>
+        </p:style>
+        <p:txBody>
+          <a:bodyPr rtlCol="0" anchor="ctr"/>
+          <a:lstStyle/>
+          <a:p>
+            <a:pPr algn="ctr"/>
+          </a:p>
+        </p:txBody>
+      </p:sp>
+      <p:pic>
+        <p:nvPicPr>
+          <p:cNvPr id="6" name="Picture 5" descr="tab_robust.png"/>
+          <p:cNvPicPr>
+            <a:picLocks noChangeAspect="1"/>
+          </p:cNvPicPr>
+          <p:nvPr/>
+        </p:nvPicPr>
+        <p:blipFill>
+          <a:blip r:embed="rId2"/>
+          <a:stretch>
+            <a:fillRect/>
+          </a:stretch>
+        </p:blipFill>
+        <p:spPr>
+          <a:xfrm>
+            <a:off x="1864968" y="1463040"/>
+            <a:ext cx="8523022" cy="2148840"/>
+          </a:xfrm>
+          <a:prstGeom prst="rect">
+            <a:avLst/>
+          </a:prstGeom>
+        </p:spPr>
+      </p:pic>
+      <p:sp>
+        <p:nvSpPr>
+          <p:cNvPr id="7" name="TextBox 6"/>
           <p:cNvSpPr txBox="1"/>
           <p:nvPr/>
         </p:nvSpPr>
         <p:spPr>
           <a:xfrm>
-            <a:off x="502920" y="1417320"/>
-            <a:ext cx="11247120" cy="4937760"/>
+            <a:off x="502920" y="3840480"/>
+            <a:ext cx="11247120" cy="2560320"/>
           </a:xfrm>
           <a:prstGeom prst="rect">
             <a:avLst/>
@@ -10872,158 +11376,52 @@
               </a:spcAft>
             </a:pPr>
             <a:r>
+              <a:rPr sz="1450" b="0" i="0">
+                <a:solidFill>
+                  <a:srgbClr val="333740"/>
+                </a:solidFill>
+                <a:latin typeface="Arial"/>
+              </a:rPr>
+              <a:t>Robust to model misspecification: even dropping the covariate from the working mean model barely moves bias or power — the shared model error is absorbed by the RCT-control calibration.</a:t>
+            </a:r>
+          </a:p>
+          <a:p>
+            <a:pPr>
+              <a:spcAft>
+                <a:spcPts val="800"/>
+              </a:spcAft>
+            </a:pPr>
+            <a:r>
+              <a:rPr sz="1450" b="0" i="0">
+                <a:solidFill>
+                  <a:srgbClr val="333740"/>
+                </a:solidFill>
+                <a:latin typeface="Arial"/>
+              </a:rPr>
+              <a:t>Weighting is a low-cost safeguard: a near no-op under the correct model; it earns its keep under misspecification and at low signal-to-noise.</a:t>
+            </a:r>
+          </a:p>
+          <a:p>
+            <a:pPr>
+              <a:spcAft>
+                <a:spcPts val="800"/>
+              </a:spcAft>
+            </a:pPr>
+            <a:r>
               <a:rPr sz="1450" b="1" i="0">
                 <a:solidFill>
                   <a:srgbClr val="1F2A44"/>
                 </a:solidFill>
                 <a:latin typeface="Arial"/>
               </a:rPr>
-              <a:t>Insurance, not a free lunch: residual-rank screening turns naive full-borrow's catastrophic bias into VALID, ROBUST inference, with a modest but real efficiency gain when the randomized arm is underpowered.</a:t>
-            </a:r>
-          </a:p>
-          <a:p>
-            <a:pPr>
-              <a:spcBef>
-                <a:spcPts val="400"/>
-              </a:spcBef>
-              <a:spcAft>
-                <a:spcPts val="900"/>
-              </a:spcAft>
-            </a:pPr>
-            <a:r>
-              <a:rPr sz="1600" b="1" i="0">
-                <a:solidFill>
-                  <a:srgbClr val="2F7DC8"/>
-                </a:solidFill>
-                <a:latin typeface="Arial"/>
-              </a:rPr>
-              <a:t>The upside is bounded</a:t>
-            </a:r>
-          </a:p>
-          <a:p>
-            <a:pPr>
-              <a:spcAft>
-                <a:spcPts val="800"/>
-              </a:spcAft>
-            </a:pPr>
-            <a:r>
-              <a:rPr sz="1450" b="1" i="0">
-                <a:solidFill>
-                  <a:srgbClr val="2F7DC8"/>
-                </a:solidFill>
-                <a:latin typeface="Arial"/>
-              </a:rPr>
-              <a:t>▪  </a:t>
-            </a:r>
-            <a:r>
-              <a:rPr sz="1450" b="0" i="0">
-                <a:solidFill>
-                  <a:srgbClr val="333740"/>
-                </a:solidFill>
-                <a:latin typeface="Arial"/>
-              </a:rPr>
-              <a:t>An oracle-ceiling limits the gain to ≈ 15–25% RMSE: the treated arm is not borrowable, so the borrowable share of variance is  n(R,1) / (n(R,0)+n(R,1)).</a:t>
-            </a:r>
-          </a:p>
-          <a:p>
-            <a:pPr>
-              <a:spcAft>
-                <a:spcPts val="800"/>
-              </a:spcAft>
-            </a:pPr>
-            <a:r>
-              <a:rPr sz="1450" b="1" i="0">
-                <a:solidFill>
-                  <a:srgbClr val="2F7DC8"/>
-                </a:solidFill>
-                <a:latin typeface="Arial"/>
-              </a:rPr>
-              <a:t>▪  </a:t>
-            </a:r>
-            <a:r>
-              <a:rPr sz="1450" b="0" i="0">
-                <a:solidFill>
-                  <a:srgbClr val="333740"/>
-                </a:solidFill>
-                <a:latin typeface="Arial"/>
-              </a:rPr>
-              <a:t>Borrowing helps most when randomized controls are scarce — but the screen also needs enough controls to calibrate; CV+ widens this window.</a:t>
-            </a:r>
-          </a:p>
-          <a:p>
-            <a:pPr>
-              <a:spcBef>
-                <a:spcPts val="400"/>
-              </a:spcBef>
-              <a:spcAft>
-                <a:spcPts val="900"/>
-              </a:spcAft>
-            </a:pPr>
-            <a:r>
-              <a:rPr sz="1600" b="1" i="0">
-                <a:solidFill>
-                  <a:srgbClr val="2F7DC8"/>
-                </a:solidFill>
-                <a:latin typeface="Arial"/>
-              </a:rPr>
-              <a:t>Two things you must choose well</a:t>
-            </a:r>
-          </a:p>
-          <a:p>
-            <a:pPr>
-              <a:spcAft>
-                <a:spcPts val="800"/>
-              </a:spcAft>
-            </a:pPr>
-            <a:r>
-              <a:rPr sz="1450" b="1" i="0">
-                <a:solidFill>
-                  <a:srgbClr val="2F7DC8"/>
-                </a:solidFill>
-                <a:latin typeface="Arial"/>
-              </a:rPr>
-              <a:t>▪  </a:t>
-            </a:r>
-            <a:r>
-              <a:rPr sz="1450" b="0" i="0">
-                <a:solidFill>
-                  <a:srgbClr val="333740"/>
-                </a:solidFill>
-                <a:latin typeface="Arial"/>
-              </a:rPr>
-              <a:t>The score must match the anticipated drift shape (a mismatched contrast is blind to the drift).</a:t>
-            </a:r>
-          </a:p>
-          <a:p>
-            <a:pPr>
-              <a:spcAft>
-                <a:spcPts val="800"/>
-              </a:spcAft>
-            </a:pPr>
-            <a:r>
-              <a:rPr sz="1450" b="1" i="0">
-                <a:solidFill>
-                  <a:srgbClr val="2F7DC8"/>
-                </a:solidFill>
-                <a:latin typeface="Arial"/>
-              </a:rPr>
-              <a:t>▪  </a:t>
-            </a:r>
-            <a:r>
-              <a:rPr sz="1450" b="0" i="0">
-                <a:solidFill>
-                  <a:srgbClr val="333740"/>
-                </a:solidFill>
-                <a:latin typeface="Arial"/>
-              </a:rPr>
-              <a:t>Detection is signal-to-noise-limited; residual undetected low-SNR drift is the main risk.</a:t>
-            </a:r>
-          </a:p>
-        </p:txBody>
-      </p:sp>
-      <p:sp>
-        <p:nvSpPr>
-          <p:cNvPr id="6" name="TextBox 5"/>
+              <a:t>CV+ vs one-time split: +0.06 power (0.71 vs 0.65) at controlled type-I — simply by not wasting the scarce randomized controls.</a:t>
+            </a:r>
+          </a:p>
+        </p:txBody>
+      </p:sp>
+      <p:sp>
+        <p:nvSpPr>
+          <p:cNvPr id="8" name="TextBox 7"/>
           <p:cNvSpPr txBox="1"/>
           <p:nvPr/>
         </p:nvSpPr>
@@ -11051,7 +11449,7 @@
                 </a:solidFill>
                 <a:latin typeface="Arial"/>
               </a:rPr>
-              <a:t>24</a:t>
+              <a:t>25</a:t>
             </a:r>
           </a:p>
         </p:txBody>
@@ -11475,7 +11873,51 @@
         <p:spPr>
           <a:xfrm>
             <a:off x="0" y="0"/>
-            <a:ext cx="12191695" cy="128016"/>
+            <a:ext cx="12191695" cy="6858000"/>
+          </a:xfrm>
+          <a:prstGeom prst="rect">
+            <a:avLst/>
+          </a:prstGeom>
+          <a:solidFill>
+            <a:srgbClr val="1F2A44"/>
+          </a:solidFill>
+          <a:ln>
+            <a:noFill/>
+          </a:ln>
+          <a:effectLst/>
+        </p:spPr>
+        <p:style>
+          <a:lnRef idx="1">
+            <a:schemeClr val="accent1"/>
+          </a:lnRef>
+          <a:fillRef idx="3">
+            <a:schemeClr val="accent1"/>
+          </a:fillRef>
+          <a:effectRef idx="2">
+            <a:schemeClr val="accent1"/>
+          </a:effectRef>
+          <a:fontRef idx="minor">
+            <a:schemeClr val="lt1"/>
+          </a:fontRef>
+        </p:style>
+        <p:txBody>
+          <a:bodyPr rtlCol="0" anchor="ctr"/>
+          <a:lstStyle/>
+          <a:p>
+            <a:pPr algn="ctr"/>
+          </a:p>
+        </p:txBody>
+      </p:sp>
+      <p:sp>
+        <p:nvSpPr>
+          <p:cNvPr id="3" name="Rectangle 2"/>
+          <p:cNvSpPr/>
+          <p:nvPr/>
+        </p:nvSpPr>
+        <p:spPr>
+          <a:xfrm>
+            <a:off x="0" y="2761488"/>
+            <a:ext cx="12191695" cy="45720"/>
           </a:xfrm>
           <a:prstGeom prst="rect">
             <a:avLst/>
@@ -11512,14 +11954,14 @@
       </p:sp>
       <p:sp>
         <p:nvSpPr>
-          <p:cNvPr id="3" name="TextBox 2"/>
+          <p:cNvPr id="4" name="TextBox 3"/>
           <p:cNvSpPr txBox="1"/>
           <p:nvPr/>
         </p:nvSpPr>
         <p:spPr>
           <a:xfrm>
-            <a:off x="502920" y="274320"/>
-            <a:ext cx="11185855" cy="932688"/>
+            <a:off x="1005840" y="2148840"/>
+            <a:ext cx="10180015" cy="2011680"/>
           </a:xfrm>
           <a:prstGeom prst="rect">
             <a:avLst/>
@@ -11534,332 +11976,44 @@
           <a:p>
             <a:pPr>
               <a:spcAft>
-                <a:spcPts val="200"/>
-              </a:spcAft>
-            </a:pPr>
-            <a:r>
-              <a:rPr sz="1250" b="1" i="0">
+                <a:spcPts val="600"/>
+              </a:spcAft>
+            </a:pPr>
+            <a:r>
+              <a:rPr sz="1700" b="1" i="0">
                 <a:solidFill>
                   <a:srgbClr val="2F7DC8"/>
                 </a:solidFill>
                 <a:latin typeface="Arial"/>
               </a:rPr>
-              <a:t>DISCUSSION</a:t>
-            </a:r>
-          </a:p>
-          <a:p>
-            <a:r>
-              <a:rPr sz="2700" b="1" i="0">
-                <a:solidFill>
-                  <a:srgbClr val="1F2A44"/>
-                </a:solidFill>
-                <a:latin typeface="Arial"/>
-              </a:rPr>
-              <a:t>Two design questions the theory raises</a:t>
-            </a:r>
-          </a:p>
-        </p:txBody>
-      </p:sp>
-      <p:sp>
-        <p:nvSpPr>
-          <p:cNvPr id="4" name="Rectangle 3"/>
-          <p:cNvSpPr/>
-          <p:nvPr/>
-        </p:nvSpPr>
-        <p:spPr>
-          <a:xfrm>
-            <a:off x="521207" y="1225296"/>
-            <a:ext cx="2103120" cy="41148"/>
-          </a:xfrm>
-          <a:prstGeom prst="rect">
-            <a:avLst/>
-          </a:prstGeom>
-          <a:solidFill>
-            <a:srgbClr val="2F7DC8"/>
-          </a:solidFill>
-          <a:ln>
-            <a:noFill/>
-          </a:ln>
-          <a:effectLst/>
-        </p:spPr>
-        <p:style>
-          <a:lnRef idx="1">
-            <a:schemeClr val="accent1"/>
-          </a:lnRef>
-          <a:fillRef idx="3">
-            <a:schemeClr val="accent1"/>
-          </a:fillRef>
-          <a:effectRef idx="2">
-            <a:schemeClr val="accent1"/>
-          </a:effectRef>
-          <a:fontRef idx="minor">
-            <a:schemeClr val="lt1"/>
-          </a:fontRef>
-        </p:style>
-        <p:txBody>
-          <a:bodyPr rtlCol="0" anchor="ctr"/>
-          <a:lstStyle/>
-          <a:p>
-            <a:pPr algn="ctr"/>
-          </a:p>
-        </p:txBody>
-      </p:sp>
-      <p:sp>
-        <p:nvSpPr>
-          <p:cNvPr id="5" name="TextBox 4"/>
-          <p:cNvSpPr txBox="1"/>
-          <p:nvPr/>
-        </p:nvSpPr>
-        <p:spPr>
-          <a:xfrm>
-            <a:off x="502920" y="1417320"/>
-            <a:ext cx="11247120" cy="2651760"/>
-          </a:xfrm>
-          <a:prstGeom prst="rect">
-            <a:avLst/>
-          </a:prstGeom>
-          <a:noFill/>
-        </p:spPr>
-        <p:txBody>
-          <a:bodyPr wrap="square" anchor="t">
-            <a:spAutoFit/>
-          </a:bodyPr>
-          <a:lstStyle/>
+              <a:t>PART IV</a:t>
+            </a:r>
+          </a:p>
+          <a:p>
+            <a:r>
+              <a:rPr sz="4000" b="1" i="0">
+                <a:solidFill>
+                  <a:srgbClr val="FFFFFF"/>
+                </a:solidFill>
+                <a:latin typeface="Arial"/>
+              </a:rPr>
+              <a:t>Discussion</a:t>
+            </a:r>
+          </a:p>
           <a:p>
             <a:pPr>
               <a:spcBef>
-                <a:spcPts val="400"/>
+                <a:spcPts val="800"/>
               </a:spcBef>
-              <a:spcAft>
-                <a:spcPts val="900"/>
-              </a:spcAft>
-            </a:pPr>
-            <a:r>
-              <a:rPr sz="1600" b="1" i="0">
-                <a:solidFill>
-                  <a:srgbClr val="2F7DC8"/>
-                </a:solidFill>
-                <a:latin typeface="Arial"/>
-              </a:rPr>
-              <a:t>1) Which nonconformity score?</a:t>
-            </a:r>
-          </a:p>
-          <a:p>
-            <a:pPr>
-              <a:spcAft>
-                <a:spcPts val="800"/>
-              </a:spcAft>
-            </a:pPr>
-            <a:r>
-              <a:rPr sz="1450" b="1" i="0">
-                <a:solidFill>
-                  <a:srgbClr val="2F7DC8"/>
-                </a:solidFill>
-                <a:latin typeface="Arial"/>
-              </a:rPr>
-              <a:t>▪  </a:t>
-            </a:r>
-            <a:r>
-              <a:rPr sz="1450" b="0" i="0">
-                <a:solidFill>
-                  <a:srgbClr val="333740"/>
-                </a:solidFill>
-                <a:latin typeface="Arial"/>
-              </a:rPr>
-              <a:t>Align the score to the anticipated drift: the estimand-contrast score for global / level shifts; the Mahalanobis (trajectory-shape) score for ramps, curvature, or transient dips; the max score for a single-visit spike.</a:t>
-            </a:r>
-          </a:p>
-          <a:p>
-            <a:pPr>
-              <a:spcAft>
-                <a:spcPts val="800"/>
-              </a:spcAft>
-            </a:pPr>
-            <a:r>
-              <a:rPr sz="1450" b="1" i="0">
-                <a:solidFill>
-                  <a:srgbClr val="2F7DC8"/>
-                </a:solidFill>
-                <a:latin typeface="Arial"/>
-              </a:rPr>
-              <a:t>▪  </a:t>
-            </a:r>
-            <a:r>
-              <a:rPr sz="1450" b="0" i="0">
-                <a:solidFill>
-                  <a:srgbClr val="333740"/>
-                </a:solidFill>
-                <a:latin typeface="Arial"/>
-              </a:rPr>
-              <a:t>A score blind to the drift has no power — e.g. a visit-average contrast cannot see a shape change that averages out. Pick by the expected departure, and pre-specify it.</a:t>
-            </a:r>
-          </a:p>
-          <a:p>
-            <a:pPr>
-              <a:spcAft>
-                <a:spcPts val="800"/>
-              </a:spcAft>
-            </a:pPr>
-            <a:r>
-              <a:rPr sz="1450" b="1" i="0">
-                <a:solidFill>
-                  <a:srgbClr val="2F7DC8"/>
-                </a:solidFill>
-                <a:latin typeface="Arial"/>
-              </a:rPr>
-              <a:t>▪  </a:t>
-            </a:r>
-            <a:r>
-              <a:rPr sz="1450" b="0" i="0">
-                <a:solidFill>
-                  <a:srgbClr val="333740"/>
-                </a:solidFill>
-                <a:latin typeface="Arial"/>
-              </a:rPr>
-              <a:t>Detection is not identification: a richer (VME-level) score catches more kinds of drift but can over-exclude compatible ECs; the estimand itself needs only ME-c.</a:t>
-            </a:r>
-          </a:p>
-        </p:txBody>
-      </p:sp>
-      <p:sp>
-        <p:nvSpPr>
-          <p:cNvPr id="6" name="TextBox 5"/>
-          <p:cNvSpPr txBox="1"/>
-          <p:nvPr/>
-        </p:nvSpPr>
-        <p:spPr>
-          <a:xfrm>
-            <a:off x="502920" y="4114800"/>
-            <a:ext cx="11247120" cy="2331720"/>
-          </a:xfrm>
-          <a:prstGeom prst="rect">
-            <a:avLst/>
-          </a:prstGeom>
-          <a:noFill/>
-        </p:spPr>
-        <p:txBody>
-          <a:bodyPr wrap="square" anchor="t">
-            <a:spAutoFit/>
-          </a:bodyPr>
-          <a:lstStyle/>
-          <a:p>
-            <a:pPr>
-              <a:spcBef>
-                <a:spcPts val="400"/>
-              </a:spcBef>
-              <a:spcAft>
-                <a:spcPts val="900"/>
-              </a:spcAft>
-            </a:pPr>
-            <a:r>
-              <a:rPr sz="1500" b="1" i="0">
-                <a:solidFill>
-                  <a:srgbClr val="2F7DC8"/>
-                </a:solidFill>
-                <a:latin typeface="Arial"/>
-              </a:rPr>
-              <a:t>2) The assumption hierarchy — what is actually sufficient</a:t>
-            </a:r>
-          </a:p>
-          <a:p>
-            <a:pPr>
-              <a:spcAft>
-                <a:spcPts val="800"/>
-              </a:spcAft>
-            </a:pPr>
-            <a:r>
-              <a:rPr sz="1350" b="1" i="0">
-                <a:solidFill>
-                  <a:srgbClr val="2F7DC8"/>
-                </a:solidFill>
-                <a:latin typeface="Arial"/>
-              </a:rPr>
-              <a:t>▪  </a:t>
-            </a:r>
-            <a:r>
-              <a:rPr sz="1350" b="0" i="0">
-                <a:solidFill>
-                  <a:srgbClr val="333740"/>
-                </a:solidFill>
-                <a:latin typeface="Arial"/>
-              </a:rPr>
-              <a:t>Identifying the effect needs only ME-c (the one-contrast conditional mean); VME and DE are strictly stronger and are NOT required.</a:t>
-            </a:r>
-          </a:p>
-          <a:p>
-            <a:pPr>
-              <a:spcAft>
-                <a:spcPts val="800"/>
-              </a:spcAft>
-            </a:pPr>
-            <a:r>
-              <a:rPr sz="1350" b="1" i="0">
-                <a:solidFill>
-                  <a:srgbClr val="2F7DC8"/>
-                </a:solidFill>
-                <a:latin typeface="Arial"/>
-              </a:rPr>
-              <a:t>▪  </a:t>
-            </a:r>
-            <a:r>
-              <a:rPr sz="1350" b="0" i="0">
-                <a:solidFill>
-                  <a:srgbClr val="333740"/>
-                </a:solidFill>
-                <a:latin typeface="Arial"/>
-              </a:rPr>
-              <a:t>Ordinary conformal validity nominally needs the full law DE; our screen relaxes this — it checks only the SCORE distribution (between ME-c and VME), a SUFFICIENT screen without assuming DE.</a:t>
-            </a:r>
-          </a:p>
-          <a:p>
-            <a:pPr>
-              <a:spcAft>
-                <a:spcPts val="800"/>
-              </a:spcAft>
-            </a:pPr>
-            <a:r>
-              <a:rPr sz="1350" b="1" i="0">
-                <a:solidFill>
-                  <a:srgbClr val="1F2A44"/>
-                </a:solidFill>
-                <a:latin typeface="Arial"/>
-              </a:rPr>
-              <a:t>The crux is the gap between what identification NEEDS (ME-c), what the screen CHECKS (the score law), and what the chosen score is SENSITIVE to — pick the score so “score-compatible” implies “ME-c-compatible.”</a:t>
-            </a:r>
-          </a:p>
-        </p:txBody>
-      </p:sp>
-      <p:sp>
-        <p:nvSpPr>
-          <p:cNvPr id="7" name="TextBox 6"/>
-          <p:cNvSpPr txBox="1"/>
-          <p:nvPr/>
-        </p:nvSpPr>
-        <p:spPr>
-          <a:xfrm>
-            <a:off x="11094415" y="6455664"/>
-            <a:ext cx="914400" cy="320040"/>
-          </a:xfrm>
-          <a:prstGeom prst="rect">
-            <a:avLst/>
-          </a:prstGeom>
-          <a:noFill/>
-        </p:spPr>
-        <p:txBody>
-          <a:bodyPr wrap="square" anchor="t">
-            <a:spAutoFit/>
-          </a:bodyPr>
-          <a:lstStyle/>
-          <a:p>
-            <a:pPr algn="r"/>
-            <a:r>
-              <a:rPr sz="1100" b="0" i="0">
-                <a:solidFill>
-                  <a:srgbClr val="6B7280"/>
-                </a:solidFill>
-                <a:latin typeface="Arial"/>
-              </a:rPr>
-              <a:t>25</a:t>
+            </a:pPr>
+            <a:r>
+              <a:rPr sz="1600" b="0" i="1">
+                <a:solidFill>
+                  <a:srgbClr val="C9D4E4"/>
+                </a:solidFill>
+                <a:latin typeface="Arial"/>
+              </a:rPr>
+              <a:t>Scope, limits, and open problems</a:t>
             </a:r>
           </a:p>
         </p:txBody>
@@ -11960,7 +12114,7 @@
                 </a:solidFill>
                 <a:latin typeface="Arial"/>
               </a:rPr>
-              <a:t>DISCUSSION &amp; PROBLEMS</a:t>
+              <a:t>DISCUSSION</a:t>
             </a:r>
           </a:p>
           <a:p>
@@ -11971,7 +12125,7 @@
                 </a:solidFill>
                 <a:latin typeface="Arial"/>
               </a:rPr>
-              <a:t>Open problems</a:t>
+              <a:t>Scope, limits, and positioning</a:t>
             </a:r>
           </a:p>
         </p:txBody>
@@ -12048,22 +12202,57 @@
               </a:spcAft>
             </a:pPr>
             <a:r>
-              <a:rPr sz="1500" b="1" i="0">
+              <a:rPr sz="1450" b="1" i="0">
+                <a:solidFill>
+                  <a:srgbClr val="1F2A44"/>
+                </a:solidFill>
+                <a:latin typeface="Arial"/>
+              </a:rPr>
+              <a:t>Insurance, not a free lunch: residual-rank screening turns naive full-borrow's catastrophic bias into VALID, ROBUST inference, with a modest but real efficiency gain when the randomized arm is underpowered.</a:t>
+            </a:r>
+          </a:p>
+          <a:p>
+            <a:pPr>
+              <a:spcBef>
+                <a:spcPts val="400"/>
+              </a:spcBef>
+              <a:spcAft>
+                <a:spcPts val="900"/>
+              </a:spcAft>
+            </a:pPr>
+            <a:r>
+              <a:rPr sz="1600" b="1" i="0">
                 <a:solidFill>
                   <a:srgbClr val="2F7DC8"/>
                 </a:solidFill>
                 <a:latin typeface="Arial"/>
               </a:rPr>
+              <a:t>The upside is bounded</a:t>
+            </a:r>
+          </a:p>
+          <a:p>
+            <a:pPr>
+              <a:spcAft>
+                <a:spcPts val="800"/>
+              </a:spcAft>
+            </a:pPr>
+            <a:r>
+              <a:rPr sz="1450" b="1" i="0">
+                <a:solidFill>
+                  <a:srgbClr val="2F7DC8"/>
+                </a:solidFill>
+                <a:latin typeface="Arial"/>
+              </a:rPr>
               <a:t>▪  </a:t>
             </a:r>
             <a:r>
-              <a:rPr sz="1500" b="0" i="0">
+              <a:rPr sz="1450" b="0" i="0">
                 <a:solidFill>
                   <a:srgbClr val="333740"/>
                 </a:solidFill>
                 <a:latin typeface="Arial"/>
               </a:rPr>
-              <a:t>Soft / continuous borrowing: down-weight rather than hard keep/drop, to remove the selection bias scalably (the current screen trades a little bias for robustness).</a:t>
+              <a:t>An oracle-ceiling limits the gain to ≈ 15–25% RMSE: the treated arm is not borrowable, so the borrowable share of variance is  n(R,1) / (n(R,0)+n(R,1)).</a:t>
             </a:r>
           </a:p>
           <a:p>
@@ -12073,7 +12262,7 @@
               </a:spcAft>
             </a:pPr>
             <a:r>
-              <a:rPr sz="1500" b="1" i="0">
+              <a:rPr sz="1450" b="1" i="0">
                 <a:solidFill>
                   <a:srgbClr val="2F7DC8"/>
                 </a:solidFill>
@@ -12082,13 +12271,32 @@
               <a:t>▪  </a:t>
             </a:r>
             <a:r>
-              <a:rPr sz="1500" b="0" i="0">
+              <a:rPr sz="1450" b="0" i="0">
                 <a:solidFill>
                   <a:srgbClr val="333740"/>
                 </a:solidFill>
                 <a:latin typeface="Arial"/>
               </a:rPr>
-              <a:t>Nested bootstrap for the adaptive-γ confidence interval: the current re-use of the point-selected γ inside the bootstrap is mildly anti-conservative.</a:t>
+              <a:t>Borrowing helps most when randomized controls are scarce — but the screen also needs enough controls to calibrate; CV+ widens this window.</a:t>
+            </a:r>
+          </a:p>
+          <a:p>
+            <a:pPr>
+              <a:spcBef>
+                <a:spcPts val="400"/>
+              </a:spcBef>
+              <a:spcAft>
+                <a:spcPts val="900"/>
+              </a:spcAft>
+            </a:pPr>
+            <a:r>
+              <a:rPr sz="1600" b="1" i="0">
+                <a:solidFill>
+                  <a:srgbClr val="2F7DC8"/>
+                </a:solidFill>
+                <a:latin typeface="Arial"/>
+              </a:rPr>
+              <a:t>Two things you must choose well</a:t>
             </a:r>
           </a:p>
           <a:p>
@@ -12098,7 +12306,7 @@
               </a:spcAft>
             </a:pPr>
             <a:r>
-              <a:rPr sz="1500" b="1" i="0">
+              <a:rPr sz="1450" b="1" i="0">
                 <a:solidFill>
                   <a:srgbClr val="2F7DC8"/>
                 </a:solidFill>
@@ -12107,13 +12315,13 @@
               <a:t>▪  </a:t>
             </a:r>
             <a:r>
-              <a:rPr sz="1500" b="0" i="0">
+              <a:rPr sz="1450" b="0" i="0">
                 <a:solidFill>
                   <a:srgbClr val="333740"/>
                 </a:solidFill>
                 <a:latin typeface="Arial"/>
               </a:rPr>
-              <a:t>Type-I is reported RELATIVE to RCT-only — both share a percentile-bootstrap floor set by the number of resamples B; larger B pulls the absolute value to nominal.</a:t>
+              <a:t>The score must match the anticipated drift shape (a mismatched contrast is blind to the drift).</a:t>
             </a:r>
           </a:p>
           <a:p>
@@ -12123,7 +12331,7 @@
               </a:spcAft>
             </a:pPr>
             <a:r>
-              <a:rPr sz="1500" b="1" i="0">
+              <a:rPr sz="1450" b="1" i="0">
                 <a:solidFill>
                   <a:srgbClr val="2F7DC8"/>
                 </a:solidFill>
@@ -12132,38 +12340,13 @@
               <a:t>▪  </a:t>
             </a:r>
             <a:r>
-              <a:rPr sz="1500" b="0" i="0">
+              <a:rPr sz="1450" b="0" i="0">
                 <a:solidFill>
                   <a:srgbClr val="333740"/>
                 </a:solidFill>
                 <a:latin typeface="Arial"/>
               </a:rPr>
-              <a:t>Multiplicity / FDR across many external controls (family-wise exclusion of at least one compatible EC is common).</a:t>
-            </a:r>
-          </a:p>
-          <a:p>
-            <a:pPr>
-              <a:spcAft>
-                <a:spcPts val="800"/>
-              </a:spcAft>
-            </a:pPr>
-            <a:r>
-              <a:rPr sz="1500" b="1" i="0">
-                <a:solidFill>
-                  <a:srgbClr val="2F7DC8"/>
-                </a:solidFill>
-                <a:latin typeface="Arial"/>
-              </a:rPr>
-              <a:t>▪  </a:t>
-            </a:r>
-            <a:r>
-              <a:rPr sz="1500" b="0" i="0">
-                <a:solidFill>
-                  <a:srgbClr val="333740"/>
-                </a:solidFill>
-                <a:latin typeface="Arial"/>
-              </a:rPr>
-              <a:t>Validation on a covariate-driven (plasmode) design, beyond the analytic binary toy, to show the conclusions are not an artifact of the toy.</a:t>
+              <a:t>Detection is signal-to-noise-limited; residual undetected low-SNR drift is the main risk.</a:t>
             </a:r>
           </a:p>
         </p:txBody>
@@ -12299,7 +12482,7 @@
                 </a:solidFill>
                 <a:latin typeface="Arial"/>
               </a:rPr>
-              <a:t>TAKEAWAYS</a:t>
+              <a:t>DISCUSSION</a:t>
             </a:r>
           </a:p>
           <a:p>
@@ -12310,7 +12493,7 @@
                 </a:solidFill>
                 <a:latin typeface="Arial"/>
               </a:rPr>
-              <a:t>Summary</a:t>
+              <a:t>Two design questions the theory raises</a:t>
             </a:r>
           </a:p>
         </p:txBody>
@@ -12367,8 +12550,8 @@
         </p:nvSpPr>
         <p:spPr>
           <a:xfrm>
-            <a:off x="502920" y="1371600"/>
-            <a:ext cx="11247120" cy="5120640"/>
+            <a:off x="502920" y="1417320"/>
+            <a:ext cx="11247120" cy="2651760"/>
           </a:xfrm>
           <a:prstGeom prst="rect">
             <a:avLst/>
@@ -12390,13 +12573,13 @@
               </a:spcAft>
             </a:pPr>
             <a:r>
-              <a:rPr sz="1600" b="1" i="0">
+              <a:rPr sz="1500" b="1" i="0">
                 <a:solidFill>
                   <a:srgbClr val="2F7DC8"/>
                 </a:solidFill>
                 <a:latin typeface="Arial"/>
               </a:rPr>
-              <a:t>Problem</a:t>
+              <a:t>1) Which nonconformity score?</a:t>
             </a:r>
           </a:p>
           <a:p>
@@ -12406,7 +12589,7 @@
               </a:spcAft>
             </a:pPr>
             <a:r>
-              <a:rPr sz="1450" b="1" i="0">
+              <a:rPr sz="1350" b="1" i="0">
                 <a:solidFill>
                   <a:srgbClr val="2F7DC8"/>
                 </a:solidFill>
@@ -12415,15 +12598,88 @@
               <a:t>▪  </a:t>
             </a:r>
             <a:r>
-              <a:rPr sz="1450" b="0" i="0">
+              <a:rPr sz="1350" b="0" i="0">
                 <a:solidFill>
                   <a:srgbClr val="333740"/>
                 </a:solidFill>
                 <a:latin typeface="Arial"/>
               </a:rPr>
-              <a:t>Borrow external controls to sharpen a hybrid trial — without importing bias from incompatible ones.</a:t>
-            </a:r>
-          </a:p>
+              <a:t>FIRST the estimator, then the drift. c is fixed by the functional the estimator uses — not by the estimand label. A last-visit ATE gives c=(−1,0,0,1) only if the estimator ignores the earlier visits; impose longitudinal structure for efficiency (GLS / MMRM / shared trajectory) and c must span the visits.</a:t>
+            </a:r>
+          </a:p>
+          <a:p>
+            <a:pPr>
+              <a:spcAft>
+                <a:spcPts val="800"/>
+              </a:spcAft>
+            </a:pPr>
+            <a:r>
+              <a:rPr sz="1350" b="1" i="0">
+                <a:solidFill>
+                  <a:srgbClr val="2F7DC8"/>
+                </a:solidFill>
+                <a:latin typeface="Arial"/>
+              </a:rPr>
+              <a:t>▪  </a:t>
+            </a:r>
+            <a:r>
+              <a:rPr sz="1350" b="0" i="0">
+                <a:solidFill>
+                  <a:srgbClr val="333740"/>
+                </a:solidFill>
+                <a:latin typeface="Arial"/>
+              </a:rPr>
+              <a:t>Then align to the anticipated drift: contrast score for global / level shifts; Mahalanobis (trajectory-shape) for ramps, curvature, transient dips; max for a single-visit spike. A score blind to the drift has no power — pick by the expected departure, and pre-specify it.</a:t>
+            </a:r>
+          </a:p>
+          <a:p>
+            <a:pPr>
+              <a:spcAft>
+                <a:spcPts val="800"/>
+              </a:spcAft>
+            </a:pPr>
+            <a:r>
+              <a:rPr sz="1350" b="1" i="0">
+                <a:solidFill>
+                  <a:srgbClr val="2F7DC8"/>
+                </a:solidFill>
+                <a:latin typeface="Arial"/>
+              </a:rPr>
+              <a:t>▪  </a:t>
+            </a:r>
+            <a:r>
+              <a:rPr sz="1350" b="0" i="0">
+                <a:solidFill>
+                  <a:srgbClr val="333740"/>
+                </a:solidFill>
+                <a:latin typeface="Arial"/>
+              </a:rPr>
+              <a:t>Detection is not identification: a richer (VME-level) score catches more kinds of drift but can over-exclude compatible ECs; the estimand needs only ME-c — indexed by the estimator's a, not by the estimand's contrast.</a:t>
+            </a:r>
+          </a:p>
+        </p:txBody>
+      </p:sp>
+      <p:sp>
+        <p:nvSpPr>
+          <p:cNvPr id="6" name="TextBox 5"/>
+          <p:cNvSpPr txBox="1"/>
+          <p:nvPr/>
+        </p:nvSpPr>
+        <p:spPr>
+          <a:xfrm>
+            <a:off x="502920" y="4114800"/>
+            <a:ext cx="11247120" cy="2331720"/>
+          </a:xfrm>
+          <a:prstGeom prst="rect">
+            <a:avLst/>
+          </a:prstGeom>
+          <a:noFill/>
+        </p:spPr>
+        <p:txBody>
+          <a:bodyPr wrap="square" anchor="t">
+            <a:spAutoFit/>
+          </a:bodyPr>
+          <a:lstStyle/>
           <a:p>
             <a:pPr>
               <a:spcBef>
@@ -12434,13 +12690,13 @@
               </a:spcAft>
             </a:pPr>
             <a:r>
-              <a:rPr sz="1600" b="1" i="0">
+              <a:rPr sz="1500" b="1" i="0">
                 <a:solidFill>
                   <a:srgbClr val="2F7DC8"/>
                 </a:solidFill>
                 <a:latin typeface="Arial"/>
               </a:rPr>
-              <a:t>Idea</a:t>
+              <a:t>2) The assumption hierarchy — what is actually sufficient</a:t>
             </a:r>
           </a:p>
           <a:p>
@@ -12450,7 +12706,7 @@
               </a:spcAft>
             </a:pPr>
             <a:r>
-              <a:rPr sz="1450" b="1" i="0">
+              <a:rPr sz="1350" b="1" i="0">
                 <a:solidFill>
                   <a:srgbClr val="2F7DC8"/>
                 </a:solidFill>
@@ -12459,15 +12715,609 @@
               <a:t>▪  </a:t>
             </a:r>
             <a:r>
-              <a:rPr sz="1450" b="0" i="0">
+              <a:rPr sz="1350" b="0" i="0">
                 <a:solidFill>
                   <a:srgbClr val="333740"/>
                 </a:solidFill>
                 <a:latin typeface="Arial"/>
               </a:rPr>
-              <a:t>Rank each EC's longitudinal residual score among the randomized controls — weighted to absorb covariate shift — and borrow only the conforming ones through a transported AIPW.</a:t>
-            </a:r>
-          </a:p>
+              <a:t>Identifying the effect needs only ME-c (the one-contrast conditional mean); VME and DE are strictly stronger and are NOT required.</a:t>
+            </a:r>
+          </a:p>
+          <a:p>
+            <a:pPr>
+              <a:spcAft>
+                <a:spcPts val="800"/>
+              </a:spcAft>
+            </a:pPr>
+            <a:r>
+              <a:rPr sz="1350" b="1" i="0">
+                <a:solidFill>
+                  <a:srgbClr val="2F7DC8"/>
+                </a:solidFill>
+                <a:latin typeface="Arial"/>
+              </a:rPr>
+              <a:t>▪  </a:t>
+            </a:r>
+            <a:r>
+              <a:rPr sz="1350" b="0" i="0">
+                <a:solidFill>
+                  <a:srgbClr val="333740"/>
+                </a:solidFill>
+                <a:latin typeface="Arial"/>
+              </a:rPr>
+              <a:t>Ordinary conformal validity nominally needs the full law DE; our screen relaxes this — it checks only the SCORE distribution (between ME-c and VME), a SUFFICIENT screen without assuming DE.</a:t>
+            </a:r>
+          </a:p>
+          <a:p>
+            <a:pPr>
+              <a:spcAft>
+                <a:spcPts val="800"/>
+              </a:spcAft>
+            </a:pPr>
+            <a:r>
+              <a:rPr sz="1350" b="1" i="0">
+                <a:solidFill>
+                  <a:srgbClr val="1F2A44"/>
+                </a:solidFill>
+                <a:latin typeface="Arial"/>
+              </a:rPr>
+              <a:t>The crux is the gap between what identification NEEDS (ME-c), what the screen CHECKS (the score law), and what the chosen score is SENSITIVE to — pick the score so “score-compatible” implies “ME-c-compatible.”</a:t>
+            </a:r>
+          </a:p>
+        </p:txBody>
+      </p:sp>
+      <p:sp>
+        <p:nvSpPr>
+          <p:cNvPr id="7" name="TextBox 6"/>
+          <p:cNvSpPr txBox="1"/>
+          <p:nvPr/>
+        </p:nvSpPr>
+        <p:spPr>
+          <a:xfrm>
+            <a:off x="11094415" y="6455664"/>
+            <a:ext cx="914400" cy="320040"/>
+          </a:xfrm>
+          <a:prstGeom prst="rect">
+            <a:avLst/>
+          </a:prstGeom>
+          <a:noFill/>
+        </p:spPr>
+        <p:txBody>
+          <a:bodyPr wrap="square" anchor="t">
+            <a:spAutoFit/>
+          </a:bodyPr>
+          <a:lstStyle/>
+          <a:p>
+            <a:pPr algn="r"/>
+            <a:r>
+              <a:rPr sz="1100" b="0" i="0">
+                <a:solidFill>
+                  <a:srgbClr val="6B7280"/>
+                </a:solidFill>
+                <a:latin typeface="Arial"/>
+              </a:rPr>
+              <a:t>27</a:t>
+            </a:r>
+          </a:p>
+        </p:txBody>
+      </p:sp>
+    </p:spTree>
+  </p:cSld>
+  <p:clrMapOvr>
+    <a:masterClrMapping/>
+  </p:clrMapOvr>
+</p:sld>
+</file>
+
+<file path=ppt/slides/slide33.xml><?xml version="1.0" encoding="utf-8"?>
+<p:sld xmlns:a="http://schemas.openxmlformats.org/drawingml/2006/main" xmlns:p="http://schemas.openxmlformats.org/presentationml/2006/main" xmlns:r="http://schemas.openxmlformats.org/officeDocument/2006/relationships">
+  <p:cSld>
+    <p:spTree>
+      <p:nvGrpSpPr>
+        <p:cNvPr id="1" name=""/>
+        <p:cNvGrpSpPr/>
+        <p:nvPr/>
+      </p:nvGrpSpPr>
+      <p:grpSpPr/>
+      <p:sp>
+        <p:nvSpPr>
+          <p:cNvPr id="2" name="Rectangle 1"/>
+          <p:cNvSpPr/>
+          <p:nvPr/>
+        </p:nvSpPr>
+        <p:spPr>
+          <a:xfrm>
+            <a:off x="0" y="0"/>
+            <a:ext cx="12191695" cy="128016"/>
+          </a:xfrm>
+          <a:prstGeom prst="rect">
+            <a:avLst/>
+          </a:prstGeom>
+          <a:solidFill>
+            <a:srgbClr val="2F7DC8"/>
+          </a:solidFill>
+          <a:ln>
+            <a:noFill/>
+          </a:ln>
+          <a:effectLst/>
+        </p:spPr>
+        <p:style>
+          <a:lnRef idx="1">
+            <a:schemeClr val="accent1"/>
+          </a:lnRef>
+          <a:fillRef idx="3">
+            <a:schemeClr val="accent1"/>
+          </a:fillRef>
+          <a:effectRef idx="2">
+            <a:schemeClr val="accent1"/>
+          </a:effectRef>
+          <a:fontRef idx="minor">
+            <a:schemeClr val="lt1"/>
+          </a:fontRef>
+        </p:style>
+        <p:txBody>
+          <a:bodyPr rtlCol="0" anchor="ctr"/>
+          <a:lstStyle/>
+          <a:p>
+            <a:pPr algn="ctr"/>
+          </a:p>
+        </p:txBody>
+      </p:sp>
+      <p:sp>
+        <p:nvSpPr>
+          <p:cNvPr id="3" name="TextBox 2"/>
+          <p:cNvSpPr txBox="1"/>
+          <p:nvPr/>
+        </p:nvSpPr>
+        <p:spPr>
+          <a:xfrm>
+            <a:off x="502920" y="274320"/>
+            <a:ext cx="11185855" cy="932688"/>
+          </a:xfrm>
+          <a:prstGeom prst="rect">
+            <a:avLst/>
+          </a:prstGeom>
+          <a:noFill/>
+        </p:spPr>
+        <p:txBody>
+          <a:bodyPr wrap="square" anchor="t">
+            <a:spAutoFit/>
+          </a:bodyPr>
+          <a:lstStyle/>
+          <a:p>
+            <a:pPr>
+              <a:spcAft>
+                <a:spcPts val="200"/>
+              </a:spcAft>
+            </a:pPr>
+            <a:r>
+              <a:rPr sz="1250" b="1" i="0">
+                <a:solidFill>
+                  <a:srgbClr val="2F7DC8"/>
+                </a:solidFill>
+                <a:latin typeface="Arial"/>
+              </a:rPr>
+              <a:t>DISCUSSION &amp; PROBLEMS</a:t>
+            </a:r>
+          </a:p>
+          <a:p>
+            <a:r>
+              <a:rPr sz="2700" b="1" i="0">
+                <a:solidFill>
+                  <a:srgbClr val="1F2A44"/>
+                </a:solidFill>
+                <a:latin typeface="Arial"/>
+              </a:rPr>
+              <a:t>Open problems</a:t>
+            </a:r>
+          </a:p>
+        </p:txBody>
+      </p:sp>
+      <p:sp>
+        <p:nvSpPr>
+          <p:cNvPr id="4" name="Rectangle 3"/>
+          <p:cNvSpPr/>
+          <p:nvPr/>
+        </p:nvSpPr>
+        <p:spPr>
+          <a:xfrm>
+            <a:off x="521207" y="1225296"/>
+            <a:ext cx="2103120" cy="41148"/>
+          </a:xfrm>
+          <a:prstGeom prst="rect">
+            <a:avLst/>
+          </a:prstGeom>
+          <a:solidFill>
+            <a:srgbClr val="2F7DC8"/>
+          </a:solidFill>
+          <a:ln>
+            <a:noFill/>
+          </a:ln>
+          <a:effectLst/>
+        </p:spPr>
+        <p:style>
+          <a:lnRef idx="1">
+            <a:schemeClr val="accent1"/>
+          </a:lnRef>
+          <a:fillRef idx="3">
+            <a:schemeClr val="accent1"/>
+          </a:fillRef>
+          <a:effectRef idx="2">
+            <a:schemeClr val="accent1"/>
+          </a:effectRef>
+          <a:fontRef idx="minor">
+            <a:schemeClr val="lt1"/>
+          </a:fontRef>
+        </p:style>
+        <p:txBody>
+          <a:bodyPr rtlCol="0" anchor="ctr"/>
+          <a:lstStyle/>
+          <a:p>
+            <a:pPr algn="ctr"/>
+          </a:p>
+        </p:txBody>
+      </p:sp>
+      <p:sp>
+        <p:nvSpPr>
+          <p:cNvPr id="5" name="TextBox 4"/>
+          <p:cNvSpPr txBox="1"/>
+          <p:nvPr/>
+        </p:nvSpPr>
+        <p:spPr>
+          <a:xfrm>
+            <a:off x="502920" y="1417320"/>
+            <a:ext cx="11247120" cy="4937760"/>
+          </a:xfrm>
+          <a:prstGeom prst="rect">
+            <a:avLst/>
+          </a:prstGeom>
+          <a:noFill/>
+        </p:spPr>
+        <p:txBody>
+          <a:bodyPr wrap="square" anchor="t">
+            <a:spAutoFit/>
+          </a:bodyPr>
+          <a:lstStyle/>
+          <a:p>
+            <a:pPr>
+              <a:spcAft>
+                <a:spcPts val="800"/>
+              </a:spcAft>
+            </a:pPr>
+            <a:r>
+              <a:rPr sz="1500" b="1" i="0">
+                <a:solidFill>
+                  <a:srgbClr val="2F7DC8"/>
+                </a:solidFill>
+                <a:latin typeface="Arial"/>
+              </a:rPr>
+              <a:t>▪  </a:t>
+            </a:r>
+            <a:r>
+              <a:rPr sz="1500" b="0" i="0">
+                <a:solidFill>
+                  <a:srgbClr val="333740"/>
+                </a:solidFill>
+                <a:latin typeface="Arial"/>
+              </a:rPr>
+              <a:t>Soft / continuous borrowing: down-weight rather than hard keep/drop, to remove the selection bias scalably (the current screen trades a little bias for robustness).</a:t>
+            </a:r>
+          </a:p>
+          <a:p>
+            <a:pPr>
+              <a:spcAft>
+                <a:spcPts val="800"/>
+              </a:spcAft>
+            </a:pPr>
+            <a:r>
+              <a:rPr sz="1500" b="1" i="0">
+                <a:solidFill>
+                  <a:srgbClr val="2F7DC8"/>
+                </a:solidFill>
+                <a:latin typeface="Arial"/>
+              </a:rPr>
+              <a:t>▪  </a:t>
+            </a:r>
+            <a:r>
+              <a:rPr sz="1500" b="0" i="0">
+                <a:solidFill>
+                  <a:srgbClr val="333740"/>
+                </a:solidFill>
+                <a:latin typeface="Arial"/>
+              </a:rPr>
+              <a:t>Nested bootstrap for the adaptive-γ confidence interval: the current re-use of the point-selected γ inside the bootstrap is mildly anti-conservative.</a:t>
+            </a:r>
+          </a:p>
+          <a:p>
+            <a:pPr>
+              <a:spcAft>
+                <a:spcPts val="800"/>
+              </a:spcAft>
+            </a:pPr>
+            <a:r>
+              <a:rPr sz="1500" b="1" i="0">
+                <a:solidFill>
+                  <a:srgbClr val="2F7DC8"/>
+                </a:solidFill>
+                <a:latin typeface="Arial"/>
+              </a:rPr>
+              <a:t>▪  </a:t>
+            </a:r>
+            <a:r>
+              <a:rPr sz="1500" b="0" i="0">
+                <a:solidFill>
+                  <a:srgbClr val="333740"/>
+                </a:solidFill>
+                <a:latin typeface="Arial"/>
+              </a:rPr>
+              <a:t>Type-I is reported RELATIVE to RCT-only — both share a percentile-bootstrap floor set by the number of resamples B; larger B pulls the absolute value to nominal.</a:t>
+            </a:r>
+          </a:p>
+          <a:p>
+            <a:pPr>
+              <a:spcAft>
+                <a:spcPts val="800"/>
+              </a:spcAft>
+            </a:pPr>
+            <a:r>
+              <a:rPr sz="1500" b="1" i="0">
+                <a:solidFill>
+                  <a:srgbClr val="2F7DC8"/>
+                </a:solidFill>
+                <a:latin typeface="Arial"/>
+              </a:rPr>
+              <a:t>▪  </a:t>
+            </a:r>
+            <a:r>
+              <a:rPr sz="1500" b="0" i="0">
+                <a:solidFill>
+                  <a:srgbClr val="333740"/>
+                </a:solidFill>
+                <a:latin typeface="Arial"/>
+              </a:rPr>
+              <a:t>Multiplicity / FDR across many external controls (family-wise exclusion of at least one compatible EC is common).</a:t>
+            </a:r>
+          </a:p>
+          <a:p>
+            <a:pPr>
+              <a:spcAft>
+                <a:spcPts val="800"/>
+              </a:spcAft>
+            </a:pPr>
+            <a:r>
+              <a:rPr sz="1500" b="1" i="0">
+                <a:solidFill>
+                  <a:srgbClr val="2F7DC8"/>
+                </a:solidFill>
+                <a:latin typeface="Arial"/>
+              </a:rPr>
+              <a:t>▪  </a:t>
+            </a:r>
+            <a:r>
+              <a:rPr sz="1500" b="0" i="0">
+                <a:solidFill>
+                  <a:srgbClr val="333740"/>
+                </a:solidFill>
+                <a:latin typeface="Arial"/>
+              </a:rPr>
+              <a:t>Validation on a covariate-driven (plasmode) design, beyond the analytic binary toy, to show the conclusions are not an artifact of the toy.</a:t>
+            </a:r>
+          </a:p>
+        </p:txBody>
+      </p:sp>
+      <p:sp>
+        <p:nvSpPr>
+          <p:cNvPr id="6" name="TextBox 5"/>
+          <p:cNvSpPr txBox="1"/>
+          <p:nvPr/>
+        </p:nvSpPr>
+        <p:spPr>
+          <a:xfrm>
+            <a:off x="11094415" y="6455664"/>
+            <a:ext cx="914400" cy="320040"/>
+          </a:xfrm>
+          <a:prstGeom prst="rect">
+            <a:avLst/>
+          </a:prstGeom>
+          <a:noFill/>
+        </p:spPr>
+        <p:txBody>
+          <a:bodyPr wrap="square" anchor="t">
+            <a:spAutoFit/>
+          </a:bodyPr>
+          <a:lstStyle/>
+          <a:p>
+            <a:pPr algn="r"/>
+            <a:r>
+              <a:rPr sz="1100" b="0" i="0">
+                <a:solidFill>
+                  <a:srgbClr val="6B7280"/>
+                </a:solidFill>
+                <a:latin typeface="Arial"/>
+              </a:rPr>
+              <a:t>28</a:t>
+            </a:r>
+          </a:p>
+        </p:txBody>
+      </p:sp>
+    </p:spTree>
+  </p:cSld>
+  <p:clrMapOvr>
+    <a:masterClrMapping/>
+  </p:clrMapOvr>
+</p:sld>
+</file>
+
+<file path=ppt/slides/slide34.xml><?xml version="1.0" encoding="utf-8"?>
+<p:sld xmlns:a="http://schemas.openxmlformats.org/drawingml/2006/main" xmlns:p="http://schemas.openxmlformats.org/presentationml/2006/main" xmlns:r="http://schemas.openxmlformats.org/officeDocument/2006/relationships">
+  <p:cSld>
+    <p:spTree>
+      <p:nvGrpSpPr>
+        <p:cNvPr id="1" name=""/>
+        <p:cNvGrpSpPr/>
+        <p:nvPr/>
+      </p:nvGrpSpPr>
+      <p:grpSpPr/>
+      <p:sp>
+        <p:nvSpPr>
+          <p:cNvPr id="2" name="Rectangle 1"/>
+          <p:cNvSpPr/>
+          <p:nvPr/>
+        </p:nvSpPr>
+        <p:spPr>
+          <a:xfrm>
+            <a:off x="0" y="0"/>
+            <a:ext cx="12191695" cy="128016"/>
+          </a:xfrm>
+          <a:prstGeom prst="rect">
+            <a:avLst/>
+          </a:prstGeom>
+          <a:solidFill>
+            <a:srgbClr val="2F7DC8"/>
+          </a:solidFill>
+          <a:ln>
+            <a:noFill/>
+          </a:ln>
+          <a:effectLst/>
+        </p:spPr>
+        <p:style>
+          <a:lnRef idx="1">
+            <a:schemeClr val="accent1"/>
+          </a:lnRef>
+          <a:fillRef idx="3">
+            <a:schemeClr val="accent1"/>
+          </a:fillRef>
+          <a:effectRef idx="2">
+            <a:schemeClr val="accent1"/>
+          </a:effectRef>
+          <a:fontRef idx="minor">
+            <a:schemeClr val="lt1"/>
+          </a:fontRef>
+        </p:style>
+        <p:txBody>
+          <a:bodyPr rtlCol="0" anchor="ctr"/>
+          <a:lstStyle/>
+          <a:p>
+            <a:pPr algn="ctr"/>
+          </a:p>
+        </p:txBody>
+      </p:sp>
+      <p:sp>
+        <p:nvSpPr>
+          <p:cNvPr id="3" name="TextBox 2"/>
+          <p:cNvSpPr txBox="1"/>
+          <p:nvPr/>
+        </p:nvSpPr>
+        <p:spPr>
+          <a:xfrm>
+            <a:off x="502920" y="274320"/>
+            <a:ext cx="11185855" cy="932688"/>
+          </a:xfrm>
+          <a:prstGeom prst="rect">
+            <a:avLst/>
+          </a:prstGeom>
+          <a:noFill/>
+        </p:spPr>
+        <p:txBody>
+          <a:bodyPr wrap="square" anchor="t">
+            <a:spAutoFit/>
+          </a:bodyPr>
+          <a:lstStyle/>
+          <a:p>
+            <a:pPr>
+              <a:spcAft>
+                <a:spcPts val="200"/>
+              </a:spcAft>
+            </a:pPr>
+            <a:r>
+              <a:rPr sz="1250" b="1" i="0">
+                <a:solidFill>
+                  <a:srgbClr val="2F7DC8"/>
+                </a:solidFill>
+                <a:latin typeface="Arial"/>
+              </a:rPr>
+              <a:t>TAKEAWAYS</a:t>
+            </a:r>
+          </a:p>
+          <a:p>
+            <a:r>
+              <a:rPr sz="2700" b="1" i="0">
+                <a:solidFill>
+                  <a:srgbClr val="1F2A44"/>
+                </a:solidFill>
+                <a:latin typeface="Arial"/>
+              </a:rPr>
+              <a:t>Summary</a:t>
+            </a:r>
+          </a:p>
+        </p:txBody>
+      </p:sp>
+      <p:sp>
+        <p:nvSpPr>
+          <p:cNvPr id="4" name="Rectangle 3"/>
+          <p:cNvSpPr/>
+          <p:nvPr/>
+        </p:nvSpPr>
+        <p:spPr>
+          <a:xfrm>
+            <a:off x="521207" y="1225296"/>
+            <a:ext cx="2103120" cy="41148"/>
+          </a:xfrm>
+          <a:prstGeom prst="rect">
+            <a:avLst/>
+          </a:prstGeom>
+          <a:solidFill>
+            <a:srgbClr val="2F7DC8"/>
+          </a:solidFill>
+          <a:ln>
+            <a:noFill/>
+          </a:ln>
+          <a:effectLst/>
+        </p:spPr>
+        <p:style>
+          <a:lnRef idx="1">
+            <a:schemeClr val="accent1"/>
+          </a:lnRef>
+          <a:fillRef idx="3">
+            <a:schemeClr val="accent1"/>
+          </a:fillRef>
+          <a:effectRef idx="2">
+            <a:schemeClr val="accent1"/>
+          </a:effectRef>
+          <a:fontRef idx="minor">
+            <a:schemeClr val="lt1"/>
+          </a:fontRef>
+        </p:style>
+        <p:txBody>
+          <a:bodyPr rtlCol="0" anchor="ctr"/>
+          <a:lstStyle/>
+          <a:p>
+            <a:pPr algn="ctr"/>
+          </a:p>
+        </p:txBody>
+      </p:sp>
+      <p:sp>
+        <p:nvSpPr>
+          <p:cNvPr id="5" name="TextBox 4"/>
+          <p:cNvSpPr txBox="1"/>
+          <p:nvPr/>
+        </p:nvSpPr>
+        <p:spPr>
+          <a:xfrm>
+            <a:off x="502920" y="1371600"/>
+            <a:ext cx="11247120" cy="5120640"/>
+          </a:xfrm>
+          <a:prstGeom prst="rect">
+            <a:avLst/>
+          </a:prstGeom>
+          <a:noFill/>
+        </p:spPr>
+        <p:txBody>
+          <a:bodyPr wrap="square" anchor="t">
+            <a:spAutoFit/>
+          </a:bodyPr>
+          <a:lstStyle/>
           <a:p>
             <a:pPr>
               <a:spcBef>
@@ -12484,82 +13334,32 @@
                 </a:solidFill>
                 <a:latin typeface="Arial"/>
               </a:rPr>
-              <a:t>Three design choices that make it work</a:t>
-            </a:r>
-          </a:p>
-          <a:p>
-            <a:pPr lvl="1">
-              <a:spcAft>
-                <a:spcPts val="600"/>
-              </a:spcAft>
-            </a:pPr>
-            <a:r>
-              <a:rPr sz="1350" b="0" i="0">
-                <a:solidFill>
-                  <a:srgbClr val="6B7280"/>
-                </a:solidFill>
-                <a:latin typeface="Arial"/>
-              </a:rPr>
-              <a:t>–  </a:t>
-            </a:r>
-            <a:r>
-              <a:rPr sz="1350" b="0" i="0">
+              <a:t>Problem</a:t>
+            </a:r>
+          </a:p>
+          <a:p>
+            <a:pPr>
+              <a:spcAft>
+                <a:spcPts val="800"/>
+              </a:spcAft>
+            </a:pPr>
+            <a:r>
+              <a:rPr sz="1450" b="1" i="0">
+                <a:solidFill>
+                  <a:srgbClr val="2F7DC8"/>
+                </a:solidFill>
+                <a:latin typeface="Arial"/>
+              </a:rPr>
+              <a:t>▪  </a:t>
+            </a:r>
+            <a:r>
+              <a:rPr sz="1450" b="0" i="0">
                 <a:solidFill>
                   <a:srgbClr val="333740"/>
                 </a:solidFill>
                 <a:latin typeface="Arial"/>
               </a:rPr>
-              <a:t>Symmetric trimming → the borrowed control mean stays unbiased.</a:t>
-            </a:r>
-          </a:p>
-          <a:p>
-            <a:pPr lvl="1">
-              <a:spcAft>
-                <a:spcPts val="600"/>
-              </a:spcAft>
-            </a:pPr>
-            <a:r>
-              <a:rPr sz="1350" b="0" i="0">
-                <a:solidFill>
-                  <a:srgbClr val="6B7280"/>
-                </a:solidFill>
-                <a:latin typeface="Arial"/>
-              </a:rPr>
-              <a:t>–  </a:t>
-            </a:r>
-            <a:r>
-              <a:rPr sz="1350" b="0" i="0">
-                <a:solidFill>
-                  <a:srgbClr val="333740"/>
-                </a:solidFill>
-                <a:latin typeface="Arial"/>
-              </a:rPr>
-              <a:t>CV+ rank calibration → does not waste the scarce randomized controls (the efficiency lever).</a:t>
-            </a:r>
-          </a:p>
-          <a:p>
-            <a:pPr lvl="1">
-              <a:spcAft>
-                <a:spcPts val="600"/>
-              </a:spcAft>
-            </a:pPr>
-            <a:r>
-              <a:rPr sz="1350" b="0" i="0">
-                <a:solidFill>
-                  <a:srgbClr val="6B7280"/>
-                </a:solidFill>
-                <a:latin typeface="Arial"/>
-              </a:rPr>
-              <a:t>–  </a:t>
-            </a:r>
-            <a:r>
-              <a:rPr sz="1350" b="0" i="0">
-                <a:solidFill>
-                  <a:srgbClr val="333740"/>
-                </a:solidFill>
-                <a:latin typeface="Arial"/>
-              </a:rPr>
-              <a:t>Estimand-matched score → detects the drift that actually matters.</a:t>
+              <a:t>Borrow external controls to sharpen a hybrid trial — without importing bias from incompatible ones.</a:t>
             </a:r>
           </a:p>
           <a:p>
@@ -12578,6 +13378,144 @@
                 </a:solidFill>
                 <a:latin typeface="Arial"/>
               </a:rPr>
+              <a:t>Idea</a:t>
+            </a:r>
+          </a:p>
+          <a:p>
+            <a:pPr>
+              <a:spcAft>
+                <a:spcPts val="800"/>
+              </a:spcAft>
+            </a:pPr>
+            <a:r>
+              <a:rPr sz="1450" b="1" i="0">
+                <a:solidFill>
+                  <a:srgbClr val="2F7DC8"/>
+                </a:solidFill>
+                <a:latin typeface="Arial"/>
+              </a:rPr>
+              <a:t>▪  </a:t>
+            </a:r>
+            <a:r>
+              <a:rPr sz="1450" b="0" i="0">
+                <a:solidFill>
+                  <a:srgbClr val="333740"/>
+                </a:solidFill>
+                <a:latin typeface="Arial"/>
+              </a:rPr>
+              <a:t>Rank each EC's longitudinal residual score among the randomized controls — weighted to absorb covariate shift — and borrow only the conforming ones through a transported AIPW.</a:t>
+            </a:r>
+          </a:p>
+          <a:p>
+            <a:pPr>
+              <a:spcBef>
+                <a:spcPts val="400"/>
+              </a:spcBef>
+              <a:spcAft>
+                <a:spcPts val="900"/>
+              </a:spcAft>
+            </a:pPr>
+            <a:r>
+              <a:rPr sz="1600" b="1" i="0">
+                <a:solidFill>
+                  <a:srgbClr val="2F7DC8"/>
+                </a:solidFill>
+                <a:latin typeface="Arial"/>
+              </a:rPr>
+              <a:t>Three design choices that make it work</a:t>
+            </a:r>
+          </a:p>
+          <a:p>
+            <a:pPr lvl="1">
+              <a:spcAft>
+                <a:spcPts val="600"/>
+              </a:spcAft>
+            </a:pPr>
+            <a:r>
+              <a:rPr sz="1350" b="0" i="0">
+                <a:solidFill>
+                  <a:srgbClr val="6B7280"/>
+                </a:solidFill>
+                <a:latin typeface="Arial"/>
+              </a:rPr>
+              <a:t>–  </a:t>
+            </a:r>
+            <a:r>
+              <a:rPr sz="1350" b="0" i="0">
+                <a:solidFill>
+                  <a:srgbClr val="333740"/>
+                </a:solidFill>
+                <a:latin typeface="Arial"/>
+              </a:rPr>
+              <a:t>Symmetric trimming → the borrowed control mean stays unbiased.</a:t>
+            </a:r>
+          </a:p>
+          <a:p>
+            <a:pPr lvl="1">
+              <a:spcAft>
+                <a:spcPts val="600"/>
+              </a:spcAft>
+            </a:pPr>
+            <a:r>
+              <a:rPr sz="1350" b="0" i="0">
+                <a:solidFill>
+                  <a:srgbClr val="6B7280"/>
+                </a:solidFill>
+                <a:latin typeface="Arial"/>
+              </a:rPr>
+              <a:t>–  </a:t>
+            </a:r>
+            <a:r>
+              <a:rPr sz="1350" b="0" i="0">
+                <a:solidFill>
+                  <a:srgbClr val="333740"/>
+                </a:solidFill>
+                <a:latin typeface="Arial"/>
+              </a:rPr>
+              <a:t>CV+ rank calibration → does not waste the scarce randomized controls (the efficiency lever).</a:t>
+            </a:r>
+          </a:p>
+          <a:p>
+            <a:pPr lvl="1">
+              <a:spcAft>
+                <a:spcPts val="600"/>
+              </a:spcAft>
+            </a:pPr>
+            <a:r>
+              <a:rPr sz="1350" b="0" i="0">
+                <a:solidFill>
+                  <a:srgbClr val="6B7280"/>
+                </a:solidFill>
+                <a:latin typeface="Arial"/>
+              </a:rPr>
+              <a:t>–  </a:t>
+            </a:r>
+            <a:r>
+              <a:rPr sz="1350" b="0" i="0">
+                <a:solidFill>
+                  <a:srgbClr val="333740"/>
+                </a:solidFill>
+                <a:latin typeface="Arial"/>
+              </a:rPr>
+              <a:t>Estimator-matched score (c = the estimator's a) → detects the drift that actually matters.</a:t>
+            </a:r>
+          </a:p>
+          <a:p>
+            <a:pPr>
+              <a:spcBef>
+                <a:spcPts val="400"/>
+              </a:spcBef>
+              <a:spcAft>
+                <a:spcPts val="900"/>
+              </a:spcAft>
+            </a:pPr>
+            <a:r>
+              <a:rPr sz="1600" b="1" i="0">
+                <a:solidFill>
+                  <a:srgbClr val="2F7DC8"/>
+                </a:solidFill>
+                <a:latin typeface="Arial"/>
+              </a:rPr>
               <a:t>Why rank, not a raw residual</a:t>
             </a:r>
           </a:p>
@@ -12629,7 +13567,7 @@
                 </a:solidFill>
                 <a:latin typeface="Arial"/>
               </a:rPr>
-              <a:t>27</a:t>
+              <a:t>29</a:t>
             </a:r>
           </a:p>
         </p:txBody>
@@ -14407,7 +15345,7 @@
                 </a:solidFill>
                 <a:latin typeface="Arial"/>
               </a:rPr>
-              <a:t>ME-c: the mean of the ONE estimand contrast is equal — all that IDENTIFICATION needs.</a:t>
+              <a:t>ME-c: the mean of ONE contrast is equal — and c is the contrast the ESTIMATOR uses. All that IDENTIFICATION needs.</a:t>
             </a:r>
           </a:p>
           <a:p>
@@ -15357,7 +16295,7 @@
                 </a:solidFill>
                 <a:latin typeface="Arial"/>
               </a:rPr>
-              <a:t>Design target: choose the score so that “looks compatible on the score” implies “compatible for your estimand (ME-c).”</a:t>
+              <a:t>Design target: choose the score so that “looks compatible on the score” implies “compatible for the functional your ESTIMATOR uses” — i.e. ME-c indexed by the estimator's a.</a:t>
             </a:r>
           </a:p>
         </p:txBody>
